--- a/output/part3.pptx
+++ b/output/part3.pptx
@@ -15,8 +15,8 @@
   <p:notesMasterIdLst>
     <p:notesMasterId r:id="rId8"/>
   </p:notesMasterIdLst>
-  <p:sldSz cx="12192000" cy="6858000"/>
-  <p:notesSz cx="6858000" cy="12192000"/>
+  <p:sldSz cx="9144000" cy="5029200"/>
+  <p:notesSz cx="5029200" cy="9144000"/>
   <p:defaultTextStyle>
     <a:lvl1pPr marL="0" algn="l" defTabSz="914400" rtl="0" eaLnBrk="1" latinLnBrk="0" hangingPunct="1">
       <a:defRPr sz="1800" kern="1200">

--- a/output/part3.pptx
+++ b/output/part3.pptx
@@ -1546,7 +1546,7 @@
         <p:spPr>
           <a:xfrm>
             <a:off x="4572000" y="502920"/>
-            <a:ext cx="0" cy="4434840"/>
+            <a:ext cx="9144" cy="4434840"/>
           </a:xfrm>
           <a:prstGeom prst="line">
             <a:avLst/>
@@ -2284,7 +2284,7 @@
         <p:spPr>
           <a:xfrm>
             <a:off x="6766560" y="1627632"/>
-            <a:ext cx="457200" cy="0"/>
+            <a:ext cx="457200" cy="9144"/>
           </a:xfrm>
           <a:prstGeom prst="line">
             <a:avLst/>
@@ -5665,7 +5665,7 @@
         <p:spPr>
           <a:xfrm>
             <a:off x="2697480" y="1399032"/>
-            <a:ext cx="822960" cy="0"/>
+            <a:ext cx="822960" cy="9144"/>
           </a:xfrm>
           <a:prstGeom prst="line">
             <a:avLst/>
@@ -5893,7 +5893,7 @@
         <p:spPr>
           <a:xfrm>
             <a:off x="5120640" y="1399032"/>
-            <a:ext cx="777240" cy="0"/>
+            <a:ext cx="777240" cy="9144"/>
           </a:xfrm>
           <a:prstGeom prst="line">
             <a:avLst/>
@@ -6121,7 +6121,7 @@
         <p:spPr>
           <a:xfrm>
             <a:off x="7498080" y="1399032"/>
-            <a:ext cx="594360" cy="0"/>
+            <a:ext cx="594360" cy="9144"/>
           </a:xfrm>
           <a:prstGeom prst="line">
             <a:avLst/>
@@ -8322,7 +8322,7 @@
         <p:spPr>
           <a:xfrm>
             <a:off x="6537960" y="1325880"/>
-            <a:ext cx="457200" cy="0"/>
+            <a:ext cx="457200" cy="9144"/>
           </a:xfrm>
           <a:prstGeom prst="line">
             <a:avLst/>
@@ -8385,7 +8385,7 @@
         <p:spPr>
           <a:xfrm>
             <a:off x="5733288" y="1901952"/>
-            <a:ext cx="0" cy="402336"/>
+            <a:ext cx="9144" cy="402336"/>
           </a:xfrm>
           <a:prstGeom prst="line">
             <a:avLst/>
@@ -8409,7 +8409,7 @@
         <p:spPr>
           <a:xfrm>
             <a:off x="6903720" y="2880360"/>
-            <a:ext cx="109728" cy="0"/>
+            <a:ext cx="109728" cy="9144"/>
           </a:xfrm>
           <a:prstGeom prst="line">
             <a:avLst/>
@@ -8846,7 +8846,7 @@
         <p:spPr>
           <a:xfrm>
             <a:off x="1508760" y="1188720"/>
-            <a:ext cx="731520" cy="0"/>
+            <a:ext cx="731520" cy="9144"/>
           </a:xfrm>
           <a:prstGeom prst="line">
             <a:avLst/>
@@ -9074,7 +9074,7 @@
         <p:spPr>
           <a:xfrm>
             <a:off x="3657600" y="1188720"/>
-            <a:ext cx="731520" cy="0"/>
+            <a:ext cx="731520" cy="9144"/>
           </a:xfrm>
           <a:prstGeom prst="line">
             <a:avLst/>
@@ -9302,7 +9302,7 @@
         <p:spPr>
           <a:xfrm>
             <a:off x="5943600" y="1188720"/>
-            <a:ext cx="731520" cy="0"/>
+            <a:ext cx="731520" cy="9144"/>
           </a:xfrm>
           <a:prstGeom prst="line">
             <a:avLst/>
@@ -10321,7 +10321,7 @@
         <p:spPr>
           <a:xfrm>
             <a:off x="4572000" y="502920"/>
-            <a:ext cx="0" cy="2852928"/>
+            <a:ext cx="9144" cy="2852928"/>
           </a:xfrm>
           <a:prstGeom prst="line">
             <a:avLst/>

--- a/output/part3.pptx
+++ b/output/part3.pptx
@@ -1302,7 +1302,7 @@
     <p:bg>
       <p:bgPr>
         <a:solidFill>
-          <a:srgbClr val="0D1117"/>
+          <a:srgbClr val="FFFDF8"/>
         </a:solidFill>
       </p:bgPr>
     </p:bg>
@@ -1335,11 +1335,11 @@
             <a:avLst/>
           </a:prstGeom>
           <a:solidFill>
-            <a:srgbClr val="161B22"/>
+            <a:srgbClr val="F5F1EB"/>
           </a:solidFill>
           <a:ln w="6350">
             <a:solidFill>
-              <a:srgbClr val="30363D"/>
+              <a:srgbClr val="D6CCBF"/>
             </a:solidFill>
             <a:prstDash val="solid"/>
           </a:ln>
@@ -1360,11 +1360,11 @@
             <a:avLst/>
           </a:prstGeom>
           <a:solidFill>
-            <a:srgbClr val="0D8A6C"/>
+            <a:srgbClr val="4A9B8E"/>
           </a:solidFill>
           <a:ln w="12700">
             <a:solidFill>
-              <a:srgbClr val="0D8A6C"/>
+              <a:srgbClr val="4A9B8E"/>
             </a:solidFill>
             <a:prstDash val="solid"/>
           </a:ln>
@@ -1397,13 +1397,13 @@
             <a:r>
               <a:rPr lang="en-US" sz="1600" b="1" dirty="0">
                 <a:solidFill>
-                  <a:srgbClr val="E6EDF3"/>
+                  <a:srgbClr val="2D2926"/>
                 </a:solidFill>
                 <a:latin typeface="Calibri" pitchFamily="34" charset="0"/>
                 <a:ea typeface="Calibri" pitchFamily="34" charset="-122"/>
                 <a:cs typeface="Calibri" pitchFamily="34" charset="-120"/>
               </a:rPr>
-              <a:t>Container 是什麼？解決什麼問題？</a:t>
+              <a:t>What Is a Container? What Problems Does It Solve?</a:t>
             </a:r>
             <a:endParaRPr lang="en-US" sz="1600" dirty="0"/>
           </a:p>
@@ -1436,13 +1436,13 @@
             <a:r>
               <a:rPr lang="en-US" sz="750" dirty="0">
                 <a:solidFill>
-                  <a:srgbClr val="8B949E"/>
+                  <a:srgbClr val="8A8078"/>
                 </a:solidFill>
                 <a:latin typeface="Calibri" pitchFamily="34" charset="0"/>
                 <a:ea typeface="Calibri" pitchFamily="34" charset="-122"/>
                 <a:cs typeface="Calibri" pitchFamily="34" charset="-120"/>
               </a:rPr>
-              <a:t>複雜度  5/10</a:t>
+              <a:t>Complexity  5/10</a:t>
             </a:r>
             <a:endParaRPr lang="en-US" sz="750" dirty="0"/>
           </a:p>
@@ -1463,11 +1463,11 @@
             <a:avLst/>
           </a:prstGeom>
           <a:solidFill>
-            <a:srgbClr val="252D38"/>
+            <a:srgbClr val="D6CCBF"/>
           </a:solidFill>
           <a:ln w="12700">
             <a:solidFill>
-              <a:srgbClr val="252D38"/>
+              <a:srgbClr val="D6CCBF"/>
             </a:solidFill>
             <a:prstDash val="solid"/>
           </a:ln>
@@ -1488,11 +1488,11 @@
             <a:avLst/>
           </a:prstGeom>
           <a:solidFill>
-            <a:srgbClr val="D29922"/>
+            <a:srgbClr val="B8892C"/>
           </a:solidFill>
           <a:ln w="12700">
             <a:solidFill>
-              <a:srgbClr val="D29922"/>
+              <a:srgbClr val="B8892C"/>
             </a:solidFill>
             <a:prstDash val="solid"/>
           </a:ln>
@@ -1525,13 +1525,13 @@
             <a:r>
               <a:rPr lang="en-US" sz="850" dirty="0">
                 <a:solidFill>
-                  <a:srgbClr val="8B949E"/>
+                  <a:srgbClr val="8A8078"/>
                 </a:solidFill>
                 <a:latin typeface="Calibri" pitchFamily="34" charset="0"/>
                 <a:ea typeface="Calibri" pitchFamily="34" charset="-122"/>
                 <a:cs typeface="Calibri" pitchFamily="34" charset="-120"/>
               </a:rPr>
-              <a:t>PART 3  ·  21 / 50</a:t>
+              <a:t>PART 3</a:t>
             </a:r>
             <a:endParaRPr lang="en-US" sz="850" dirty="0"/>
           </a:p>
@@ -1554,7 +1554,7 @@
           <a:noFill/>
           <a:ln w="9525">
             <a:solidFill>
-              <a:srgbClr val="30363D"/>
+              <a:srgbClr val="D6CCBF"/>
             </a:solidFill>
             <a:prstDash val="solid"/>
           </a:ln>
@@ -1577,11 +1577,11 @@
             </a:avLst>
           </a:prstGeom>
           <a:solidFill>
-            <a:srgbClr val="2A0F0F"/>
+            <a:srgbClr val="F8ECEC"/>
           </a:solidFill>
           <a:ln w="12700">
             <a:solidFill>
-              <a:srgbClr val="F85149"/>
+              <a:srgbClr val="C4605B"/>
             </a:solidFill>
             <a:prstDash val="solid"/>
           </a:ln>
@@ -1614,13 +1614,13 @@
             <a:r>
               <a:rPr lang="en-US" sz="1200" b="1" dirty="0">
                 <a:solidFill>
-                  <a:srgbClr val="F85149"/>
+                  <a:srgbClr val="C4605B"/>
                 </a:solidFill>
                 <a:latin typeface="Calibri" pitchFamily="34" charset="0"/>
                 <a:ea typeface="Calibri" pitchFamily="34" charset="-122"/>
                 <a:cs typeface="Calibri" pitchFamily="34" charset="-120"/>
               </a:rPr>
-              <a:t>❌  Container 之前</a:t>
+              <a:t>❌  Before Containers</a:t>
             </a:r>
             <a:endParaRPr lang="en-US" sz="1200" dirty="0"/>
           </a:p>
@@ -1643,11 +1643,11 @@
             </a:avLst>
           </a:prstGeom>
           <a:solidFill>
-            <a:srgbClr val="2A0F0F"/>
+            <a:srgbClr val="F8ECEC"/>
           </a:solidFill>
           <a:ln w="12700">
             <a:solidFill>
-              <a:srgbClr val="F85149"/>
+              <a:srgbClr val="C4605B"/>
             </a:solidFill>
             <a:prstDash val="solid"/>
           </a:ln>
@@ -1680,7 +1680,7 @@
             <a:r>
               <a:rPr lang="en-US" sz="1100" b="1" dirty="0">
                 <a:solidFill>
-                  <a:srgbClr val="E6EDF3"/>
+                  <a:srgbClr val="2D2926"/>
                 </a:solidFill>
                 <a:latin typeface="Calibri" pitchFamily="34" charset="0"/>
                 <a:ea typeface="Calibri" pitchFamily="34" charset="-122"/>
@@ -1719,13 +1719,13 @@
             <a:r>
               <a:rPr lang="en-US" sz="900" dirty="0">
                 <a:solidFill>
-                  <a:srgbClr val="8B949E"/>
+                  <a:srgbClr val="8A8078"/>
                 </a:solidFill>
                 <a:latin typeface="Calibri" pitchFamily="34" charset="0"/>
                 <a:ea typeface="Calibri" pitchFamily="34" charset="-122"/>
                 <a:cs typeface="Calibri" pitchFamily="34" charset="-120"/>
               </a:rPr>
-              <a:t>手動 brew install 所有依賴</a:t>
+              <a:t>Manually brew install all dependencies</a:t>
             </a:r>
             <a:endParaRPr lang="en-US" sz="900" dirty="0"/>
           </a:p>
@@ -1748,11 +1748,11 @@
             </a:avLst>
           </a:prstGeom>
           <a:solidFill>
-            <a:srgbClr val="2A1F00"/>
+            <a:srgbClr val="F3EDE0"/>
           </a:solidFill>
           <a:ln w="12700">
             <a:solidFill>
-              <a:srgbClr val="D29922"/>
+              <a:srgbClr val="B8892C"/>
             </a:solidFill>
             <a:prstDash val="solid"/>
           </a:ln>
@@ -1785,7 +1785,7 @@
             <a:r>
               <a:rPr lang="en-US" sz="1100" b="1" dirty="0">
                 <a:solidFill>
-                  <a:srgbClr val="E6EDF3"/>
+                  <a:srgbClr val="2D2926"/>
                 </a:solidFill>
                 <a:latin typeface="Calibri" pitchFamily="34" charset="0"/>
                 <a:ea typeface="Calibri" pitchFamily="34" charset="-122"/>
@@ -1824,13 +1824,13 @@
             <a:r>
               <a:rPr lang="en-US" sz="900" dirty="0">
                 <a:solidFill>
-                  <a:srgbClr val="8B949E"/>
+                  <a:srgbClr val="8A8078"/>
                 </a:solidFill>
                 <a:latin typeface="Calibri" pitchFamily="34" charset="0"/>
                 <a:ea typeface="Calibri" pitchFamily="34" charset="-122"/>
                 <a:cs typeface="Calibri" pitchFamily="34" charset="-120"/>
               </a:rPr>
-              <a:t>套件版本與 Dev 不一致，偶爾出現神秘錯誤</a:t>
+              <a:t>Package versions differ from Dev, random mysterious errors</a:t>
             </a:r>
             <a:endParaRPr lang="en-US" sz="900" dirty="0"/>
           </a:p>
@@ -1853,11 +1853,11 @@
             </a:avLst>
           </a:prstGeom>
           <a:solidFill>
-            <a:srgbClr val="2A0F0F"/>
+            <a:srgbClr val="F8ECEC"/>
           </a:solidFill>
           <a:ln w="12700">
             <a:solidFill>
-              <a:srgbClr val="F85149"/>
+              <a:srgbClr val="C4605B"/>
             </a:solidFill>
             <a:prstDash val="solid"/>
           </a:ln>
@@ -1890,7 +1890,7 @@
             <a:r>
               <a:rPr lang="en-US" sz="1100" b="1" dirty="0">
                 <a:solidFill>
-                  <a:srgbClr val="F85149"/>
+                  <a:srgbClr val="C4605B"/>
                 </a:solidFill>
                 <a:latin typeface="Calibri" pitchFamily="34" charset="0"/>
                 <a:ea typeface="Calibri" pitchFamily="34" charset="-122"/>
@@ -1929,13 +1929,13 @@
             <a:r>
               <a:rPr lang="en-US" sz="900" dirty="0">
                 <a:solidFill>
-                  <a:srgbClr val="8B949E"/>
+                  <a:srgbClr val="8A8078"/>
                 </a:solidFill>
                 <a:latin typeface="Calibri" pitchFamily="34" charset="0"/>
                 <a:ea typeface="Calibri" pitchFamily="34" charset="-122"/>
                 <a:cs typeface="Calibri" pitchFamily="34" charset="-120"/>
               </a:rPr>
-              <a:t>系統內建 Python，幾乎無法升級</a:t>
+              <a:t>System-bundled Python, nearly impossible to upgrade</a:t>
             </a:r>
             <a:endParaRPr lang="en-US" sz="900" dirty="0"/>
           </a:p>
@@ -1958,11 +1958,11 @@
             </a:avLst>
           </a:prstGeom>
           <a:solidFill>
-            <a:srgbClr val="2A0F0F"/>
+            <a:srgbClr val="F8ECEC"/>
           </a:solidFill>
           <a:ln w="12700">
             <a:solidFill>
-              <a:srgbClr val="F85149"/>
+              <a:srgbClr val="C4605B"/>
             </a:solidFill>
             <a:prstDash val="solid"/>
           </a:ln>
@@ -1995,13 +1995,13 @@
             <a:r>
               <a:rPr lang="en-US" sz="1050" b="1" dirty="0">
                 <a:solidFill>
-                  <a:srgbClr val="F85149"/>
+                  <a:srgbClr val="C4605B"/>
                 </a:solidFill>
                 <a:latin typeface="Calibri" pitchFamily="34" charset="0"/>
                 <a:ea typeface="Calibri" pitchFamily="34" charset="-122"/>
                 <a:cs typeface="Calibri" pitchFamily="34" charset="-120"/>
               </a:rPr>
-              <a:t>🔥 「在我這裡可以跑啊！」— 版本地獄</a:t>
+              <a:t>🔥 "It works on my machine!" — Version Hell</a:t>
             </a:r>
             <a:endParaRPr lang="en-US" sz="1050" dirty="0"/>
           </a:p>
@@ -2024,11 +2024,11 @@
             </a:avLst>
           </a:prstGeom>
           <a:solidFill>
-            <a:srgbClr val="0F2A1A"/>
+            <a:srgbClr val="E5F0E9"/>
           </a:solidFill>
           <a:ln w="12700">
             <a:solidFill>
-              <a:srgbClr val="3FB950"/>
+              <a:srgbClr val="4A9968"/>
             </a:solidFill>
             <a:prstDash val="solid"/>
           </a:ln>
@@ -2061,13 +2061,13 @@
             <a:r>
               <a:rPr lang="en-US" sz="1200" b="1" dirty="0">
                 <a:solidFill>
-                  <a:srgbClr val="3FB950"/>
+                  <a:srgbClr val="4A9968"/>
                 </a:solidFill>
                 <a:latin typeface="Calibri" pitchFamily="34" charset="0"/>
                 <a:ea typeface="Calibri" pitchFamily="34" charset="-122"/>
                 <a:cs typeface="Calibri" pitchFamily="34" charset="-120"/>
               </a:rPr>
-              <a:t>✅  使用 Container 之後</a:t>
+              <a:t>✅  With Containers</a:t>
             </a:r>
             <a:endParaRPr lang="en-US" sz="1200" dirty="0"/>
           </a:p>
@@ -2090,18 +2090,18 @@
             </a:avLst>
           </a:prstGeom>
           <a:solidFill>
-            <a:srgbClr val="0D1117"/>
+            <a:srgbClr val="2D2926"/>
           </a:solidFill>
           <a:ln w="12700">
             <a:solidFill>
-              <a:srgbClr val="30363D"/>
+              <a:srgbClr val="D6CCBF"/>
             </a:solidFill>
             <a:prstDash val="solid"/>
           </a:ln>
           <a:effectLst>
             <a:outerShdw sx="100000" sy="100000" kx="0" ky="0" algn="bl" rotWithShape="0" blurRad="127000" dist="50800" dir="2700000">
-              <a:srgbClr val="000000">
-                <a:alpha val="50000"/>
+              <a:srgbClr val="9E9488">
+                <a:alpha val="15000"/>
               </a:srgbClr>
             </a:outerShdw>
           </a:effectLst>
@@ -2124,11 +2124,11 @@
             </a:avLst>
           </a:prstGeom>
           <a:solidFill>
-            <a:srgbClr val="1C2128"/>
+            <a:srgbClr val="ECE6DD"/>
           </a:solidFill>
           <a:ln w="6350">
             <a:solidFill>
-              <a:srgbClr val="30363D"/>
+              <a:srgbClr val="D6CCBF"/>
             </a:solidFill>
             <a:prstDash val="solid"/>
           </a:ln>
@@ -2161,7 +2161,7 @@
             <a:r>
               <a:rPr lang="en-US" sz="800" b="1" dirty="0">
                 <a:solidFill>
-                  <a:srgbClr val="8B949E"/>
+                  <a:srgbClr val="8A8078"/>
                 </a:solidFill>
                 <a:latin typeface="Consolas" pitchFamily="34" charset="0"/>
                 <a:ea typeface="Consolas" pitchFamily="34" charset="-122"/>
@@ -2203,7 +2203,7 @@
             <a:r>
               <a:rPr lang="en-US" sz="950" dirty="0">
                 <a:solidFill>
-                  <a:srgbClr val="E6EDF3"/>
+                  <a:srgbClr val="2D2926"/>
                 </a:solidFill>
                 <a:latin typeface="Consolas" pitchFamily="34" charset="0"/>
                 <a:ea typeface="Consolas" pitchFamily="34" charset="-122"/>
@@ -2223,7 +2223,7 @@
             <a:r>
               <a:rPr lang="en-US" sz="950" dirty="0">
                 <a:solidFill>
-                  <a:srgbClr val="E6EDF3"/>
+                  <a:srgbClr val="2D2926"/>
                 </a:solidFill>
                 <a:latin typeface="Consolas" pitchFamily="34" charset="0"/>
                 <a:ea typeface="Consolas" pitchFamily="34" charset="-122"/>
@@ -2243,7 +2243,7 @@
             <a:r>
               <a:rPr lang="en-US" sz="950" dirty="0">
                 <a:solidFill>
-                  <a:srgbClr val="E6EDF3"/>
+                  <a:srgbClr val="2D2926"/>
                 </a:solidFill>
                 <a:latin typeface="Consolas" pitchFamily="34" charset="0"/>
                 <a:ea typeface="Consolas" pitchFamily="34" charset="-122"/>
@@ -2263,7 +2263,7 @@
             <a:r>
               <a:rPr lang="en-US" sz="950" dirty="0">
                 <a:solidFill>
-                  <a:srgbClr val="E6EDF3"/>
+                  <a:srgbClr val="2D2926"/>
                 </a:solidFill>
                 <a:latin typeface="Consolas" pitchFamily="34" charset="0"/>
                 <a:ea typeface="Consolas" pitchFamily="34" charset="-122"/>
@@ -2292,7 +2292,7 @@
           <a:noFill/>
           <a:ln w="19050">
             <a:solidFill>
-              <a:srgbClr val="0D8A6C"/>
+              <a:srgbClr val="4A9B8E"/>
             </a:solidFill>
             <a:prstDash val="solid"/>
             <a:tailEnd type="arrow"/>
@@ -2301,14 +2301,41 @@
       </p:sp>
       <p:sp>
         <p:nvSpPr>
-          <p:cNvPr id="30" name="Text 28"/>
-          <p:cNvSpPr/>
-          <p:nvPr/>
-        </p:nvSpPr>
-        <p:spPr>
-          <a:xfrm>
-            <a:off x="6720840" y="1472184"/>
-            <a:ext cx="548640" cy="182880"/>
+          <p:cNvPr id="30" name="Shape 28"/>
+          <p:cNvSpPr/>
+          <p:nvPr/>
+        </p:nvSpPr>
+        <p:spPr>
+          <a:xfrm>
+            <a:off x="6720840" y="1453896"/>
+            <a:ext cx="548640" cy="201168"/>
+          </a:xfrm>
+          <a:prstGeom prst="roundRect">
+            <a:avLst>
+              <a:gd name="adj" fmla="val 27273"/>
+            </a:avLst>
+          </a:prstGeom>
+          <a:solidFill>
+            <a:srgbClr val="F5F1EB"/>
+          </a:solidFill>
+          <a:ln w="9525">
+            <a:solidFill>
+              <a:srgbClr val="4A9B8E"/>
+            </a:solidFill>
+            <a:prstDash val="solid"/>
+          </a:ln>
+        </p:spPr>
+      </p:sp>
+      <p:sp>
+        <p:nvSpPr>
+          <p:cNvPr id="31" name="Text 29"/>
+          <p:cNvSpPr/>
+          <p:nvPr/>
+        </p:nvSpPr>
+        <p:spPr>
+          <a:xfrm>
+            <a:off x="6720840" y="1453896"/>
+            <a:ext cx="548640" cy="201168"/>
           </a:xfrm>
           <a:prstGeom prst="rect">
             <a:avLst/>
@@ -2324,9 +2351,9 @@
               <a:buNone/>
             </a:pPr>
             <a:r>
-              <a:rPr lang="en-US" sz="800" dirty="0">
-                <a:solidFill>
-                  <a:srgbClr val="0D8A6C"/>
+              <a:rPr lang="en-US" sz="750" b="1" dirty="0">
+                <a:solidFill>
+                  <a:srgbClr val="4A9B8E"/>
                 </a:solidFill>
                 <a:latin typeface="Consolas" pitchFamily="34" charset="0"/>
                 <a:ea typeface="Consolas" pitchFamily="34" charset="-122"/>
@@ -2334,13 +2361,13 @@
               </a:rPr>
               <a:t>build</a:t>
             </a:r>
-            <a:endParaRPr lang="en-US" sz="800" dirty="0"/>
-          </a:p>
-        </p:txBody>
-      </p:sp>
-      <p:sp>
-        <p:nvSpPr>
-          <p:cNvPr id="31" name="Shape 29"/>
+            <a:endParaRPr lang="en-US" sz="750" dirty="0"/>
+          </a:p>
+        </p:txBody>
+      </p:sp>
+      <p:sp>
+        <p:nvSpPr>
+          <p:cNvPr id="32" name="Shape 30"/>
           <p:cNvSpPr/>
           <p:nvPr/>
         </p:nvSpPr>
@@ -2355,18 +2382,18 @@
             </a:avLst>
           </a:prstGeom>
           <a:solidFill>
-            <a:srgbClr val="161B22"/>
+            <a:srgbClr val="F5F1EB"/>
           </a:solidFill>
           <a:ln w="19050">
             <a:solidFill>
-              <a:srgbClr val="0D8A6C"/>
+              <a:srgbClr val="4A9B8E"/>
             </a:solidFill>
             <a:prstDash val="solid"/>
           </a:ln>
           <a:effectLst>
             <a:outerShdw sx="100000" sy="100000" kx="0" ky="0" algn="bl" rotWithShape="0" blurRad="76200" dist="25400" dir="2700000">
-              <a:srgbClr val="000000">
-                <a:alpha val="30000"/>
+              <a:srgbClr val="9E9488">
+                <a:alpha val="15000"/>
               </a:srgbClr>
             </a:outerShdw>
           </a:effectLst>
@@ -2374,7 +2401,7 @@
       </p:sp>
       <p:sp>
         <p:nvSpPr>
-          <p:cNvPr id="32" name="Text 30"/>
+          <p:cNvPr id="33" name="Text 31"/>
           <p:cNvSpPr/>
           <p:nvPr/>
         </p:nvSpPr>
@@ -2410,7 +2437,7 @@
       </p:sp>
       <p:sp>
         <p:nvSpPr>
-          <p:cNvPr id="33" name="Text 31"/>
+          <p:cNvPr id="34" name="Text 32"/>
           <p:cNvSpPr/>
           <p:nvPr/>
         </p:nvSpPr>
@@ -2435,7 +2462,7 @@
             <a:r>
               <a:rPr lang="en-US" sz="1050" b="1" dirty="0">
                 <a:solidFill>
-                  <a:srgbClr val="E6EDF3"/>
+                  <a:srgbClr val="2D2926"/>
                 </a:solidFill>
                 <a:latin typeface="Calibri" pitchFamily="34" charset="0"/>
                 <a:ea typeface="Calibri" pitchFamily="34" charset="-122"/>
@@ -2449,7 +2476,7 @@
       </p:sp>
       <p:sp>
         <p:nvSpPr>
-          <p:cNvPr id="34" name="Text 32"/>
+          <p:cNvPr id="35" name="Text 33"/>
           <p:cNvSpPr/>
           <p:nvPr/>
         </p:nvSpPr>
@@ -2474,7 +2501,7 @@
             <a:r>
               <a:rPr lang="en-US" sz="800" dirty="0">
                 <a:solidFill>
-                  <a:srgbClr val="8B949E"/>
+                  <a:srgbClr val="8A8078"/>
                 </a:solidFill>
                 <a:latin typeface="Consolas" pitchFamily="34" charset="0"/>
                 <a:ea typeface="Consolas" pitchFamily="34" charset="-122"/>
@@ -2491,13 +2518,13 @@
             <a:r>
               <a:rPr lang="en-US" sz="800" dirty="0">
                 <a:solidFill>
-                  <a:srgbClr val="8B949E"/>
+                  <a:srgbClr val="8A8078"/>
                 </a:solidFill>
                 <a:latin typeface="Consolas" pitchFamily="34" charset="0"/>
                 <a:ea typeface="Consolas" pitchFamily="34" charset="-122"/>
                 <a:cs typeface="Consolas" pitchFamily="34" charset="-120"/>
               </a:rPr>
-              <a:t>(不可變快照)</a:t>
+              <a:t>(Immutable Snapshot)</a:t>
             </a:r>
             <a:endParaRPr lang="en-US" sz="800" dirty="0"/>
           </a:p>
@@ -2505,7 +2532,7 @@
       </p:sp>
       <p:sp>
         <p:nvSpPr>
-          <p:cNvPr id="35" name="Text 33"/>
+          <p:cNvPr id="36" name="Text 34"/>
           <p:cNvSpPr/>
           <p:nvPr/>
         </p:nvSpPr>
@@ -2530,13 +2557,13 @@
             <a:r>
               <a:rPr lang="en-US" sz="1100" b="1" dirty="0">
                 <a:solidFill>
-                  <a:srgbClr val="3FB950"/>
+                  <a:srgbClr val="4A9968"/>
                 </a:solidFill>
                 <a:latin typeface="Calibri" pitchFamily="34" charset="0"/>
                 <a:ea typeface="Calibri" pitchFamily="34" charset="-122"/>
                 <a:cs typeface="Calibri" pitchFamily="34" charset="-120"/>
               </a:rPr>
-              <a:t>docker run → 任何主機都能執行</a:t>
+              <a:t>docker run → Runs identically on any host</a:t>
             </a:r>
             <a:endParaRPr lang="en-US" sz="1100" dirty="0"/>
           </a:p>
@@ -2544,7 +2571,7 @@
       </p:sp>
       <p:sp>
         <p:nvSpPr>
-          <p:cNvPr id="36" name="Shape 34"/>
+          <p:cNvPr id="37" name="Shape 35"/>
           <p:cNvSpPr/>
           <p:nvPr/>
         </p:nvSpPr>
@@ -2559,11 +2586,11 @@
             </a:avLst>
           </a:prstGeom>
           <a:solidFill>
-            <a:srgbClr val="161B22"/>
+            <a:srgbClr val="F5F1EB"/>
           </a:solidFill>
           <a:ln w="12700">
             <a:solidFill>
-              <a:srgbClr val="0D8A6C"/>
+              <a:srgbClr val="4A9B8E"/>
             </a:solidFill>
             <a:prstDash val="solid"/>
           </a:ln>
@@ -2571,7 +2598,7 @@
       </p:sp>
       <p:sp>
         <p:nvSpPr>
-          <p:cNvPr id="37" name="Text 35"/>
+          <p:cNvPr id="38" name="Text 36"/>
           <p:cNvSpPr/>
           <p:nvPr/>
         </p:nvSpPr>
@@ -2596,7 +2623,7 @@
             <a:r>
               <a:rPr lang="en-US" sz="900" dirty="0">
                 <a:solidFill>
-                  <a:srgbClr val="0D8A6C"/>
+                  <a:srgbClr val="4A9B8E"/>
                 </a:solidFill>
                 <a:latin typeface="Calibri" pitchFamily="34" charset="0"/>
                 <a:ea typeface="Calibri" pitchFamily="34" charset="-122"/>
@@ -2610,7 +2637,7 @@
       </p:sp>
       <p:sp>
         <p:nvSpPr>
-          <p:cNvPr id="38" name="Shape 36"/>
+          <p:cNvPr id="39" name="Shape 37"/>
           <p:cNvSpPr/>
           <p:nvPr/>
         </p:nvSpPr>
@@ -2625,11 +2652,11 @@
             </a:avLst>
           </a:prstGeom>
           <a:solidFill>
-            <a:srgbClr val="161B22"/>
+            <a:srgbClr val="F5F1EB"/>
           </a:solidFill>
           <a:ln w="12700">
             <a:solidFill>
-              <a:srgbClr val="0D8A6C"/>
+              <a:srgbClr val="4A9B8E"/>
             </a:solidFill>
             <a:prstDash val="solid"/>
           </a:ln>
@@ -2637,7 +2664,7 @@
       </p:sp>
       <p:sp>
         <p:nvSpPr>
-          <p:cNvPr id="39" name="Text 37"/>
+          <p:cNvPr id="40" name="Text 38"/>
           <p:cNvSpPr/>
           <p:nvPr/>
         </p:nvSpPr>
@@ -2662,7 +2689,7 @@
             <a:r>
               <a:rPr lang="en-US" sz="900" dirty="0">
                 <a:solidFill>
-                  <a:srgbClr val="0D8A6C"/>
+                  <a:srgbClr val="4A9B8E"/>
                 </a:solidFill>
                 <a:latin typeface="Calibri" pitchFamily="34" charset="0"/>
                 <a:ea typeface="Calibri" pitchFamily="34" charset="-122"/>
@@ -2676,7 +2703,7 @@
       </p:sp>
       <p:sp>
         <p:nvSpPr>
-          <p:cNvPr id="40" name="Shape 38"/>
+          <p:cNvPr id="41" name="Shape 39"/>
           <p:cNvSpPr/>
           <p:nvPr/>
         </p:nvSpPr>
@@ -2691,11 +2718,11 @@
             </a:avLst>
           </a:prstGeom>
           <a:solidFill>
-            <a:srgbClr val="161B22"/>
+            <a:srgbClr val="F5F1EB"/>
           </a:solidFill>
           <a:ln w="12700">
             <a:solidFill>
-              <a:srgbClr val="0D8A6C"/>
+              <a:srgbClr val="4A9B8E"/>
             </a:solidFill>
             <a:prstDash val="solid"/>
           </a:ln>
@@ -2703,7 +2730,7 @@
       </p:sp>
       <p:sp>
         <p:nvSpPr>
-          <p:cNvPr id="41" name="Text 39"/>
+          <p:cNvPr id="42" name="Text 40"/>
           <p:cNvSpPr/>
           <p:nvPr/>
         </p:nvSpPr>
@@ -2728,7 +2755,7 @@
             <a:r>
               <a:rPr lang="en-US" sz="900" dirty="0">
                 <a:solidFill>
-                  <a:srgbClr val="0D8A6C"/>
+                  <a:srgbClr val="4A9B8E"/>
                 </a:solidFill>
                 <a:latin typeface="Calibri" pitchFamily="34" charset="0"/>
                 <a:ea typeface="Calibri" pitchFamily="34" charset="-122"/>
@@ -2742,7 +2769,7 @@
       </p:sp>
       <p:sp>
         <p:nvSpPr>
-          <p:cNvPr id="42" name="Shape 40"/>
+          <p:cNvPr id="43" name="Shape 41"/>
           <p:cNvSpPr/>
           <p:nvPr/>
         </p:nvSpPr>
@@ -2757,11 +2784,11 @@
             </a:avLst>
           </a:prstGeom>
           <a:solidFill>
-            <a:srgbClr val="161B22"/>
+            <a:srgbClr val="F5F1EB"/>
           </a:solidFill>
           <a:ln w="12700">
             <a:solidFill>
-              <a:srgbClr val="3FB950"/>
+              <a:srgbClr val="4A9968"/>
             </a:solidFill>
             <a:prstDash val="solid"/>
           </a:ln>
@@ -2769,7 +2796,7 @@
       </p:sp>
       <p:sp>
         <p:nvSpPr>
-          <p:cNvPr id="43" name="Text 41"/>
+          <p:cNvPr id="44" name="Text 42"/>
           <p:cNvSpPr/>
           <p:nvPr/>
         </p:nvSpPr>
@@ -2794,13 +2821,13 @@
             <a:r>
               <a:rPr lang="en-US" sz="1000" b="1" dirty="0">
                 <a:solidFill>
-                  <a:srgbClr val="E6EDF3"/>
+                  <a:srgbClr val="2D2926"/>
                 </a:solidFill>
                 <a:latin typeface="Calibri" pitchFamily="34" charset="0"/>
                 <a:ea typeface="Calibri" pitchFamily="34" charset="-122"/>
                 <a:cs typeface="Calibri" pitchFamily="34" charset="-120"/>
               </a:rPr>
-              <a:t>🔒 環境一致</a:t>
+              <a:t>🔒 Consistent Env</a:t>
             </a:r>
             <a:endParaRPr lang="en-US" sz="1000" dirty="0"/>
           </a:p>
@@ -2808,7 +2835,7 @@
       </p:sp>
       <p:sp>
         <p:nvSpPr>
-          <p:cNvPr id="44" name="Text 42"/>
+          <p:cNvPr id="45" name="Text 43"/>
           <p:cNvSpPr/>
           <p:nvPr/>
         </p:nvSpPr>
@@ -2833,7 +2860,7 @@
             <a:r>
               <a:rPr lang="en-US" sz="850" dirty="0">
                 <a:solidFill>
-                  <a:srgbClr val="8B949E"/>
+                  <a:srgbClr val="8A8078"/>
                 </a:solidFill>
                 <a:latin typeface="Calibri" pitchFamily="34" charset="0"/>
                 <a:ea typeface="Calibri" pitchFamily="34" charset="-122"/>
@@ -2847,7 +2874,7 @@
       </p:sp>
       <p:sp>
         <p:nvSpPr>
-          <p:cNvPr id="45" name="Shape 43"/>
+          <p:cNvPr id="46" name="Shape 44"/>
           <p:cNvSpPr/>
           <p:nvPr/>
         </p:nvSpPr>
@@ -2862,11 +2889,11 @@
             </a:avLst>
           </a:prstGeom>
           <a:solidFill>
-            <a:srgbClr val="161B22"/>
+            <a:srgbClr val="F5F1EB"/>
           </a:solidFill>
           <a:ln w="12700">
             <a:solidFill>
-              <a:srgbClr val="3FB950"/>
+              <a:srgbClr val="4A9968"/>
             </a:solidFill>
             <a:prstDash val="solid"/>
           </a:ln>
@@ -2874,7 +2901,7 @@
       </p:sp>
       <p:sp>
         <p:nvSpPr>
-          <p:cNvPr id="46" name="Text 44"/>
+          <p:cNvPr id="47" name="Text 45"/>
           <p:cNvSpPr/>
           <p:nvPr/>
         </p:nvSpPr>
@@ -2899,13 +2926,13 @@
             <a:r>
               <a:rPr lang="en-US" sz="1000" b="1" dirty="0">
                 <a:solidFill>
-                  <a:srgbClr val="E6EDF3"/>
+                  <a:srgbClr val="2D2926"/>
                 </a:solidFill>
                 <a:latin typeface="Calibri" pitchFamily="34" charset="0"/>
                 <a:ea typeface="Calibri" pitchFamily="34" charset="-122"/>
                 <a:cs typeface="Calibri" pitchFamily="34" charset="-120"/>
               </a:rPr>
-              <a:t>⚡ 秒級啟動</a:t>
+              <a:t>⚡ Instant Startup</a:t>
             </a:r>
             <a:endParaRPr lang="en-US" sz="1000" dirty="0"/>
           </a:p>
@@ -2913,7 +2940,7 @@
       </p:sp>
       <p:sp>
         <p:nvSpPr>
-          <p:cNvPr id="47" name="Text 45"/>
+          <p:cNvPr id="48" name="Text 46"/>
           <p:cNvSpPr/>
           <p:nvPr/>
         </p:nvSpPr>
@@ -2938,13 +2965,13 @@
             <a:r>
               <a:rPr lang="en-US" sz="850" dirty="0">
                 <a:solidFill>
-                  <a:srgbClr val="8B949E"/>
+                  <a:srgbClr val="8A8078"/>
                 </a:solidFill>
                 <a:latin typeface="Calibri" pitchFamily="34" charset="0"/>
                 <a:ea typeface="Calibri" pitchFamily="34" charset="-122"/>
                 <a:cs typeface="Calibri" pitchFamily="34" charset="-120"/>
               </a:rPr>
-              <a:t>vs VM 分鐘</a:t>
+              <a:t>Seconds vs VM Minutes</a:t>
             </a:r>
             <a:endParaRPr lang="en-US" sz="850" dirty="0"/>
           </a:p>
@@ -2952,7 +2979,7 @@
       </p:sp>
       <p:sp>
         <p:nvSpPr>
-          <p:cNvPr id="48" name="Shape 46"/>
+          <p:cNvPr id="49" name="Shape 47"/>
           <p:cNvSpPr/>
           <p:nvPr/>
         </p:nvSpPr>
@@ -2967,11 +2994,11 @@
             </a:avLst>
           </a:prstGeom>
           <a:solidFill>
-            <a:srgbClr val="161B22"/>
+            <a:srgbClr val="F5F1EB"/>
           </a:solidFill>
           <a:ln w="12700">
             <a:solidFill>
-              <a:srgbClr val="3FB950"/>
+              <a:srgbClr val="4A9968"/>
             </a:solidFill>
             <a:prstDash val="solid"/>
           </a:ln>
@@ -2979,7 +3006,7 @@
       </p:sp>
       <p:sp>
         <p:nvSpPr>
-          <p:cNvPr id="49" name="Text 47"/>
+          <p:cNvPr id="50" name="Text 48"/>
           <p:cNvSpPr/>
           <p:nvPr/>
         </p:nvSpPr>
@@ -3004,13 +3031,13 @@
             <a:r>
               <a:rPr lang="en-US" sz="1000" b="1" dirty="0">
                 <a:solidFill>
-                  <a:srgbClr val="E6EDF3"/>
+                  <a:srgbClr val="2D2926"/>
                 </a:solidFill>
                 <a:latin typeface="Calibri" pitchFamily="34" charset="0"/>
                 <a:ea typeface="Calibri" pitchFamily="34" charset="-122"/>
                 <a:cs typeface="Calibri" pitchFamily="34" charset="-120"/>
               </a:rPr>
-              <a:t>📜 版本控管</a:t>
+              <a:t>📜 Version Control</a:t>
             </a:r>
             <a:endParaRPr lang="en-US" sz="1000" dirty="0"/>
           </a:p>
@@ -3018,7 +3045,7 @@
       </p:sp>
       <p:sp>
         <p:nvSpPr>
-          <p:cNvPr id="50" name="Text 48"/>
+          <p:cNvPr id="51" name="Text 49"/>
           <p:cNvSpPr/>
           <p:nvPr/>
         </p:nvSpPr>
@@ -3043,13 +3070,13 @@
             <a:r>
               <a:rPr lang="en-US" sz="850" dirty="0">
                 <a:solidFill>
-                  <a:srgbClr val="8B949E"/>
+                  <a:srgbClr val="8A8078"/>
                 </a:solidFill>
                 <a:latin typeface="Calibri" pitchFamily="34" charset="0"/>
                 <a:ea typeface="Calibri" pitchFamily="34" charset="-122"/>
                 <a:cs typeface="Calibri" pitchFamily="34" charset="-120"/>
               </a:rPr>
-              <a:t>tag = 可回滾</a:t>
+              <a:t>Tag = Rollback-Ready</a:t>
             </a:r>
             <a:endParaRPr lang="en-US" sz="850" dirty="0"/>
           </a:p>
@@ -3057,7 +3084,7 @@
       </p:sp>
       <p:sp>
         <p:nvSpPr>
-          <p:cNvPr id="51" name="Shape 49"/>
+          <p:cNvPr id="52" name="Shape 50"/>
           <p:cNvSpPr/>
           <p:nvPr/>
         </p:nvSpPr>
@@ -3072,11 +3099,11 @@
             </a:avLst>
           </a:prstGeom>
           <a:solidFill>
-            <a:srgbClr val="0A1929"/>
+            <a:srgbClr val="EAF0F7"/>
           </a:solidFill>
           <a:ln w="9525">
             <a:solidFill>
-              <a:srgbClr val="58A6FF"/>
+              <a:srgbClr val="4A7FB5"/>
             </a:solidFill>
             <a:prstDash val="solid"/>
           </a:ln>
@@ -3084,7 +3111,7 @@
       </p:sp>
       <p:sp>
         <p:nvSpPr>
-          <p:cNvPr id="52" name="Text 50"/>
+          <p:cNvPr id="53" name="Text 51"/>
           <p:cNvSpPr/>
           <p:nvPr/>
         </p:nvSpPr>
@@ -3109,13 +3136,13 @@
             <a:r>
               <a:rPr lang="en-US" sz="1000" i="1" dirty="0">
                 <a:solidFill>
-                  <a:srgbClr val="8B949E"/>
+                  <a:srgbClr val="8A8078"/>
                 </a:solidFill>
                 <a:latin typeface="Calibri" pitchFamily="34" charset="0"/>
                 <a:ea typeface="Calibri" pitchFamily="34" charset="-122"/>
                 <a:cs typeface="Calibri" pitchFamily="34" charset="-120"/>
               </a:rPr>
-              <a:t>💡  Container 把「應用 + 所有依賴」打包成一個不可變的 Image — 在哪裡跑都一樣</a:t>
+              <a:t>💡  A Container packages your app + all dependencies into an immutable Image — runs the same everywhere</a:t>
             </a:r>
             <a:endParaRPr lang="en-US" sz="1000" dirty="0"/>
           </a:p>
@@ -3135,7 +3162,7 @@
     <p:bg>
       <p:bgPr>
         <a:solidFill>
-          <a:srgbClr val="0D1117"/>
+          <a:srgbClr val="FFFDF8"/>
         </a:solidFill>
       </p:bgPr>
     </p:bg>
@@ -3168,11 +3195,11 @@
             <a:avLst/>
           </a:prstGeom>
           <a:solidFill>
-            <a:srgbClr val="161B22"/>
+            <a:srgbClr val="F5F1EB"/>
           </a:solidFill>
           <a:ln w="6350">
             <a:solidFill>
-              <a:srgbClr val="30363D"/>
+              <a:srgbClr val="D6CCBF"/>
             </a:solidFill>
             <a:prstDash val="solid"/>
           </a:ln>
@@ -3193,11 +3220,11 @@
             <a:avLst/>
           </a:prstGeom>
           <a:solidFill>
-            <a:srgbClr val="58A6FF"/>
+            <a:srgbClr val="4A7FB5"/>
           </a:solidFill>
           <a:ln w="12700">
             <a:solidFill>
-              <a:srgbClr val="58A6FF"/>
+              <a:srgbClr val="4A7FB5"/>
             </a:solidFill>
             <a:prstDash val="solid"/>
           </a:ln>
@@ -3230,13 +3257,13 @@
             <a:r>
               <a:rPr lang="en-US" sz="1600" b="1" dirty="0">
                 <a:solidFill>
-                  <a:srgbClr val="E6EDF3"/>
+                  <a:srgbClr val="2D2926"/>
                 </a:solidFill>
                 <a:latin typeface="Calibri" pitchFamily="34" charset="0"/>
                 <a:ea typeface="Calibri" pitchFamily="34" charset="-122"/>
                 <a:cs typeface="Calibri" pitchFamily="34" charset="-120"/>
               </a:rPr>
-              <a:t>VM vs Container：架構深度對比</a:t>
+              <a:t>VM vs Container: Architecture Deep Comparison</a:t>
             </a:r>
             <a:endParaRPr lang="en-US" sz="1600" dirty="0"/>
           </a:p>
@@ -3269,13 +3296,13 @@
             <a:r>
               <a:rPr lang="en-US" sz="850" dirty="0">
                 <a:solidFill>
-                  <a:srgbClr val="8B949E"/>
+                  <a:srgbClr val="8A8078"/>
                 </a:solidFill>
                 <a:latin typeface="Calibri" pitchFamily="34" charset="0"/>
                 <a:ea typeface="Calibri" pitchFamily="34" charset="-122"/>
                 <a:cs typeface="Calibri" pitchFamily="34" charset="-120"/>
               </a:rPr>
-              <a:t>PART 3  ·  22 / 50</a:t>
+              <a:t>PART 3</a:t>
             </a:r>
             <a:endParaRPr lang="en-US" sz="850" dirty="0"/>
           </a:p>
@@ -3298,11 +3325,11 @@
             </a:avLst>
           </a:prstGeom>
           <a:solidFill>
-            <a:srgbClr val="1C2128"/>
+            <a:srgbClr val="ECE6DD"/>
           </a:solidFill>
           <a:ln w="9525">
             <a:solidFill>
-              <a:srgbClr val="30363D"/>
+              <a:srgbClr val="D6CCBF"/>
             </a:solidFill>
             <a:prstDash val="solid"/>
           </a:ln>
@@ -3335,7 +3362,7 @@
             <a:r>
               <a:rPr lang="en-US" sz="1200" b="1" dirty="0">
                 <a:solidFill>
-                  <a:srgbClr val="8B949E"/>
+                  <a:srgbClr val="8A8078"/>
                 </a:solidFill>
                 <a:latin typeface="Calibri" pitchFamily="34" charset="0"/>
                 <a:ea typeface="Calibri" pitchFamily="34" charset="-122"/>
@@ -3364,11 +3391,11 @@
             </a:avLst>
           </a:prstGeom>
           <a:solidFill>
-            <a:srgbClr val="161B22"/>
+            <a:srgbClr val="F5F1EB"/>
           </a:solidFill>
           <a:ln w="12700">
             <a:solidFill>
-              <a:srgbClr val="238636"/>
+              <a:srgbClr val="5A9B6E"/>
             </a:solidFill>
             <a:prstDash val="solid"/>
           </a:ln>
@@ -3437,7 +3464,7 @@
             <a:r>
               <a:rPr lang="en-US" sz="1000" b="1" dirty="0">
                 <a:solidFill>
-                  <a:srgbClr val="E6EDF3"/>
+                  <a:srgbClr val="2D2926"/>
                 </a:solidFill>
                 <a:latin typeface="Calibri" pitchFamily="34" charset="0"/>
                 <a:ea typeface="Calibri" pitchFamily="34" charset="-122"/>
@@ -3476,7 +3503,7 @@
             <a:r>
               <a:rPr lang="en-US" sz="800" dirty="0">
                 <a:solidFill>
-                  <a:srgbClr val="8B949E"/>
+                  <a:srgbClr val="8A8078"/>
                 </a:solidFill>
                 <a:latin typeface="Calibri" pitchFamily="34" charset="0"/>
                 <a:ea typeface="Calibri" pitchFamily="34" charset="-122"/>
@@ -3505,11 +3532,11 @@
             </a:avLst>
           </a:prstGeom>
           <a:solidFill>
-            <a:srgbClr val="161B22"/>
+            <a:srgbClr val="F5F1EB"/>
           </a:solidFill>
           <a:ln w="12700">
             <a:solidFill>
-              <a:srgbClr val="238636"/>
+              <a:srgbClr val="5A9B6E"/>
             </a:solidFill>
             <a:prstDash val="solid"/>
           </a:ln>
@@ -3578,7 +3605,7 @@
             <a:r>
               <a:rPr lang="en-US" sz="1000" b="1" dirty="0">
                 <a:solidFill>
-                  <a:srgbClr val="E6EDF3"/>
+                  <a:srgbClr val="2D2926"/>
                 </a:solidFill>
                 <a:latin typeface="Calibri" pitchFamily="34" charset="0"/>
                 <a:ea typeface="Calibri" pitchFamily="34" charset="-122"/>
@@ -3617,7 +3644,7 @@
             <a:r>
               <a:rPr lang="en-US" sz="800" dirty="0">
                 <a:solidFill>
-                  <a:srgbClr val="8B949E"/>
+                  <a:srgbClr val="8A8078"/>
                 </a:solidFill>
                 <a:latin typeface="Calibri" pitchFamily="34" charset="0"/>
                 <a:ea typeface="Calibri" pitchFamily="34" charset="-122"/>
@@ -3646,11 +3673,11 @@
             </a:avLst>
           </a:prstGeom>
           <a:solidFill>
-            <a:srgbClr val="161B22"/>
+            <a:srgbClr val="F5F1EB"/>
           </a:solidFill>
           <a:ln w="12700">
             <a:solidFill>
-              <a:srgbClr val="8B949E"/>
+              <a:srgbClr val="8A8078"/>
             </a:solidFill>
             <a:prstDash val="solid"/>
           </a:ln>
@@ -3683,7 +3710,7 @@
             <a:r>
               <a:rPr lang="en-US" sz="950" b="1" dirty="0">
                 <a:solidFill>
-                  <a:srgbClr val="8B949E"/>
+                  <a:srgbClr val="8A8078"/>
                 </a:solidFill>
                 <a:latin typeface="Calibri" pitchFamily="34" charset="0"/>
                 <a:ea typeface="Calibri" pitchFamily="34" charset="-122"/>
@@ -3712,11 +3739,11 @@
             </a:avLst>
           </a:prstGeom>
           <a:solidFill>
-            <a:srgbClr val="161B22"/>
+            <a:srgbClr val="F5F1EB"/>
           </a:solidFill>
           <a:ln w="12700">
             <a:solidFill>
-              <a:srgbClr val="8B949E"/>
+              <a:srgbClr val="8A8078"/>
             </a:solidFill>
             <a:prstDash val="solid"/>
           </a:ln>
@@ -3749,7 +3776,7 @@
             <a:r>
               <a:rPr lang="en-US" sz="950" b="1" dirty="0">
                 <a:solidFill>
-                  <a:srgbClr val="8B949E"/>
+                  <a:srgbClr val="8A8078"/>
                 </a:solidFill>
                 <a:latin typeface="Calibri" pitchFamily="34" charset="0"/>
                 <a:ea typeface="Calibri" pitchFamily="34" charset="-122"/>
@@ -3778,11 +3805,11 @@
             </a:avLst>
           </a:prstGeom>
           <a:solidFill>
-            <a:srgbClr val="2A1F00"/>
+            <a:srgbClr val="F3EDE0"/>
           </a:solidFill>
           <a:ln w="12700">
             <a:solidFill>
-              <a:srgbClr val="D29922"/>
+              <a:srgbClr val="B8892C"/>
             </a:solidFill>
             <a:prstDash val="solid"/>
           </a:ln>
@@ -3815,7 +3842,7 @@
             <a:r>
               <a:rPr lang="en-US" sz="1000" b="1" dirty="0">
                 <a:solidFill>
-                  <a:srgbClr val="D29922"/>
+                  <a:srgbClr val="B8892C"/>
                 </a:solidFill>
                 <a:latin typeface="Calibri" pitchFamily="34" charset="0"/>
                 <a:ea typeface="Calibri" pitchFamily="34" charset="-122"/>
@@ -3844,11 +3871,11 @@
             </a:avLst>
           </a:prstGeom>
           <a:solidFill>
-            <a:srgbClr val="161B22"/>
+            <a:srgbClr val="F5F1EB"/>
           </a:solidFill>
           <a:ln w="12700">
             <a:solidFill>
-              <a:srgbClr val="8B949E"/>
+              <a:srgbClr val="908880"/>
             </a:solidFill>
             <a:prstDash val="solid"/>
           </a:ln>
@@ -3881,7 +3908,7 @@
             <a:r>
               <a:rPr lang="en-US" sz="1000" b="1" dirty="0">
                 <a:solidFill>
-                  <a:srgbClr val="8B949E"/>
+                  <a:srgbClr val="908880"/>
                 </a:solidFill>
                 <a:latin typeface="Calibri" pitchFamily="34" charset="0"/>
                 <a:ea typeface="Calibri" pitchFamily="34" charset="-122"/>
@@ -3910,11 +3937,11 @@
             </a:avLst>
           </a:prstGeom>
           <a:solidFill>
-            <a:srgbClr val="1C2128"/>
+            <a:srgbClr val="ECE6DD"/>
           </a:solidFill>
           <a:ln w="12700">
             <a:solidFill>
-              <a:srgbClr val="30363D"/>
+              <a:srgbClr val="D6CCBF"/>
             </a:solidFill>
             <a:prstDash val="solid"/>
           </a:ln>
@@ -3947,7 +3974,7 @@
             <a:r>
               <a:rPr lang="en-US" sz="1000" b="1" dirty="0">
                 <a:solidFill>
-                  <a:srgbClr val="8B949E"/>
+                  <a:srgbClr val="8A8078"/>
                 </a:solidFill>
                 <a:latin typeface="Calibri" pitchFamily="34" charset="0"/>
                 <a:ea typeface="Calibri" pitchFamily="34" charset="-122"/>
@@ -3976,11 +4003,11 @@
             </a:avLst>
           </a:prstGeom>
           <a:solidFill>
-            <a:srgbClr val="2A0F0F"/>
+            <a:srgbClr val="F8ECEC"/>
           </a:solidFill>
           <a:ln w="12700">
             <a:solidFill>
-              <a:srgbClr val="F85149"/>
+              <a:srgbClr val="C4605B"/>
             </a:solidFill>
             <a:prstDash val="solid"/>
           </a:ln>
@@ -4013,13 +4040,13 @@
             <a:r>
               <a:rPr lang="en-US" sz="850" b="1" dirty="0">
                 <a:solidFill>
-                  <a:srgbClr val="F85149"/>
+                  <a:srgbClr val="C4605B"/>
                 </a:solidFill>
                 <a:latin typeface="Calibri" pitchFamily="34" charset="0"/>
                 <a:ea typeface="Calibri" pitchFamily="34" charset="-122"/>
                 <a:cs typeface="Calibri" pitchFamily="34" charset="-120"/>
               </a:rPr>
-              <a:t>啟動: 分鐘</a:t>
+              <a:t>Boot: Minutes</a:t>
             </a:r>
             <a:endParaRPr lang="en-US" sz="850" dirty="0"/>
           </a:p>
@@ -4042,11 +4069,11 @@
             </a:avLst>
           </a:prstGeom>
           <a:solidFill>
-            <a:srgbClr val="2A0F0F"/>
+            <a:srgbClr val="F8ECEC"/>
           </a:solidFill>
           <a:ln w="12700">
             <a:solidFill>
-              <a:srgbClr val="F85149"/>
+              <a:srgbClr val="C4605B"/>
             </a:solidFill>
             <a:prstDash val="solid"/>
           </a:ln>
@@ -4079,13 +4106,13 @@
             <a:r>
               <a:rPr lang="en-US" sz="850" b="1" dirty="0">
                 <a:solidFill>
-                  <a:srgbClr val="F85149"/>
+                  <a:srgbClr val="C4605B"/>
                 </a:solidFill>
                 <a:latin typeface="Calibri" pitchFamily="34" charset="0"/>
                 <a:ea typeface="Calibri" pitchFamily="34" charset="-122"/>
                 <a:cs typeface="Calibri" pitchFamily="34" charset="-120"/>
               </a:rPr>
-              <a:t>大小: GB</a:t>
+              <a:t>Size: GB</a:t>
             </a:r>
             <a:endParaRPr lang="en-US" sz="850" dirty="0"/>
           </a:p>
@@ -4108,11 +4135,11 @@
             </a:avLst>
           </a:prstGeom>
           <a:solidFill>
-            <a:srgbClr val="0F2A1A"/>
+            <a:srgbClr val="E5F0E9"/>
           </a:solidFill>
           <a:ln w="12700">
             <a:solidFill>
-              <a:srgbClr val="3FB950"/>
+              <a:srgbClr val="4A9968"/>
             </a:solidFill>
             <a:prstDash val="solid"/>
           </a:ln>
@@ -4145,13 +4172,13 @@
             <a:r>
               <a:rPr lang="en-US" sz="850" b="1" dirty="0">
                 <a:solidFill>
-                  <a:srgbClr val="3FB950"/>
+                  <a:srgbClr val="4A9968"/>
                 </a:solidFill>
                 <a:latin typeface="Calibri" pitchFamily="34" charset="0"/>
                 <a:ea typeface="Calibri" pitchFamily="34" charset="-122"/>
                 <a:cs typeface="Calibri" pitchFamily="34" charset="-120"/>
               </a:rPr>
-              <a:t>隔離: 強 (OS)</a:t>
+              <a:t>Isolation: Strong (OS)</a:t>
             </a:r>
             <a:endParaRPr lang="en-US" sz="850" dirty="0"/>
           </a:p>
@@ -4174,11 +4201,11 @@
             </a:avLst>
           </a:prstGeom>
           <a:solidFill>
-            <a:srgbClr val="1C2128"/>
+            <a:srgbClr val="ECE6DD"/>
           </a:solidFill>
           <a:ln w="9525">
             <a:solidFill>
-              <a:srgbClr val="0D8A6C"/>
+              <a:srgbClr val="4A9B8E"/>
             </a:solidFill>
             <a:prstDash val="solid"/>
           </a:ln>
@@ -4211,7 +4238,7 @@
             <a:r>
               <a:rPr lang="en-US" sz="1200" b="1" dirty="0">
                 <a:solidFill>
-                  <a:srgbClr val="0D8A6C"/>
+                  <a:srgbClr val="4A9B8E"/>
                 </a:solidFill>
                 <a:latin typeface="Calibri" pitchFamily="34" charset="0"/>
                 <a:ea typeface="Calibri" pitchFamily="34" charset="-122"/>
@@ -4240,11 +4267,11 @@
             </a:avLst>
           </a:prstGeom>
           <a:solidFill>
-            <a:srgbClr val="161B22"/>
+            <a:srgbClr val="F5F1EB"/>
           </a:solidFill>
           <a:ln w="12700">
             <a:solidFill>
-              <a:srgbClr val="0D8A6C"/>
+              <a:srgbClr val="4A9B8E"/>
             </a:solidFill>
             <a:prstDash val="solid"/>
           </a:ln>
@@ -4313,7 +4340,7 @@
             <a:r>
               <a:rPr lang="en-US" sz="1000" b="1" dirty="0">
                 <a:solidFill>
-                  <a:srgbClr val="E6EDF3"/>
+                  <a:srgbClr val="2D2926"/>
                 </a:solidFill>
                 <a:latin typeface="Calibri" pitchFamily="34" charset="0"/>
                 <a:ea typeface="Calibri" pitchFamily="34" charset="-122"/>
@@ -4352,13 +4379,13 @@
             <a:r>
               <a:rPr lang="en-US" sz="800" dirty="0">
                 <a:solidFill>
-                  <a:srgbClr val="8B949E"/>
+                  <a:srgbClr val="8A8078"/>
                 </a:solidFill>
                 <a:latin typeface="Calibri" pitchFamily="34" charset="0"/>
                 <a:ea typeface="Calibri" pitchFamily="34" charset="-122"/>
                 <a:cs typeface="Calibri" pitchFamily="34" charset="-120"/>
               </a:rPr>
-              <a:t>依賴包含在 Image 內</a:t>
+              <a:t>Dependencies bundled in Image</a:t>
             </a:r>
             <a:endParaRPr lang="en-US" sz="800" dirty="0"/>
           </a:p>
@@ -4381,11 +4408,11 @@
             </a:avLst>
           </a:prstGeom>
           <a:solidFill>
-            <a:srgbClr val="161B22"/>
+            <a:srgbClr val="F5F1EB"/>
           </a:solidFill>
           <a:ln w="12700">
             <a:solidFill>
-              <a:srgbClr val="0D8A6C"/>
+              <a:srgbClr val="4A9B8E"/>
             </a:solidFill>
             <a:prstDash val="solid"/>
           </a:ln>
@@ -4454,7 +4481,7 @@
             <a:r>
               <a:rPr lang="en-US" sz="1000" b="1" dirty="0">
                 <a:solidFill>
-                  <a:srgbClr val="E6EDF3"/>
+                  <a:srgbClr val="2D2926"/>
                 </a:solidFill>
                 <a:latin typeface="Calibri" pitchFamily="34" charset="0"/>
                 <a:ea typeface="Calibri" pitchFamily="34" charset="-122"/>
@@ -4493,13 +4520,13 @@
             <a:r>
               <a:rPr lang="en-US" sz="800" dirty="0">
                 <a:solidFill>
-                  <a:srgbClr val="8B949E"/>
+                  <a:srgbClr val="8A8078"/>
                 </a:solidFill>
                 <a:latin typeface="Calibri" pitchFamily="34" charset="0"/>
                 <a:ea typeface="Calibri" pitchFamily="34" charset="-122"/>
                 <a:cs typeface="Calibri" pitchFamily="34" charset="-120"/>
               </a:rPr>
-              <a:t>依賴包含在 Image 內</a:t>
+              <a:t>Dependencies bundled in Image</a:t>
             </a:r>
             <a:endParaRPr lang="en-US" sz="800" dirty="0"/>
           </a:p>
@@ -4526,7 +4553,7 @@
           </a:solidFill>
           <a:ln w="12700">
             <a:solidFill>
-              <a:srgbClr val="0D8A6C"/>
+              <a:srgbClr val="4A9B8E"/>
             </a:solidFill>
             <a:prstDash val="solid"/>
           </a:ln>
@@ -4559,7 +4586,7 @@
             <a:r>
               <a:rPr lang="en-US" sz="1000" b="1" dirty="0">
                 <a:solidFill>
-                  <a:srgbClr val="0D8A6C"/>
+                  <a:srgbClr val="4A9B8E"/>
                 </a:solidFill>
                 <a:latin typeface="Calibri" pitchFamily="34" charset="0"/>
                 <a:ea typeface="Calibri" pitchFamily="34" charset="-122"/>
@@ -4588,11 +4615,11 @@
             </a:avLst>
           </a:prstGeom>
           <a:solidFill>
-            <a:srgbClr val="161B22"/>
+            <a:srgbClr val="F5F1EB"/>
           </a:solidFill>
           <a:ln w="12700">
             <a:solidFill>
-              <a:srgbClr val="8B949E"/>
+              <a:srgbClr val="908880"/>
             </a:solidFill>
             <a:prstDash val="solid"/>
           </a:ln>
@@ -4625,7 +4652,7 @@
             <a:r>
               <a:rPr lang="en-US" sz="1000" b="1" dirty="0">
                 <a:solidFill>
-                  <a:srgbClr val="8B949E"/>
+                  <a:srgbClr val="908880"/>
                 </a:solidFill>
                 <a:latin typeface="Calibri" pitchFamily="34" charset="0"/>
                 <a:ea typeface="Calibri" pitchFamily="34" charset="-122"/>
@@ -4654,11 +4681,11 @@
             </a:avLst>
           </a:prstGeom>
           <a:solidFill>
-            <a:srgbClr val="1C2128"/>
+            <a:srgbClr val="ECE6DD"/>
           </a:solidFill>
           <a:ln w="12700">
             <a:solidFill>
-              <a:srgbClr val="30363D"/>
+              <a:srgbClr val="D6CCBF"/>
             </a:solidFill>
             <a:prstDash val="solid"/>
           </a:ln>
@@ -4691,7 +4718,7 @@
             <a:r>
               <a:rPr lang="en-US" sz="1000" b="1" dirty="0">
                 <a:solidFill>
-                  <a:srgbClr val="8B949E"/>
+                  <a:srgbClr val="8A8078"/>
                 </a:solidFill>
                 <a:latin typeface="Calibri" pitchFamily="34" charset="0"/>
                 <a:ea typeface="Calibri" pitchFamily="34" charset="-122"/>
@@ -4720,11 +4747,11 @@
             </a:avLst>
           </a:prstGeom>
           <a:solidFill>
-            <a:srgbClr val="0F2A1A"/>
+            <a:srgbClr val="E5F0E9"/>
           </a:solidFill>
           <a:ln w="12700">
             <a:solidFill>
-              <a:srgbClr val="3FB950"/>
+              <a:srgbClr val="4A9968"/>
             </a:solidFill>
             <a:prstDash val="solid"/>
           </a:ln>
@@ -4757,13 +4784,13 @@
             <a:r>
               <a:rPr lang="en-US" sz="850" b="1" dirty="0">
                 <a:solidFill>
-                  <a:srgbClr val="3FB950"/>
+                  <a:srgbClr val="4A9968"/>
                 </a:solidFill>
                 <a:latin typeface="Calibri" pitchFamily="34" charset="0"/>
                 <a:ea typeface="Calibri" pitchFamily="34" charset="-122"/>
                 <a:cs typeface="Calibri" pitchFamily="34" charset="-120"/>
               </a:rPr>
-              <a:t>啟動: 秒</a:t>
+              <a:t>Boot: Seconds</a:t>
             </a:r>
             <a:endParaRPr lang="en-US" sz="850" dirty="0"/>
           </a:p>
@@ -4786,11 +4813,11 @@
             </a:avLst>
           </a:prstGeom>
           <a:solidFill>
-            <a:srgbClr val="0F2A1A"/>
+            <a:srgbClr val="E5F0E9"/>
           </a:solidFill>
           <a:ln w="12700">
             <a:solidFill>
-              <a:srgbClr val="3FB950"/>
+              <a:srgbClr val="4A9968"/>
             </a:solidFill>
             <a:prstDash val="solid"/>
           </a:ln>
@@ -4823,13 +4850,13 @@
             <a:r>
               <a:rPr lang="en-US" sz="850" b="1" dirty="0">
                 <a:solidFill>
-                  <a:srgbClr val="3FB950"/>
+                  <a:srgbClr val="4A9968"/>
                 </a:solidFill>
                 <a:latin typeface="Calibri" pitchFamily="34" charset="0"/>
                 <a:ea typeface="Calibri" pitchFamily="34" charset="-122"/>
                 <a:cs typeface="Calibri" pitchFamily="34" charset="-120"/>
               </a:rPr>
-              <a:t>大小: MB</a:t>
+              <a:t>Size: MB</a:t>
             </a:r>
             <a:endParaRPr lang="en-US" sz="850" dirty="0"/>
           </a:p>
@@ -4856,7 +4883,7 @@
           </a:solidFill>
           <a:ln w="12700">
             <a:solidFill>
-              <a:srgbClr val="58A6FF"/>
+              <a:srgbClr val="4A7FB5"/>
             </a:solidFill>
             <a:prstDash val="solid"/>
           </a:ln>
@@ -4889,13 +4916,13 @@
             <a:r>
               <a:rPr lang="en-US" sz="850" b="1" dirty="0">
                 <a:solidFill>
-                  <a:srgbClr val="58A6FF"/>
+                  <a:srgbClr val="4A7FB5"/>
                 </a:solidFill>
                 <a:latin typeface="Calibri" pitchFamily="34" charset="0"/>
                 <a:ea typeface="Calibri" pitchFamily="34" charset="-122"/>
                 <a:cs typeface="Calibri" pitchFamily="34" charset="-120"/>
               </a:rPr>
-              <a:t>隔離: 輕量 (Process)</a:t>
+              <a:t>Isolation: Light (Process)</a:t>
             </a:r>
             <a:endParaRPr lang="en-US" sz="850" dirty="0"/>
           </a:p>
@@ -4918,11 +4945,11 @@
             </a:avLst>
           </a:prstGeom>
           <a:solidFill>
-            <a:srgbClr val="161B22"/>
+            <a:srgbClr val="F5F1EB"/>
           </a:solidFill>
           <a:ln w="12700">
             <a:solidFill>
-              <a:srgbClr val="3FB950"/>
+              <a:srgbClr val="4A9968"/>
             </a:solidFill>
             <a:prstDash val="solid"/>
           </a:ln>
@@ -4955,13 +4982,13 @@
             <a:r>
               <a:rPr lang="en-US" sz="1600" b="1" dirty="0">
                 <a:solidFill>
-                  <a:srgbClr val="3FB950"/>
+                  <a:srgbClr val="4A9968"/>
                 </a:solidFill>
                 <a:latin typeface="Calibri" pitchFamily="34" charset="0"/>
                 <a:ea typeface="Calibri" pitchFamily="34" charset="-122"/>
                 <a:cs typeface="Calibri" pitchFamily="34" charset="-120"/>
               </a:rPr>
-              <a:t>分鐘 → 秒</a:t>
+              <a:t>Min → Sec</a:t>
             </a:r>
             <a:endParaRPr lang="en-US" sz="1600" dirty="0"/>
           </a:p>
@@ -4994,13 +5021,13 @@
             <a:r>
               <a:rPr lang="en-US" sz="900" dirty="0">
                 <a:solidFill>
-                  <a:srgbClr val="8B949E"/>
+                  <a:srgbClr val="8A8078"/>
                 </a:solidFill>
                 <a:latin typeface="Calibri" pitchFamily="34" charset="0"/>
                 <a:ea typeface="Calibri" pitchFamily="34" charset="-122"/>
                 <a:cs typeface="Calibri" pitchFamily="34" charset="-120"/>
               </a:rPr>
-              <a:t>啟動時間 VM→Container</a:t>
+              <a:t>Boot Time: VM → Container</a:t>
             </a:r>
             <a:endParaRPr lang="en-US" sz="900" dirty="0"/>
           </a:p>
@@ -5023,11 +5050,11 @@
             </a:avLst>
           </a:prstGeom>
           <a:solidFill>
-            <a:srgbClr val="161B22"/>
+            <a:srgbClr val="F5F1EB"/>
           </a:solidFill>
           <a:ln w="12700">
             <a:solidFill>
-              <a:srgbClr val="3FB950"/>
+              <a:srgbClr val="4A9968"/>
             </a:solidFill>
             <a:prstDash val="solid"/>
           </a:ln>
@@ -5060,7 +5087,7 @@
             <a:r>
               <a:rPr lang="en-US" sz="1600" b="1" dirty="0">
                 <a:solidFill>
-                  <a:srgbClr val="3FB950"/>
+                  <a:srgbClr val="4A9968"/>
                 </a:solidFill>
                 <a:latin typeface="Calibri" pitchFamily="34" charset="0"/>
                 <a:ea typeface="Calibri" pitchFamily="34" charset="-122"/>
@@ -5099,13 +5126,13 @@
             <a:r>
               <a:rPr lang="en-US" sz="900" dirty="0">
                 <a:solidFill>
-                  <a:srgbClr val="8B949E"/>
+                  <a:srgbClr val="8A8078"/>
                 </a:solidFill>
                 <a:latin typeface="Calibri" pitchFamily="34" charset="0"/>
                 <a:ea typeface="Calibri" pitchFamily="34" charset="-122"/>
                 <a:cs typeface="Calibri" pitchFamily="34" charset="-120"/>
               </a:rPr>
-              <a:t>Image 大小</a:t>
+              <a:t>Image Size</a:t>
             </a:r>
             <a:endParaRPr lang="en-US" sz="900" dirty="0"/>
           </a:p>
@@ -5128,11 +5155,11 @@
             </a:avLst>
           </a:prstGeom>
           <a:solidFill>
-            <a:srgbClr val="161B22"/>
+            <a:srgbClr val="F5F1EB"/>
           </a:solidFill>
           <a:ln w="12700">
             <a:solidFill>
-              <a:srgbClr val="58A6FF"/>
+              <a:srgbClr val="4A7FB5"/>
             </a:solidFill>
             <a:prstDash val="solid"/>
           </a:ln>
@@ -5165,13 +5192,13 @@
             <a:r>
               <a:rPr lang="en-US" sz="1600" b="1" dirty="0">
                 <a:solidFill>
-                  <a:srgbClr val="3FB950"/>
+                  <a:srgbClr val="4A9968"/>
                 </a:solidFill>
                 <a:latin typeface="Calibri" pitchFamily="34" charset="0"/>
                 <a:ea typeface="Calibri" pitchFamily="34" charset="-122"/>
                 <a:cs typeface="Calibri" pitchFamily="34" charset="-120"/>
               </a:rPr>
-              <a:t>強→輕量</a:t>
+              <a:t>Strong → Light</a:t>
             </a:r>
             <a:endParaRPr lang="en-US" sz="1600" dirty="0"/>
           </a:p>
@@ -5204,13 +5231,13 @@
             <a:r>
               <a:rPr lang="en-US" sz="900" dirty="0">
                 <a:solidFill>
-                  <a:srgbClr val="8B949E"/>
+                  <a:srgbClr val="8A8078"/>
                 </a:solidFill>
                 <a:latin typeface="Calibri" pitchFamily="34" charset="0"/>
                 <a:ea typeface="Calibri" pitchFamily="34" charset="-122"/>
                 <a:cs typeface="Calibri" pitchFamily="34" charset="-120"/>
               </a:rPr>
-              <a:t>隔離程度</a:t>
+              <a:t>Isolation Level</a:t>
             </a:r>
             <a:endParaRPr lang="en-US" sz="900" dirty="0"/>
           </a:p>
@@ -5230,7 +5257,7 @@
     <p:bg>
       <p:bgPr>
         <a:solidFill>
-          <a:srgbClr val="0D1117"/>
+          <a:srgbClr val="FFFDF8"/>
         </a:solidFill>
       </p:bgPr>
     </p:bg>
@@ -5263,11 +5290,11 @@
             <a:avLst/>
           </a:prstGeom>
           <a:solidFill>
-            <a:srgbClr val="161B22"/>
+            <a:srgbClr val="F5F1EB"/>
           </a:solidFill>
           <a:ln w="6350">
             <a:solidFill>
-              <a:srgbClr val="30363D"/>
+              <a:srgbClr val="D6CCBF"/>
             </a:solidFill>
             <a:prstDash val="solid"/>
           </a:ln>
@@ -5288,11 +5315,11 @@
             <a:avLst/>
           </a:prstGeom>
           <a:solidFill>
-            <a:srgbClr val="0D8A6C"/>
+            <a:srgbClr val="4A9B8E"/>
           </a:solidFill>
           <a:ln w="12700">
             <a:solidFill>
-              <a:srgbClr val="0D8A6C"/>
+              <a:srgbClr val="4A9B8E"/>
             </a:solidFill>
             <a:prstDash val="solid"/>
           </a:ln>
@@ -5325,13 +5352,13 @@
             <a:r>
               <a:rPr lang="en-US" sz="1600" b="1" dirty="0">
                 <a:solidFill>
-                  <a:srgbClr val="E6EDF3"/>
+                  <a:srgbClr val="2D2926"/>
                 </a:solidFill>
                 <a:latin typeface="Calibri" pitchFamily="34" charset="0"/>
                 <a:ea typeface="Calibri" pitchFamily="34" charset="-122"/>
                 <a:cs typeface="Calibri" pitchFamily="34" charset="-120"/>
               </a:rPr>
-              <a:t>Docker 核心概念：Image → Container → Registry</a:t>
+              <a:t>Docker Core Concepts: Image → Container → Registry</a:t>
             </a:r>
             <a:endParaRPr lang="en-US" sz="1600" dirty="0"/>
           </a:p>
@@ -5364,13 +5391,13 @@
             <a:r>
               <a:rPr lang="en-US" sz="850" dirty="0">
                 <a:solidFill>
-                  <a:srgbClr val="8B949E"/>
+                  <a:srgbClr val="8A8078"/>
                 </a:solidFill>
                 <a:latin typeface="Calibri" pitchFamily="34" charset="0"/>
                 <a:ea typeface="Calibri" pitchFamily="34" charset="-122"/>
                 <a:cs typeface="Calibri" pitchFamily="34" charset="-120"/>
               </a:rPr>
-              <a:t>PART 3  ·  23 / 50</a:t>
+              <a:t>PART 3</a:t>
             </a:r>
             <a:endParaRPr lang="en-US" sz="850" dirty="0"/>
           </a:p>
@@ -5393,18 +5420,18 @@
             </a:avLst>
           </a:prstGeom>
           <a:solidFill>
-            <a:srgbClr val="0D1117"/>
+            <a:srgbClr val="2D2926"/>
           </a:solidFill>
           <a:ln w="12700">
             <a:solidFill>
-              <a:srgbClr val="30363D"/>
+              <a:srgbClr val="D6CCBF"/>
             </a:solidFill>
             <a:prstDash val="solid"/>
           </a:ln>
           <a:effectLst>
             <a:outerShdw sx="100000" sy="100000" kx="0" ky="0" algn="bl" rotWithShape="0" blurRad="127000" dist="50800" dir="2700000">
-              <a:srgbClr val="000000">
-                <a:alpha val="50000"/>
+              <a:srgbClr val="9E9488">
+                <a:alpha val="15000"/>
               </a:srgbClr>
             </a:outerShdw>
           </a:effectLst>
@@ -5427,11 +5454,11 @@
             </a:avLst>
           </a:prstGeom>
           <a:solidFill>
-            <a:srgbClr val="1C2128"/>
+            <a:srgbClr val="ECE6DD"/>
           </a:solidFill>
           <a:ln w="6350">
             <a:solidFill>
-              <a:srgbClr val="30363D"/>
+              <a:srgbClr val="D6CCBF"/>
             </a:solidFill>
             <a:prstDash val="solid"/>
           </a:ln>
@@ -5464,7 +5491,7 @@
             <a:r>
               <a:rPr lang="en-US" sz="800" b="1" dirty="0">
                 <a:solidFill>
-                  <a:srgbClr val="8B949E"/>
+                  <a:srgbClr val="8A8078"/>
                 </a:solidFill>
                 <a:latin typeface="Consolas" pitchFamily="34" charset="0"/>
                 <a:ea typeface="Consolas" pitchFamily="34" charset="-122"/>
@@ -5506,7 +5533,7 @@
             <a:r>
               <a:rPr lang="en-US" sz="950" dirty="0">
                 <a:solidFill>
-                  <a:srgbClr val="E6EDF3"/>
+                  <a:srgbClr val="2D2926"/>
                 </a:solidFill>
                 <a:latin typeface="Consolas" pitchFamily="34" charset="0"/>
                 <a:ea typeface="Consolas" pitchFamily="34" charset="-122"/>
@@ -5535,7 +5562,7 @@
             <a:r>
               <a:rPr lang="en-US" sz="950" dirty="0">
                 <a:solidFill>
-                  <a:srgbClr val="E6EDF3"/>
+                  <a:srgbClr val="2D2926"/>
                 </a:solidFill>
                 <a:latin typeface="Consolas" pitchFamily="34" charset="0"/>
                 <a:ea typeface="Consolas" pitchFamily="34" charset="-122"/>
@@ -5555,7 +5582,7 @@
             <a:r>
               <a:rPr lang="en-US" sz="950" dirty="0">
                 <a:solidFill>
-                  <a:srgbClr val="E6EDF3"/>
+                  <a:srgbClr val="2D2926"/>
                 </a:solidFill>
                 <a:latin typeface="Consolas" pitchFamily="34" charset="0"/>
                 <a:ea typeface="Consolas" pitchFamily="34" charset="-122"/>
@@ -5575,7 +5602,7 @@
             <a:r>
               <a:rPr lang="en-US" sz="950" dirty="0">
                 <a:solidFill>
-                  <a:srgbClr val="E6EDF3"/>
+                  <a:srgbClr val="2D2926"/>
                 </a:solidFill>
                 <a:latin typeface="Consolas" pitchFamily="34" charset="0"/>
                 <a:ea typeface="Consolas" pitchFamily="34" charset="-122"/>
@@ -5604,7 +5631,7 @@
             <a:r>
               <a:rPr lang="en-US" sz="950" dirty="0">
                 <a:solidFill>
-                  <a:srgbClr val="E6EDF3"/>
+                  <a:srgbClr val="2D2926"/>
                 </a:solidFill>
                 <a:latin typeface="Consolas" pitchFamily="34" charset="0"/>
                 <a:ea typeface="Consolas" pitchFamily="34" charset="-122"/>
@@ -5624,7 +5651,7 @@
             <a:r>
               <a:rPr lang="en-US" sz="950" dirty="0">
                 <a:solidFill>
-                  <a:srgbClr val="E6EDF3"/>
+                  <a:srgbClr val="2D2926"/>
                 </a:solidFill>
                 <a:latin typeface="Consolas" pitchFamily="34" charset="0"/>
                 <a:ea typeface="Consolas" pitchFamily="34" charset="-122"/>
@@ -5644,7 +5671,7 @@
             <a:r>
               <a:rPr lang="en-US" sz="950" dirty="0">
                 <a:solidFill>
-                  <a:srgbClr val="E6EDF3"/>
+                  <a:srgbClr val="2D2926"/>
                 </a:solidFill>
                 <a:latin typeface="Consolas" pitchFamily="34" charset="0"/>
                 <a:ea typeface="Consolas" pitchFamily="34" charset="-122"/>
@@ -5673,7 +5700,7 @@
           <a:noFill/>
           <a:ln w="19050">
             <a:solidFill>
-              <a:srgbClr val="0D8A6C"/>
+              <a:srgbClr val="4A9B8E"/>
             </a:solidFill>
             <a:prstDash val="solid"/>
             <a:tailEnd type="arrow"/>
@@ -5682,14 +5709,41 @@
       </p:sp>
       <p:sp>
         <p:nvSpPr>
-          <p:cNvPr id="11" name="Text 9"/>
-          <p:cNvSpPr/>
-          <p:nvPr/>
-        </p:nvSpPr>
-        <p:spPr>
-          <a:xfrm>
-            <a:off x="2651760" y="1243584"/>
-            <a:ext cx="914400" cy="182880"/>
+          <p:cNvPr id="11" name="Shape 9"/>
+          <p:cNvSpPr/>
+          <p:nvPr/>
+        </p:nvSpPr>
+        <p:spPr>
+          <a:xfrm>
+            <a:off x="2759202" y="1225296"/>
+            <a:ext cx="699516" cy="201168"/>
+          </a:xfrm>
+          <a:prstGeom prst="roundRect">
+            <a:avLst>
+              <a:gd name="adj" fmla="val 27273"/>
+            </a:avLst>
+          </a:prstGeom>
+          <a:solidFill>
+            <a:srgbClr val="F5F1EB"/>
+          </a:solidFill>
+          <a:ln w="9525">
+            <a:solidFill>
+              <a:srgbClr val="4A9B8E"/>
+            </a:solidFill>
+            <a:prstDash val="solid"/>
+          </a:ln>
+        </p:spPr>
+      </p:sp>
+      <p:sp>
+        <p:nvSpPr>
+          <p:cNvPr id="12" name="Text 10"/>
+          <p:cNvSpPr/>
+          <p:nvPr/>
+        </p:nvSpPr>
+        <p:spPr>
+          <a:xfrm>
+            <a:off x="2759202" y="1225296"/>
+            <a:ext cx="699516" cy="201168"/>
           </a:xfrm>
           <a:prstGeom prst="rect">
             <a:avLst/>
@@ -5705,9 +5759,9 @@
               <a:buNone/>
             </a:pPr>
             <a:r>
-              <a:rPr lang="en-US" sz="800" dirty="0">
-                <a:solidFill>
-                  <a:srgbClr val="0D8A6C"/>
+              <a:rPr lang="en-US" sz="750" b="1" dirty="0">
+                <a:solidFill>
+                  <a:srgbClr val="4A9B8E"/>
                 </a:solidFill>
                 <a:latin typeface="Consolas" pitchFamily="34" charset="0"/>
                 <a:ea typeface="Consolas" pitchFamily="34" charset="-122"/>
@@ -5715,13 +5769,13 @@
               </a:rPr>
               <a:t>docker build</a:t>
             </a:r>
-            <a:endParaRPr lang="en-US" sz="800" dirty="0"/>
-          </a:p>
-        </p:txBody>
-      </p:sp>
-      <p:sp>
-        <p:nvSpPr>
-          <p:cNvPr id="12" name="Shape 10"/>
+            <a:endParaRPr lang="en-US" sz="750" dirty="0"/>
+          </a:p>
+        </p:txBody>
+      </p:sp>
+      <p:sp>
+        <p:nvSpPr>
+          <p:cNvPr id="13" name="Shape 11"/>
           <p:cNvSpPr/>
           <p:nvPr/>
         </p:nvSpPr>
@@ -5736,18 +5790,18 @@
             </a:avLst>
           </a:prstGeom>
           <a:solidFill>
-            <a:srgbClr val="161B22"/>
+            <a:srgbClr val="F5F1EB"/>
           </a:solidFill>
           <a:ln w="19050">
             <a:solidFill>
-              <a:srgbClr val="0D8A6C"/>
+              <a:srgbClr val="4A9B8E"/>
             </a:solidFill>
             <a:prstDash val="solid"/>
           </a:ln>
           <a:effectLst>
             <a:outerShdw sx="100000" sy="100000" kx="0" ky="0" algn="bl" rotWithShape="0" blurRad="76200" dist="25400" dir="2700000">
-              <a:srgbClr val="000000">
-                <a:alpha val="30000"/>
+              <a:srgbClr val="9E9488">
+                <a:alpha val="15000"/>
               </a:srgbClr>
             </a:outerShdw>
           </a:effectLst>
@@ -5755,7 +5809,7 @@
       </p:sp>
       <p:sp>
         <p:nvSpPr>
-          <p:cNvPr id="13" name="Text 11"/>
+          <p:cNvPr id="14" name="Text 12"/>
           <p:cNvSpPr/>
           <p:nvPr/>
         </p:nvSpPr>
@@ -5791,7 +5845,7 @@
       </p:sp>
       <p:sp>
         <p:nvSpPr>
-          <p:cNvPr id="14" name="Text 12"/>
+          <p:cNvPr id="15" name="Text 13"/>
           <p:cNvSpPr/>
           <p:nvPr/>
         </p:nvSpPr>
@@ -5816,7 +5870,7 @@
             <a:r>
               <a:rPr lang="en-US" sz="1050" b="1" dirty="0">
                 <a:solidFill>
-                  <a:srgbClr val="E6EDF3"/>
+                  <a:srgbClr val="2D2926"/>
                 </a:solidFill>
                 <a:latin typeface="Calibri" pitchFamily="34" charset="0"/>
                 <a:ea typeface="Calibri" pitchFamily="34" charset="-122"/>
@@ -5830,7 +5884,7 @@
       </p:sp>
       <p:sp>
         <p:nvSpPr>
-          <p:cNvPr id="15" name="Text 13"/>
+          <p:cNvPr id="16" name="Text 14"/>
           <p:cNvSpPr/>
           <p:nvPr/>
         </p:nvSpPr>
@@ -5855,13 +5909,13 @@
             <a:r>
               <a:rPr lang="en-US" sz="800" dirty="0">
                 <a:solidFill>
-                  <a:srgbClr val="8B949E"/>
+                  <a:srgbClr val="8A8078"/>
                 </a:solidFill>
                 <a:latin typeface="Consolas" pitchFamily="34" charset="0"/>
                 <a:ea typeface="Consolas" pitchFamily="34" charset="-122"/>
                 <a:cs typeface="Consolas" pitchFamily="34" charset="-120"/>
               </a:rPr>
-              <a:t>不可變快照</a:t>
+              <a:t>Immutable Snapshot</a:t>
             </a:r>
             <a:endParaRPr lang="en-US" sz="800" dirty="0"/>
           </a:p>
@@ -5872,7 +5926,7 @@
             <a:r>
               <a:rPr lang="en-US" sz="800" dirty="0">
                 <a:solidFill>
-                  <a:srgbClr val="8B949E"/>
+                  <a:srgbClr val="8A8078"/>
                 </a:solidFill>
                 <a:latin typeface="Consolas" pitchFamily="34" charset="0"/>
                 <a:ea typeface="Consolas" pitchFamily="34" charset="-122"/>
@@ -5886,7 +5940,7 @@
       </p:sp>
       <p:sp>
         <p:nvSpPr>
-          <p:cNvPr id="16" name="Shape 14"/>
+          <p:cNvPr id="17" name="Shape 15"/>
           <p:cNvSpPr/>
           <p:nvPr/>
         </p:nvSpPr>
@@ -5901,7 +5955,7 @@
           <a:noFill/>
           <a:ln w="19050">
             <a:solidFill>
-              <a:srgbClr val="3FB950"/>
+              <a:srgbClr val="4A9968"/>
             </a:solidFill>
             <a:prstDash val="solid"/>
             <a:tailEnd type="arrow"/>
@@ -5910,14 +5964,41 @@
       </p:sp>
       <p:sp>
         <p:nvSpPr>
-          <p:cNvPr id="17" name="Text 15"/>
-          <p:cNvSpPr/>
-          <p:nvPr/>
-        </p:nvSpPr>
-        <p:spPr>
-          <a:xfrm>
-            <a:off x="5074920" y="1243584"/>
-            <a:ext cx="868680" cy="182880"/>
+          <p:cNvPr id="18" name="Shape 16"/>
+          <p:cNvSpPr/>
+          <p:nvPr/>
+        </p:nvSpPr>
+        <p:spPr>
+          <a:xfrm>
+            <a:off x="5178933" y="1225296"/>
+            <a:ext cx="660654" cy="201168"/>
+          </a:xfrm>
+          <a:prstGeom prst="roundRect">
+            <a:avLst>
+              <a:gd name="adj" fmla="val 27273"/>
+            </a:avLst>
+          </a:prstGeom>
+          <a:solidFill>
+            <a:srgbClr val="F5F1EB"/>
+          </a:solidFill>
+          <a:ln w="9525">
+            <a:solidFill>
+              <a:srgbClr val="4A9968"/>
+            </a:solidFill>
+            <a:prstDash val="solid"/>
+          </a:ln>
+        </p:spPr>
+      </p:sp>
+      <p:sp>
+        <p:nvSpPr>
+          <p:cNvPr id="19" name="Text 17"/>
+          <p:cNvSpPr/>
+          <p:nvPr/>
+        </p:nvSpPr>
+        <p:spPr>
+          <a:xfrm>
+            <a:off x="5178933" y="1225296"/>
+            <a:ext cx="660654" cy="201168"/>
           </a:xfrm>
           <a:prstGeom prst="rect">
             <a:avLst/>
@@ -5933,9 +6014,9 @@
               <a:buNone/>
             </a:pPr>
             <a:r>
-              <a:rPr lang="en-US" sz="800" dirty="0">
-                <a:solidFill>
-                  <a:srgbClr val="3FB950"/>
+              <a:rPr lang="en-US" sz="750" b="1" dirty="0">
+                <a:solidFill>
+                  <a:srgbClr val="4A9968"/>
                 </a:solidFill>
                 <a:latin typeface="Consolas" pitchFamily="34" charset="0"/>
                 <a:ea typeface="Consolas" pitchFamily="34" charset="-122"/>
@@ -5943,13 +6024,13 @@
               </a:rPr>
               <a:t>docker run</a:t>
             </a:r>
-            <a:endParaRPr lang="en-US" sz="800" dirty="0"/>
-          </a:p>
-        </p:txBody>
-      </p:sp>
-      <p:sp>
-        <p:nvSpPr>
-          <p:cNvPr id="18" name="Shape 16"/>
+            <a:endParaRPr lang="en-US" sz="750" dirty="0"/>
+          </a:p>
+        </p:txBody>
+      </p:sp>
+      <p:sp>
+        <p:nvSpPr>
+          <p:cNvPr id="20" name="Shape 18"/>
           <p:cNvSpPr/>
           <p:nvPr/>
         </p:nvSpPr>
@@ -5964,18 +6045,18 @@
             </a:avLst>
           </a:prstGeom>
           <a:solidFill>
-            <a:srgbClr val="161B22"/>
+            <a:srgbClr val="F5F1EB"/>
           </a:solidFill>
           <a:ln w="19050">
             <a:solidFill>
-              <a:srgbClr val="3FB950"/>
+              <a:srgbClr val="4A9968"/>
             </a:solidFill>
             <a:prstDash val="solid"/>
           </a:ln>
           <a:effectLst>
             <a:outerShdw sx="100000" sy="100000" kx="0" ky="0" algn="bl" rotWithShape="0" blurRad="76200" dist="25400" dir="2700000">
-              <a:srgbClr val="000000">
-                <a:alpha val="30000"/>
+              <a:srgbClr val="9E9488">
+                <a:alpha val="15000"/>
               </a:srgbClr>
             </a:outerShdw>
           </a:effectLst>
@@ -5983,7 +6064,7 @@
       </p:sp>
       <p:sp>
         <p:nvSpPr>
-          <p:cNvPr id="19" name="Text 17"/>
+          <p:cNvPr id="21" name="Text 19"/>
           <p:cNvSpPr/>
           <p:nvPr/>
         </p:nvSpPr>
@@ -6019,7 +6100,7 @@
       </p:sp>
       <p:sp>
         <p:nvSpPr>
-          <p:cNvPr id="20" name="Text 18"/>
+          <p:cNvPr id="22" name="Text 20"/>
           <p:cNvSpPr/>
           <p:nvPr/>
         </p:nvSpPr>
@@ -6044,7 +6125,7 @@
             <a:r>
               <a:rPr lang="en-US" sz="1050" b="1" dirty="0">
                 <a:solidFill>
-                  <a:srgbClr val="E6EDF3"/>
+                  <a:srgbClr val="2D2926"/>
                 </a:solidFill>
                 <a:latin typeface="Calibri" pitchFamily="34" charset="0"/>
                 <a:ea typeface="Calibri" pitchFamily="34" charset="-122"/>
@@ -6058,7 +6139,7 @@
       </p:sp>
       <p:sp>
         <p:nvSpPr>
-          <p:cNvPr id="21" name="Text 19"/>
+          <p:cNvPr id="23" name="Text 21"/>
           <p:cNvSpPr/>
           <p:nvPr/>
         </p:nvSpPr>
@@ -6083,13 +6164,13 @@
             <a:r>
               <a:rPr lang="en-US" sz="800" dirty="0">
                 <a:solidFill>
-                  <a:srgbClr val="8B949E"/>
+                  <a:srgbClr val="8A8078"/>
                 </a:solidFill>
                 <a:latin typeface="Consolas" pitchFamily="34" charset="0"/>
                 <a:ea typeface="Consolas" pitchFamily="34" charset="-122"/>
                 <a:cs typeface="Consolas" pitchFamily="34" charset="-120"/>
               </a:rPr>
-              <a:t>執行中的實例</a:t>
+              <a:t>Running Instance</a:t>
             </a:r>
             <a:endParaRPr lang="en-US" sz="800" dirty="0"/>
           </a:p>
@@ -6100,13 +6181,13 @@
             <a:r>
               <a:rPr lang="en-US" sz="800" dirty="0">
                 <a:solidFill>
-                  <a:srgbClr val="8B949E"/>
+                  <a:srgbClr val="8A8078"/>
                 </a:solidFill>
                 <a:latin typeface="Consolas" pitchFamily="34" charset="0"/>
                 <a:ea typeface="Consolas" pitchFamily="34" charset="-122"/>
                 <a:cs typeface="Consolas" pitchFamily="34" charset="-120"/>
               </a:rPr>
-              <a:t>(可多個)</a:t>
+              <a:t>(Multiple OK)</a:t>
             </a:r>
             <a:endParaRPr lang="en-US" sz="800" dirty="0"/>
           </a:p>
@@ -6114,7 +6195,7 @@
       </p:sp>
       <p:sp>
         <p:nvSpPr>
-          <p:cNvPr id="22" name="Shape 20"/>
+          <p:cNvPr id="24" name="Shape 22"/>
           <p:cNvSpPr/>
           <p:nvPr/>
         </p:nvSpPr>
@@ -6129,7 +6210,7 @@
           <a:noFill/>
           <a:ln w="19050">
             <a:solidFill>
-              <a:srgbClr val="58A6FF"/>
+              <a:srgbClr val="4A7FB5"/>
             </a:solidFill>
             <a:prstDash val="solid"/>
             <a:tailEnd type="arrow"/>
@@ -6138,14 +6219,41 @@
       </p:sp>
       <p:sp>
         <p:nvSpPr>
-          <p:cNvPr id="23" name="Text 21"/>
-          <p:cNvSpPr/>
-          <p:nvPr/>
-        </p:nvSpPr>
-        <p:spPr>
-          <a:xfrm>
-            <a:off x="7452360" y="1243584"/>
-            <a:ext cx="685800" cy="182880"/>
+          <p:cNvPr id="25" name="Shape 23"/>
+          <p:cNvSpPr/>
+          <p:nvPr/>
+        </p:nvSpPr>
+        <p:spPr>
+          <a:xfrm>
+            <a:off x="7520940" y="1225296"/>
+            <a:ext cx="548640" cy="201168"/>
+          </a:xfrm>
+          <a:prstGeom prst="roundRect">
+            <a:avLst>
+              <a:gd name="adj" fmla="val 27273"/>
+            </a:avLst>
+          </a:prstGeom>
+          <a:solidFill>
+            <a:srgbClr val="F5F1EB"/>
+          </a:solidFill>
+          <a:ln w="9525">
+            <a:solidFill>
+              <a:srgbClr val="4A7FB5"/>
+            </a:solidFill>
+            <a:prstDash val="solid"/>
+          </a:ln>
+        </p:spPr>
+      </p:sp>
+      <p:sp>
+        <p:nvSpPr>
+          <p:cNvPr id="26" name="Text 24"/>
+          <p:cNvSpPr/>
+          <p:nvPr/>
+        </p:nvSpPr>
+        <p:spPr>
+          <a:xfrm>
+            <a:off x="7520940" y="1225296"/>
+            <a:ext cx="548640" cy="201168"/>
           </a:xfrm>
           <a:prstGeom prst="rect">
             <a:avLst/>
@@ -6161,9 +6269,9 @@
               <a:buNone/>
             </a:pPr>
             <a:r>
-              <a:rPr lang="en-US" sz="800" dirty="0">
-                <a:solidFill>
-                  <a:srgbClr val="58A6FF"/>
+              <a:rPr lang="en-US" sz="750" b="1" dirty="0">
+                <a:solidFill>
+                  <a:srgbClr val="4A7FB5"/>
                 </a:solidFill>
                 <a:latin typeface="Consolas" pitchFamily="34" charset="0"/>
                 <a:ea typeface="Consolas" pitchFamily="34" charset="-122"/>
@@ -6171,13 +6279,13 @@
               </a:rPr>
               <a:t>push/pull</a:t>
             </a:r>
-            <a:endParaRPr lang="en-US" sz="800" dirty="0"/>
-          </a:p>
-        </p:txBody>
-      </p:sp>
-      <p:sp>
-        <p:nvSpPr>
-          <p:cNvPr id="24" name="Shape 22"/>
+            <a:endParaRPr lang="en-US" sz="750" dirty="0"/>
+          </a:p>
+        </p:txBody>
+      </p:sp>
+      <p:sp>
+        <p:nvSpPr>
+          <p:cNvPr id="27" name="Shape 25"/>
           <p:cNvSpPr/>
           <p:nvPr/>
         </p:nvSpPr>
@@ -6192,18 +6300,18 @@
             </a:avLst>
           </a:prstGeom>
           <a:solidFill>
-            <a:srgbClr val="161B22"/>
+            <a:srgbClr val="F5F1EB"/>
           </a:solidFill>
           <a:ln w="19050">
             <a:solidFill>
-              <a:srgbClr val="58A6FF"/>
+              <a:srgbClr val="4A7FB5"/>
             </a:solidFill>
             <a:prstDash val="solid"/>
           </a:ln>
           <a:effectLst>
             <a:outerShdw sx="100000" sy="100000" kx="0" ky="0" algn="bl" rotWithShape="0" blurRad="76200" dist="25400" dir="2700000">
-              <a:srgbClr val="000000">
-                <a:alpha val="30000"/>
+              <a:srgbClr val="9E9488">
+                <a:alpha val="15000"/>
               </a:srgbClr>
             </a:outerShdw>
           </a:effectLst>
@@ -6211,7 +6319,7 @@
       </p:sp>
       <p:sp>
         <p:nvSpPr>
-          <p:cNvPr id="25" name="Text 23"/>
+          <p:cNvPr id="28" name="Text 26"/>
           <p:cNvSpPr/>
           <p:nvPr/>
         </p:nvSpPr>
@@ -6247,7 +6355,7 @@
       </p:sp>
       <p:sp>
         <p:nvSpPr>
-          <p:cNvPr id="26" name="Text 24"/>
+          <p:cNvPr id="29" name="Text 27"/>
           <p:cNvSpPr/>
           <p:nvPr/>
         </p:nvSpPr>
@@ -6272,7 +6380,7 @@
             <a:r>
               <a:rPr lang="en-US" sz="1050" b="1" dirty="0">
                 <a:solidFill>
-                  <a:srgbClr val="E6EDF3"/>
+                  <a:srgbClr val="2D2926"/>
                 </a:solidFill>
                 <a:latin typeface="Calibri" pitchFamily="34" charset="0"/>
                 <a:ea typeface="Calibri" pitchFamily="34" charset="-122"/>
@@ -6286,7 +6394,7 @@
       </p:sp>
       <p:sp>
         <p:nvSpPr>
-          <p:cNvPr id="27" name="Text 25"/>
+          <p:cNvPr id="30" name="Text 28"/>
           <p:cNvSpPr/>
           <p:nvPr/>
         </p:nvSpPr>
@@ -6311,7 +6419,7 @@
             <a:r>
               <a:rPr lang="en-US" sz="800" dirty="0">
                 <a:solidFill>
-                  <a:srgbClr val="8B949E"/>
+                  <a:srgbClr val="8A8078"/>
                 </a:solidFill>
                 <a:latin typeface="Consolas" pitchFamily="34" charset="0"/>
                 <a:ea typeface="Consolas" pitchFamily="34" charset="-122"/>
@@ -6325,7 +6433,7 @@
       </p:sp>
       <p:sp>
         <p:nvSpPr>
-          <p:cNvPr id="28" name="Shape 26"/>
+          <p:cNvPr id="31" name="Shape 29"/>
           <p:cNvSpPr/>
           <p:nvPr/>
         </p:nvSpPr>
@@ -6340,11 +6448,11 @@
             </a:avLst>
           </a:prstGeom>
           <a:solidFill>
-            <a:srgbClr val="1C2128"/>
+            <a:srgbClr val="ECE6DD"/>
           </a:solidFill>
           <a:ln w="9525">
             <a:solidFill>
-              <a:srgbClr val="30363D"/>
+              <a:srgbClr val="D6CCBF"/>
             </a:solidFill>
             <a:prstDash val="solid"/>
           </a:ln>
@@ -6352,7 +6460,7 @@
       </p:sp>
       <p:sp>
         <p:nvSpPr>
-          <p:cNvPr id="29" name="Text 27"/>
+          <p:cNvPr id="32" name="Text 30"/>
           <p:cNvSpPr/>
           <p:nvPr/>
         </p:nvSpPr>
@@ -6377,13 +6485,13 @@
             <a:r>
               <a:rPr lang="en-US" sz="1100" b="1" dirty="0">
                 <a:solidFill>
-                  <a:srgbClr val="8B949E"/>
+                  <a:srgbClr val="8A8078"/>
                 </a:solidFill>
                 <a:latin typeface="Calibri" pitchFamily="34" charset="0"/>
                 <a:ea typeface="Calibri" pitchFamily="34" charset="-122"/>
                 <a:cs typeface="Calibri" pitchFamily="34" charset="-120"/>
               </a:rPr>
-              <a:t>常用 Docker 指令</a:t>
+              <a:t>Common Docker Commands</a:t>
             </a:r>
             <a:endParaRPr lang="en-US" sz="1100" dirty="0"/>
           </a:p>
@@ -6391,7 +6499,7 @@
       </p:sp>
       <p:sp>
         <p:nvSpPr>
-          <p:cNvPr id="30" name="Shape 28"/>
+          <p:cNvPr id="33" name="Shape 31"/>
           <p:cNvSpPr/>
           <p:nvPr/>
         </p:nvSpPr>
@@ -6406,11 +6514,11 @@
             </a:avLst>
           </a:prstGeom>
           <a:solidFill>
-            <a:srgbClr val="161B22"/>
+            <a:srgbClr val="F5F1EB"/>
           </a:solidFill>
           <a:ln w="6350">
             <a:solidFill>
-              <a:srgbClr val="30363D"/>
+              <a:srgbClr val="D6CCBF"/>
             </a:solidFill>
             <a:prstDash val="solid"/>
           </a:ln>
@@ -6418,7 +6526,7 @@
       </p:sp>
       <p:sp>
         <p:nvSpPr>
-          <p:cNvPr id="31" name="Text 29"/>
+          <p:cNvPr id="34" name="Text 32"/>
           <p:cNvSpPr/>
           <p:nvPr/>
         </p:nvSpPr>
@@ -6443,7 +6551,7 @@
             <a:r>
               <a:rPr lang="en-US" sz="1000" dirty="0">
                 <a:solidFill>
-                  <a:srgbClr val="58A6FF"/>
+                  <a:srgbClr val="4A7FB5"/>
                 </a:solidFill>
                 <a:latin typeface="Consolas" pitchFamily="34" charset="0"/>
                 <a:ea typeface="Consolas" pitchFamily="34" charset="-122"/>
@@ -6457,7 +6565,7 @@
       </p:sp>
       <p:sp>
         <p:nvSpPr>
-          <p:cNvPr id="32" name="Text 30"/>
+          <p:cNvPr id="35" name="Text 33"/>
           <p:cNvSpPr/>
           <p:nvPr/>
         </p:nvSpPr>
@@ -6482,13 +6590,13 @@
             <a:r>
               <a:rPr lang="en-US" sz="1000" dirty="0">
                 <a:solidFill>
-                  <a:srgbClr val="8B949E"/>
+                  <a:srgbClr val="8A8078"/>
                 </a:solidFill>
                 <a:latin typeface="Calibri" pitchFamily="34" charset="0"/>
                 <a:ea typeface="Calibri" pitchFamily="34" charset="-122"/>
                 <a:cs typeface="Calibri" pitchFamily="34" charset="-120"/>
               </a:rPr>
-              <a:t>從 Dockerfile 建立 Image</a:t>
+              <a:t>Build Image from Dockerfile</a:t>
             </a:r>
             <a:endParaRPr lang="en-US" sz="1000" dirty="0"/>
           </a:p>
@@ -6496,7 +6604,7 @@
       </p:sp>
       <p:sp>
         <p:nvSpPr>
-          <p:cNvPr id="33" name="Shape 31"/>
+          <p:cNvPr id="36" name="Shape 34"/>
           <p:cNvSpPr/>
           <p:nvPr/>
         </p:nvSpPr>
@@ -6511,11 +6619,11 @@
             </a:avLst>
           </a:prstGeom>
           <a:solidFill>
-            <a:srgbClr val="161B22"/>
+            <a:srgbClr val="F5F1EB"/>
           </a:solidFill>
           <a:ln w="6350">
             <a:solidFill>
-              <a:srgbClr val="30363D"/>
+              <a:srgbClr val="D6CCBF"/>
             </a:solidFill>
             <a:prstDash val="solid"/>
           </a:ln>
@@ -6523,7 +6631,7 @@
       </p:sp>
       <p:sp>
         <p:nvSpPr>
-          <p:cNvPr id="34" name="Text 32"/>
+          <p:cNvPr id="37" name="Text 35"/>
           <p:cNvSpPr/>
           <p:nvPr/>
         </p:nvSpPr>
@@ -6548,7 +6656,7 @@
             <a:r>
               <a:rPr lang="en-US" sz="1000" dirty="0">
                 <a:solidFill>
-                  <a:srgbClr val="58A6FF"/>
+                  <a:srgbClr val="4A7FB5"/>
                 </a:solidFill>
                 <a:latin typeface="Consolas" pitchFamily="34" charset="0"/>
                 <a:ea typeface="Consolas" pitchFamily="34" charset="-122"/>
@@ -6562,7 +6670,7 @@
       </p:sp>
       <p:sp>
         <p:nvSpPr>
-          <p:cNvPr id="35" name="Text 33"/>
+          <p:cNvPr id="38" name="Text 36"/>
           <p:cNvSpPr/>
           <p:nvPr/>
         </p:nvSpPr>
@@ -6587,13 +6695,13 @@
             <a:r>
               <a:rPr lang="en-US" sz="1000" dirty="0">
                 <a:solidFill>
-                  <a:srgbClr val="8B949E"/>
+                  <a:srgbClr val="8A8078"/>
                 </a:solidFill>
                 <a:latin typeface="Calibri" pitchFamily="34" charset="0"/>
                 <a:ea typeface="Calibri" pitchFamily="34" charset="-122"/>
                 <a:cs typeface="Calibri" pitchFamily="34" charset="-120"/>
               </a:rPr>
-              <a:t>啟動 Container</a:t>
+              <a:t>Start a Container</a:t>
             </a:r>
             <a:endParaRPr lang="en-US" sz="1000" dirty="0"/>
           </a:p>
@@ -6601,7 +6709,7 @@
       </p:sp>
       <p:sp>
         <p:nvSpPr>
-          <p:cNvPr id="36" name="Shape 34"/>
+          <p:cNvPr id="39" name="Shape 37"/>
           <p:cNvSpPr/>
           <p:nvPr/>
         </p:nvSpPr>
@@ -6616,11 +6724,11 @@
             </a:avLst>
           </a:prstGeom>
           <a:solidFill>
-            <a:srgbClr val="161B22"/>
+            <a:srgbClr val="F5F1EB"/>
           </a:solidFill>
           <a:ln w="6350">
             <a:solidFill>
-              <a:srgbClr val="30363D"/>
+              <a:srgbClr val="D6CCBF"/>
             </a:solidFill>
             <a:prstDash val="solid"/>
           </a:ln>
@@ -6628,7 +6736,7 @@
       </p:sp>
       <p:sp>
         <p:nvSpPr>
-          <p:cNvPr id="37" name="Text 35"/>
+          <p:cNvPr id="40" name="Text 38"/>
           <p:cNvSpPr/>
           <p:nvPr/>
         </p:nvSpPr>
@@ -6653,7 +6761,7 @@
             <a:r>
               <a:rPr lang="en-US" sz="1000" dirty="0">
                 <a:solidFill>
-                  <a:srgbClr val="58A6FF"/>
+                  <a:srgbClr val="4A7FB5"/>
                 </a:solidFill>
                 <a:latin typeface="Consolas" pitchFamily="34" charset="0"/>
                 <a:ea typeface="Consolas" pitchFamily="34" charset="-122"/>
@@ -6667,7 +6775,7 @@
       </p:sp>
       <p:sp>
         <p:nvSpPr>
-          <p:cNvPr id="38" name="Text 36"/>
+          <p:cNvPr id="41" name="Text 39"/>
           <p:cNvSpPr/>
           <p:nvPr/>
         </p:nvSpPr>
@@ -6692,13 +6800,13 @@
             <a:r>
               <a:rPr lang="en-US" sz="1000" dirty="0">
                 <a:solidFill>
-                  <a:srgbClr val="8B949E"/>
+                  <a:srgbClr val="8A8078"/>
                 </a:solidFill>
                 <a:latin typeface="Calibri" pitchFamily="34" charset="0"/>
                 <a:ea typeface="Calibri" pitchFamily="34" charset="-122"/>
                 <a:cs typeface="Calibri" pitchFamily="34" charset="-120"/>
               </a:rPr>
-              <a:t>查看執行中的 Container</a:t>
+              <a:t>List running Containers</a:t>
             </a:r>
             <a:endParaRPr lang="en-US" sz="1000" dirty="0"/>
           </a:p>
@@ -6706,7 +6814,7 @@
       </p:sp>
       <p:sp>
         <p:nvSpPr>
-          <p:cNvPr id="39" name="Shape 37"/>
+          <p:cNvPr id="42" name="Shape 40"/>
           <p:cNvSpPr/>
           <p:nvPr/>
         </p:nvSpPr>
@@ -6721,11 +6829,11 @@
             </a:avLst>
           </a:prstGeom>
           <a:solidFill>
-            <a:srgbClr val="161B22"/>
+            <a:srgbClr val="F5F1EB"/>
           </a:solidFill>
           <a:ln w="6350">
             <a:solidFill>
-              <a:srgbClr val="30363D"/>
+              <a:srgbClr val="D6CCBF"/>
             </a:solidFill>
             <a:prstDash val="solid"/>
           </a:ln>
@@ -6733,7 +6841,7 @@
       </p:sp>
       <p:sp>
         <p:nvSpPr>
-          <p:cNvPr id="40" name="Text 38"/>
+          <p:cNvPr id="43" name="Text 41"/>
           <p:cNvSpPr/>
           <p:nvPr/>
         </p:nvSpPr>
@@ -6758,7 +6866,7 @@
             <a:r>
               <a:rPr lang="en-US" sz="1000" dirty="0">
                 <a:solidFill>
-                  <a:srgbClr val="58A6FF"/>
+                  <a:srgbClr val="4A7FB5"/>
                 </a:solidFill>
                 <a:latin typeface="Consolas" pitchFamily="34" charset="0"/>
                 <a:ea typeface="Consolas" pitchFamily="34" charset="-122"/>
@@ -6772,7 +6880,7 @@
       </p:sp>
       <p:sp>
         <p:nvSpPr>
-          <p:cNvPr id="41" name="Text 39"/>
+          <p:cNvPr id="44" name="Text 42"/>
           <p:cNvSpPr/>
           <p:nvPr/>
         </p:nvSpPr>
@@ -6797,13 +6905,13 @@
             <a:r>
               <a:rPr lang="en-US" sz="1000" dirty="0">
                 <a:solidFill>
-                  <a:srgbClr val="8B949E"/>
+                  <a:srgbClr val="8A8078"/>
                 </a:solidFill>
                 <a:latin typeface="Calibri" pitchFamily="34" charset="0"/>
                 <a:ea typeface="Calibri" pitchFamily="34" charset="-122"/>
                 <a:cs typeface="Calibri" pitchFamily="34" charset="-120"/>
               </a:rPr>
-              <a:t>查看 Container log</a:t>
+              <a:t>View Container logs</a:t>
             </a:r>
             <a:endParaRPr lang="en-US" sz="1000" dirty="0"/>
           </a:p>
@@ -6811,7 +6919,7 @@
       </p:sp>
       <p:sp>
         <p:nvSpPr>
-          <p:cNvPr id="42" name="Shape 40"/>
+          <p:cNvPr id="45" name="Shape 43"/>
           <p:cNvSpPr/>
           <p:nvPr/>
         </p:nvSpPr>
@@ -6826,11 +6934,11 @@
             </a:avLst>
           </a:prstGeom>
           <a:solidFill>
-            <a:srgbClr val="161B22"/>
+            <a:srgbClr val="F5F1EB"/>
           </a:solidFill>
           <a:ln w="6350">
             <a:solidFill>
-              <a:srgbClr val="30363D"/>
+              <a:srgbClr val="D6CCBF"/>
             </a:solidFill>
             <a:prstDash val="solid"/>
           </a:ln>
@@ -6838,7 +6946,7 @@
       </p:sp>
       <p:sp>
         <p:nvSpPr>
-          <p:cNvPr id="43" name="Text 41"/>
+          <p:cNvPr id="46" name="Text 44"/>
           <p:cNvSpPr/>
           <p:nvPr/>
         </p:nvSpPr>
@@ -6863,7 +6971,7 @@
             <a:r>
               <a:rPr lang="en-US" sz="1000" dirty="0">
                 <a:solidFill>
-                  <a:srgbClr val="58A6FF"/>
+                  <a:srgbClr val="4A7FB5"/>
                 </a:solidFill>
                 <a:latin typeface="Consolas" pitchFamily="34" charset="0"/>
                 <a:ea typeface="Consolas" pitchFamily="34" charset="-122"/>
@@ -6877,7 +6985,7 @@
       </p:sp>
       <p:sp>
         <p:nvSpPr>
-          <p:cNvPr id="44" name="Text 42"/>
+          <p:cNvPr id="47" name="Text 45"/>
           <p:cNvSpPr/>
           <p:nvPr/>
         </p:nvSpPr>
@@ -6902,13 +7010,13 @@
             <a:r>
               <a:rPr lang="en-US" sz="1000" dirty="0">
                 <a:solidFill>
-                  <a:srgbClr val="8B949E"/>
+                  <a:srgbClr val="8A8078"/>
                 </a:solidFill>
                 <a:latin typeface="Calibri" pitchFamily="34" charset="0"/>
                 <a:ea typeface="Calibri" pitchFamily="34" charset="-122"/>
                 <a:cs typeface="Calibri" pitchFamily="34" charset="-120"/>
               </a:rPr>
-              <a:t>進入 Container 除錯</a:t>
+              <a:t>Shell into Container for debugging</a:t>
             </a:r>
             <a:endParaRPr lang="en-US" sz="1000" dirty="0"/>
           </a:p>
@@ -6928,7 +7036,7 @@
     <p:bg>
       <p:bgPr>
         <a:solidFill>
-          <a:srgbClr val="0D1117"/>
+          <a:srgbClr val="FFFDF8"/>
         </a:solidFill>
       </p:bgPr>
     </p:bg>
@@ -6961,11 +7069,11 @@
             <a:avLst/>
           </a:prstGeom>
           <a:solidFill>
-            <a:srgbClr val="161B22"/>
+            <a:srgbClr val="F5F1EB"/>
           </a:solidFill>
           <a:ln w="6350">
             <a:solidFill>
-              <a:srgbClr val="30363D"/>
+              <a:srgbClr val="D6CCBF"/>
             </a:solidFill>
             <a:prstDash val="solid"/>
           </a:ln>
@@ -6986,11 +7094,11 @@
             <a:avLst/>
           </a:prstGeom>
           <a:solidFill>
-            <a:srgbClr val="0D8A6C"/>
+            <a:srgbClr val="4A9B8E"/>
           </a:solidFill>
           <a:ln w="12700">
             <a:solidFill>
-              <a:srgbClr val="0D8A6C"/>
+              <a:srgbClr val="4A9B8E"/>
             </a:solidFill>
             <a:prstDash val="solid"/>
           </a:ln>
@@ -7023,13 +7131,13 @@
             <a:r>
               <a:rPr lang="en-US" sz="1600" b="1" dirty="0">
                 <a:solidFill>
-                  <a:srgbClr val="E6EDF3"/>
+                  <a:srgbClr val="2D2926"/>
                 </a:solidFill>
                 <a:latin typeface="Calibri" pitchFamily="34" charset="0"/>
                 <a:ea typeface="Calibri" pitchFamily="34" charset="-122"/>
                 <a:cs typeface="Calibri" pitchFamily="34" charset="-120"/>
               </a:rPr>
-              <a:t>Docker Compose：多容器應用一鍵啟動</a:t>
+              <a:t>Docker Compose: Multi-Container Apps in One Command</a:t>
             </a:r>
             <a:endParaRPr lang="en-US" sz="1600" dirty="0"/>
           </a:p>
@@ -7062,13 +7170,13 @@
             <a:r>
               <a:rPr lang="en-US" sz="850" dirty="0">
                 <a:solidFill>
-                  <a:srgbClr val="8B949E"/>
+                  <a:srgbClr val="8A8078"/>
                 </a:solidFill>
                 <a:latin typeface="Calibri" pitchFamily="34" charset="0"/>
                 <a:ea typeface="Calibri" pitchFamily="34" charset="-122"/>
                 <a:cs typeface="Calibri" pitchFamily="34" charset="-120"/>
               </a:rPr>
-              <a:t>PART 3  ·  24 / 50</a:t>
+              <a:t>PART 3</a:t>
             </a:r>
             <a:endParaRPr lang="en-US" sz="850" dirty="0"/>
           </a:p>
@@ -7091,18 +7199,18 @@
             </a:avLst>
           </a:prstGeom>
           <a:solidFill>
-            <a:srgbClr val="0D1117"/>
+            <a:srgbClr val="2D2926"/>
           </a:solidFill>
           <a:ln w="12700">
             <a:solidFill>
-              <a:srgbClr val="30363D"/>
+              <a:srgbClr val="D6CCBF"/>
             </a:solidFill>
             <a:prstDash val="solid"/>
           </a:ln>
           <a:effectLst>
             <a:outerShdw sx="100000" sy="100000" kx="0" ky="0" algn="bl" rotWithShape="0" blurRad="127000" dist="50800" dir="2700000">
-              <a:srgbClr val="000000">
-                <a:alpha val="50000"/>
+              <a:srgbClr val="9E9488">
+                <a:alpha val="15000"/>
               </a:srgbClr>
             </a:outerShdw>
           </a:effectLst>
@@ -7125,11 +7233,11 @@
             </a:avLst>
           </a:prstGeom>
           <a:solidFill>
-            <a:srgbClr val="1C2128"/>
+            <a:srgbClr val="ECE6DD"/>
           </a:solidFill>
           <a:ln w="6350">
             <a:solidFill>
-              <a:srgbClr val="30363D"/>
+              <a:srgbClr val="D6CCBF"/>
             </a:solidFill>
             <a:prstDash val="solid"/>
           </a:ln>
@@ -7162,7 +7270,7 @@
             <a:r>
               <a:rPr lang="en-US" sz="800" b="1" dirty="0">
                 <a:solidFill>
-                  <a:srgbClr val="8B949E"/>
+                  <a:srgbClr val="8A8078"/>
                 </a:solidFill>
                 <a:latin typeface="Consolas" pitchFamily="34" charset="0"/>
                 <a:ea typeface="Consolas" pitchFamily="34" charset="-122"/>
@@ -7204,7 +7312,7 @@
             <a:r>
               <a:rPr lang="en-US" sz="950" dirty="0">
                 <a:solidFill>
-                  <a:srgbClr val="E6EDF3"/>
+                  <a:srgbClr val="2D2926"/>
                 </a:solidFill>
                 <a:latin typeface="Consolas" pitchFamily="34" charset="0"/>
                 <a:ea typeface="Consolas" pitchFamily="34" charset="-122"/>
@@ -7224,7 +7332,7 @@
             <a:r>
               <a:rPr lang="en-US" sz="950" dirty="0">
                 <a:solidFill>
-                  <a:srgbClr val="E6EDF3"/>
+                  <a:srgbClr val="2D2926"/>
                 </a:solidFill>
                 <a:latin typeface="Consolas" pitchFamily="34" charset="0"/>
                 <a:ea typeface="Consolas" pitchFamily="34" charset="-122"/>
@@ -7244,7 +7352,7 @@
             <a:r>
               <a:rPr lang="en-US" sz="950" dirty="0">
                 <a:solidFill>
-                  <a:srgbClr val="E6EDF3"/>
+                  <a:srgbClr val="2D2926"/>
                 </a:solidFill>
                 <a:latin typeface="Consolas" pitchFamily="34" charset="0"/>
                 <a:ea typeface="Consolas" pitchFamily="34" charset="-122"/>
@@ -7264,7 +7372,7 @@
             <a:r>
               <a:rPr lang="en-US" sz="950" dirty="0">
                 <a:solidFill>
-                  <a:srgbClr val="E6EDF3"/>
+                  <a:srgbClr val="2D2926"/>
                 </a:solidFill>
                 <a:latin typeface="Consolas" pitchFamily="34" charset="0"/>
                 <a:ea typeface="Consolas" pitchFamily="34" charset="-122"/>
@@ -7284,7 +7392,7 @@
             <a:r>
               <a:rPr lang="en-US" sz="950" dirty="0">
                 <a:solidFill>
-                  <a:srgbClr val="E6EDF3"/>
+                  <a:srgbClr val="2D2926"/>
                 </a:solidFill>
                 <a:latin typeface="Consolas" pitchFamily="34" charset="0"/>
                 <a:ea typeface="Consolas" pitchFamily="34" charset="-122"/>
@@ -7313,7 +7421,7 @@
             <a:r>
               <a:rPr lang="en-US" sz="950" dirty="0">
                 <a:solidFill>
-                  <a:srgbClr val="E6EDF3"/>
+                  <a:srgbClr val="2D2926"/>
                 </a:solidFill>
                 <a:latin typeface="Consolas" pitchFamily="34" charset="0"/>
                 <a:ea typeface="Consolas" pitchFamily="34" charset="-122"/>
@@ -7333,7 +7441,7 @@
             <a:r>
               <a:rPr lang="en-US" sz="950" dirty="0">
                 <a:solidFill>
-                  <a:srgbClr val="E6EDF3"/>
+                  <a:srgbClr val="2D2926"/>
                 </a:solidFill>
                 <a:latin typeface="Consolas" pitchFamily="34" charset="0"/>
                 <a:ea typeface="Consolas" pitchFamily="34" charset="-122"/>
@@ -7353,7 +7461,7 @@
             <a:r>
               <a:rPr lang="en-US" sz="950" dirty="0">
                 <a:solidFill>
-                  <a:srgbClr val="E6EDF3"/>
+                  <a:srgbClr val="2D2926"/>
                 </a:solidFill>
                 <a:latin typeface="Consolas" pitchFamily="34" charset="0"/>
                 <a:ea typeface="Consolas" pitchFamily="34" charset="-122"/>
@@ -7373,7 +7481,7 @@
             <a:r>
               <a:rPr lang="en-US" sz="950" dirty="0">
                 <a:solidFill>
-                  <a:srgbClr val="E6EDF3"/>
+                  <a:srgbClr val="2D2926"/>
                 </a:solidFill>
                 <a:latin typeface="Consolas" pitchFamily="34" charset="0"/>
                 <a:ea typeface="Consolas" pitchFamily="34" charset="-122"/>
@@ -7393,7 +7501,7 @@
             <a:r>
               <a:rPr lang="en-US" sz="950" dirty="0">
                 <a:solidFill>
-                  <a:srgbClr val="E6EDF3"/>
+                  <a:srgbClr val="2D2926"/>
                 </a:solidFill>
                 <a:latin typeface="Consolas" pitchFamily="34" charset="0"/>
                 <a:ea typeface="Consolas" pitchFamily="34" charset="-122"/>
@@ -7422,7 +7530,7 @@
             <a:r>
               <a:rPr lang="en-US" sz="950" dirty="0">
                 <a:solidFill>
-                  <a:srgbClr val="E6EDF3"/>
+                  <a:srgbClr val="2D2926"/>
                 </a:solidFill>
                 <a:latin typeface="Consolas" pitchFamily="34" charset="0"/>
                 <a:ea typeface="Consolas" pitchFamily="34" charset="-122"/>
@@ -7442,7 +7550,7 @@
             <a:r>
               <a:rPr lang="en-US" sz="950" dirty="0">
                 <a:solidFill>
-                  <a:srgbClr val="E6EDF3"/>
+                  <a:srgbClr val="2D2926"/>
                 </a:solidFill>
                 <a:latin typeface="Consolas" pitchFamily="34" charset="0"/>
                 <a:ea typeface="Consolas" pitchFamily="34" charset="-122"/>
@@ -7462,7 +7570,7 @@
             <a:r>
               <a:rPr lang="en-US" sz="950" dirty="0">
                 <a:solidFill>
-                  <a:srgbClr val="E6EDF3"/>
+                  <a:srgbClr val="2D2926"/>
                 </a:solidFill>
                 <a:latin typeface="Consolas" pitchFamily="34" charset="0"/>
                 <a:ea typeface="Consolas" pitchFamily="34" charset="-122"/>
@@ -7482,7 +7590,7 @@
             <a:r>
               <a:rPr lang="en-US" sz="950" dirty="0">
                 <a:solidFill>
-                  <a:srgbClr val="E6EDF3"/>
+                  <a:srgbClr val="2D2926"/>
                 </a:solidFill>
                 <a:latin typeface="Consolas" pitchFamily="34" charset="0"/>
                 <a:ea typeface="Consolas" pitchFamily="34" charset="-122"/>
@@ -7511,7 +7619,7 @@
             <a:r>
               <a:rPr lang="en-US" sz="950" dirty="0">
                 <a:solidFill>
-                  <a:srgbClr val="E6EDF3"/>
+                  <a:srgbClr val="2D2926"/>
                 </a:solidFill>
                 <a:latin typeface="Consolas" pitchFamily="34" charset="0"/>
                 <a:ea typeface="Consolas" pitchFamily="34" charset="-122"/>
@@ -7531,7 +7639,7 @@
             <a:r>
               <a:rPr lang="en-US" sz="950" dirty="0">
                 <a:solidFill>
-                  <a:srgbClr val="E6EDF3"/>
+                  <a:srgbClr val="2D2926"/>
                 </a:solidFill>
                 <a:latin typeface="Consolas" pitchFamily="34" charset="0"/>
                 <a:ea typeface="Consolas" pitchFamily="34" charset="-122"/>
@@ -7560,7 +7668,7 @@
             <a:r>
               <a:rPr lang="en-US" sz="950" dirty="0">
                 <a:solidFill>
-                  <a:srgbClr val="E6EDF3"/>
+                  <a:srgbClr val="2D2926"/>
                 </a:solidFill>
                 <a:latin typeface="Consolas" pitchFamily="34" charset="0"/>
                 <a:ea typeface="Consolas" pitchFamily="34" charset="-122"/>
@@ -7580,7 +7688,7 @@
             <a:r>
               <a:rPr lang="en-US" sz="950" dirty="0">
                 <a:solidFill>
-                  <a:srgbClr val="E6EDF3"/>
+                  <a:srgbClr val="2D2926"/>
                 </a:solidFill>
                 <a:latin typeface="Consolas" pitchFamily="34" charset="0"/>
                 <a:ea typeface="Consolas" pitchFamily="34" charset="-122"/>
@@ -7619,7 +7727,7 @@
             <a:r>
               <a:rPr lang="en-US" sz="2800" b="1" dirty="0">
                 <a:solidFill>
-                  <a:srgbClr val="0D8A6C"/>
+                  <a:srgbClr val="4A9B8E"/>
                 </a:solidFill>
                 <a:latin typeface="Calibri" pitchFamily="34" charset="0"/>
                 <a:ea typeface="Calibri" pitchFamily="34" charset="-122"/>
@@ -7649,7 +7757,7 @@
           </a:prstGeom>
           <a:ln w="12700">
             <a:solidFill>
-              <a:srgbClr val="0D8A6C"/>
+              <a:srgbClr val="4A9B8E"/>
             </a:solidFill>
             <a:prstDash val="dash"/>
           </a:ln>
@@ -7672,11 +7780,11 @@
             </a:avLst>
           </a:prstGeom>
           <a:solidFill>
-            <a:srgbClr val="0D1117"/>
+            <a:srgbClr val="FFFDF8"/>
           </a:solidFill>
           <a:ln w="6350">
             <a:solidFill>
-              <a:srgbClr val="0D8A6C"/>
+              <a:srgbClr val="4A9B8E"/>
             </a:solidFill>
             <a:prstDash val="solid"/>
           </a:ln>
@@ -7709,7 +7817,7 @@
             <a:r>
               <a:rPr lang="en-US" sz="750" b="1" dirty="0">
                 <a:solidFill>
-                  <a:srgbClr val="0D8A6C"/>
+                  <a:srgbClr val="4A9B8E"/>
                 </a:solidFill>
                 <a:latin typeface="Calibri" pitchFamily="34" charset="0"/>
                 <a:ea typeface="Calibri" pitchFamily="34" charset="-122"/>
@@ -7738,18 +7846,18 @@
             </a:avLst>
           </a:prstGeom>
           <a:solidFill>
-            <a:srgbClr val="161B22"/>
+            <a:srgbClr val="F5F1EB"/>
           </a:solidFill>
           <a:ln w="19050">
             <a:solidFill>
-              <a:srgbClr val="1F6FEB"/>
+              <a:srgbClr val="5B8DB8"/>
             </a:solidFill>
             <a:prstDash val="solid"/>
           </a:ln>
           <a:effectLst>
             <a:outerShdw sx="100000" sy="100000" kx="0" ky="0" algn="bl" rotWithShape="0" blurRad="76200" dist="25400" dir="2700000">
-              <a:srgbClr val="000000">
-                <a:alpha val="30000"/>
+              <a:srgbClr val="9E9488">
+                <a:alpha val="15000"/>
               </a:srgbClr>
             </a:outerShdw>
           </a:effectLst>
@@ -7818,7 +7926,7 @@
             <a:r>
               <a:rPr lang="en-US" sz="1050" b="1" dirty="0">
                 <a:solidFill>
-                  <a:srgbClr val="E6EDF3"/>
+                  <a:srgbClr val="2D2926"/>
                 </a:solidFill>
                 <a:latin typeface="Calibri" pitchFamily="34" charset="0"/>
                 <a:ea typeface="Calibri" pitchFamily="34" charset="-122"/>
@@ -7857,7 +7965,7 @@
             <a:r>
               <a:rPr lang="en-US" sz="800" dirty="0">
                 <a:solidFill>
-                  <a:srgbClr val="8B949E"/>
+                  <a:srgbClr val="8A8078"/>
                 </a:solidFill>
                 <a:latin typeface="Consolas" pitchFamily="34" charset="0"/>
                 <a:ea typeface="Consolas" pitchFamily="34" charset="-122"/>
@@ -7886,18 +7994,18 @@
             </a:avLst>
           </a:prstGeom>
           <a:solidFill>
-            <a:srgbClr val="161B22"/>
+            <a:srgbClr val="F5F1EB"/>
           </a:solidFill>
           <a:ln w="19050">
             <a:solidFill>
-              <a:srgbClr val="238636"/>
+              <a:srgbClr val="5A9B6E"/>
             </a:solidFill>
             <a:prstDash val="solid"/>
           </a:ln>
           <a:effectLst>
             <a:outerShdw sx="100000" sy="100000" kx="0" ky="0" algn="bl" rotWithShape="0" blurRad="76200" dist="25400" dir="2700000">
-              <a:srgbClr val="000000">
-                <a:alpha val="30000"/>
+              <a:srgbClr val="9E9488">
+                <a:alpha val="15000"/>
               </a:srgbClr>
             </a:outerShdw>
           </a:effectLst>
@@ -7966,7 +8074,7 @@
             <a:r>
               <a:rPr lang="en-US" sz="1050" b="1" dirty="0">
                 <a:solidFill>
-                  <a:srgbClr val="E6EDF3"/>
+                  <a:srgbClr val="2D2926"/>
                 </a:solidFill>
                 <a:latin typeface="Calibri" pitchFamily="34" charset="0"/>
                 <a:ea typeface="Calibri" pitchFamily="34" charset="-122"/>
@@ -8005,7 +8113,7 @@
             <a:r>
               <a:rPr lang="en-US" sz="800" dirty="0">
                 <a:solidFill>
-                  <a:srgbClr val="8B949E"/>
+                  <a:srgbClr val="8A8078"/>
                 </a:solidFill>
                 <a:latin typeface="Consolas" pitchFamily="34" charset="0"/>
                 <a:ea typeface="Consolas" pitchFamily="34" charset="-122"/>
@@ -8034,18 +8142,18 @@
             </a:avLst>
           </a:prstGeom>
           <a:solidFill>
-            <a:srgbClr val="161B22"/>
+            <a:srgbClr val="F5F1EB"/>
           </a:solidFill>
           <a:ln w="19050">
             <a:solidFill>
-              <a:srgbClr val="E36209"/>
+              <a:srgbClr val="C4804A"/>
             </a:solidFill>
             <a:prstDash val="solid"/>
           </a:ln>
           <a:effectLst>
             <a:outerShdw sx="100000" sy="100000" kx="0" ky="0" algn="bl" rotWithShape="0" blurRad="76200" dist="25400" dir="2700000">
-              <a:srgbClr val="000000">
-                <a:alpha val="30000"/>
+              <a:srgbClr val="9E9488">
+                <a:alpha val="15000"/>
               </a:srgbClr>
             </a:outerShdw>
           </a:effectLst>
@@ -8114,7 +8222,7 @@
             <a:r>
               <a:rPr lang="en-US" sz="1050" b="1" dirty="0">
                 <a:solidFill>
-                  <a:srgbClr val="E6EDF3"/>
+                  <a:srgbClr val="2D2926"/>
                 </a:solidFill>
                 <a:latin typeface="Calibri" pitchFamily="34" charset="0"/>
                 <a:ea typeface="Calibri" pitchFamily="34" charset="-122"/>
@@ -8153,7 +8261,7 @@
             <a:r>
               <a:rPr lang="en-US" sz="800" dirty="0">
                 <a:solidFill>
-                  <a:srgbClr val="8B949E"/>
+                  <a:srgbClr val="8A8078"/>
                 </a:solidFill>
                 <a:latin typeface="Consolas" pitchFamily="34" charset="0"/>
                 <a:ea typeface="Consolas" pitchFamily="34" charset="-122"/>
@@ -8182,18 +8290,18 @@
             </a:avLst>
           </a:prstGeom>
           <a:solidFill>
-            <a:srgbClr val="161B22"/>
+            <a:srgbClr val="F5F1EB"/>
           </a:solidFill>
           <a:ln w="19050">
             <a:solidFill>
-              <a:srgbClr val="6E40C9"/>
+              <a:srgbClr val="8B6AB5"/>
             </a:solidFill>
             <a:prstDash val="solid"/>
           </a:ln>
           <a:effectLst>
             <a:outerShdw sx="100000" sy="100000" kx="0" ky="0" algn="bl" rotWithShape="0" blurRad="76200" dist="25400" dir="2700000">
-              <a:srgbClr val="000000">
-                <a:alpha val="30000"/>
+              <a:srgbClr val="9E9488">
+                <a:alpha val="15000"/>
               </a:srgbClr>
             </a:outerShdw>
           </a:effectLst>
@@ -8262,7 +8370,7 @@
             <a:r>
               <a:rPr lang="en-US" sz="1050" b="1" dirty="0">
                 <a:solidFill>
-                  <a:srgbClr val="E6EDF3"/>
+                  <a:srgbClr val="2D2926"/>
                 </a:solidFill>
                 <a:latin typeface="Calibri" pitchFamily="34" charset="0"/>
                 <a:ea typeface="Calibri" pitchFamily="34" charset="-122"/>
@@ -8301,7 +8409,7 @@
             <a:r>
               <a:rPr lang="en-US" sz="800" dirty="0">
                 <a:solidFill>
-                  <a:srgbClr val="8B949E"/>
+                  <a:srgbClr val="8A8078"/>
                 </a:solidFill>
                 <a:latin typeface="Consolas" pitchFamily="34" charset="0"/>
                 <a:ea typeface="Consolas" pitchFamily="34" charset="-122"/>
@@ -8330,7 +8438,7 @@
           <a:noFill/>
           <a:ln w="19050">
             <a:solidFill>
-              <a:srgbClr val="1F6FEB"/>
+              <a:srgbClr val="5B8DB8"/>
             </a:solidFill>
             <a:prstDash val="solid"/>
             <a:tailEnd type="arrow"/>
@@ -8339,14 +8447,41 @@
       </p:sp>
       <p:sp>
         <p:nvSpPr>
-          <p:cNvPr id="31" name="Text 29"/>
-          <p:cNvSpPr/>
-          <p:nvPr/>
-        </p:nvSpPr>
-        <p:spPr>
-          <a:xfrm>
-            <a:off x="6492240" y="1170432"/>
-            <a:ext cx="548640" cy="182880"/>
+          <p:cNvPr id="31" name="Shape 29"/>
+          <p:cNvSpPr/>
+          <p:nvPr/>
+        </p:nvSpPr>
+        <p:spPr>
+          <a:xfrm>
+            <a:off x="6492240" y="1152144"/>
+            <a:ext cx="548640" cy="201168"/>
+          </a:xfrm>
+          <a:prstGeom prst="roundRect">
+            <a:avLst>
+              <a:gd name="adj" fmla="val 27273"/>
+            </a:avLst>
+          </a:prstGeom>
+          <a:solidFill>
+            <a:srgbClr val="F5F1EB"/>
+          </a:solidFill>
+          <a:ln w="9525">
+            <a:solidFill>
+              <a:srgbClr val="5B8DB8"/>
+            </a:solidFill>
+            <a:prstDash val="solid"/>
+          </a:ln>
+        </p:spPr>
+      </p:sp>
+      <p:sp>
+        <p:nvSpPr>
+          <p:cNvPr id="32" name="Text 30"/>
+          <p:cNvSpPr/>
+          <p:nvPr/>
+        </p:nvSpPr>
+        <p:spPr>
+          <a:xfrm>
+            <a:off x="6492240" y="1152144"/>
+            <a:ext cx="548640" cy="201168"/>
           </a:xfrm>
           <a:prstGeom prst="rect">
             <a:avLst/>
@@ -8362,9 +8497,9 @@
               <a:buNone/>
             </a:pPr>
             <a:r>
-              <a:rPr lang="en-US" sz="800" dirty="0">
-                <a:solidFill>
-                  <a:srgbClr val="1F6FEB"/>
+              <a:rPr lang="en-US" sz="750" b="1" dirty="0">
+                <a:solidFill>
+                  <a:srgbClr val="5B8DB8"/>
                 </a:solidFill>
                 <a:latin typeface="Consolas" pitchFamily="34" charset="0"/>
                 <a:ea typeface="Consolas" pitchFamily="34" charset="-122"/>
@@ -8372,13 +8507,13 @@
               </a:rPr>
               <a:t>proxy</a:t>
             </a:r>
-            <a:endParaRPr lang="en-US" sz="800" dirty="0"/>
-          </a:p>
-        </p:txBody>
-      </p:sp>
-      <p:sp>
-        <p:nvSpPr>
-          <p:cNvPr id="32" name="Shape 30"/>
+            <a:endParaRPr lang="en-US" sz="750" dirty="0"/>
+          </a:p>
+        </p:txBody>
+      </p:sp>
+      <p:sp>
+        <p:nvSpPr>
+          <p:cNvPr id="33" name="Shape 31"/>
           <p:cNvSpPr/>
           <p:nvPr/>
         </p:nvSpPr>
@@ -8393,7 +8528,7 @@
           <a:noFill/>
           <a:ln w="19050">
             <a:solidFill>
-              <a:srgbClr val="238636"/>
+              <a:srgbClr val="5A9B6E"/>
             </a:solidFill>
             <a:prstDash val="solid"/>
             <a:tailEnd type="arrow"/>
@@ -8402,7 +8537,7 @@
       </p:sp>
       <p:sp>
         <p:nvSpPr>
-          <p:cNvPr id="33" name="Shape 31"/>
+          <p:cNvPr id="34" name="Shape 32"/>
           <p:cNvSpPr/>
           <p:nvPr/>
         </p:nvSpPr>
@@ -8417,7 +8552,7 @@
           <a:noFill/>
           <a:ln w="19050">
             <a:solidFill>
-              <a:srgbClr val="6E40C9"/>
+              <a:srgbClr val="8B6AB5"/>
             </a:solidFill>
             <a:prstDash val="solid"/>
             <a:tailEnd type="arrow"/>
@@ -8426,14 +8561,41 @@
       </p:sp>
       <p:sp>
         <p:nvSpPr>
-          <p:cNvPr id="34" name="Text 32"/>
-          <p:cNvSpPr/>
-          <p:nvPr/>
-        </p:nvSpPr>
-        <p:spPr>
-          <a:xfrm>
-            <a:off x="6858000" y="2724912"/>
-            <a:ext cx="201168" cy="182880"/>
+          <p:cNvPr id="35" name="Shape 33"/>
+          <p:cNvSpPr/>
+          <p:nvPr/>
+        </p:nvSpPr>
+        <p:spPr>
+          <a:xfrm>
+            <a:off x="6684264" y="2706624"/>
+            <a:ext cx="548640" cy="201168"/>
+          </a:xfrm>
+          <a:prstGeom prst="roundRect">
+            <a:avLst>
+              <a:gd name="adj" fmla="val 27273"/>
+            </a:avLst>
+          </a:prstGeom>
+          <a:solidFill>
+            <a:srgbClr val="F5F1EB"/>
+          </a:solidFill>
+          <a:ln w="9525">
+            <a:solidFill>
+              <a:srgbClr val="8B6AB5"/>
+            </a:solidFill>
+            <a:prstDash val="solid"/>
+          </a:ln>
+        </p:spPr>
+      </p:sp>
+      <p:sp>
+        <p:nvSpPr>
+          <p:cNvPr id="36" name="Text 34"/>
+          <p:cNvSpPr/>
+          <p:nvPr/>
+        </p:nvSpPr>
+        <p:spPr>
+          <a:xfrm>
+            <a:off x="6684264" y="2706624"/>
+            <a:ext cx="548640" cy="201168"/>
           </a:xfrm>
           <a:prstGeom prst="rect">
             <a:avLst/>
@@ -8449,9 +8611,9 @@
               <a:buNone/>
             </a:pPr>
             <a:r>
-              <a:rPr lang="en-US" sz="800" dirty="0">
-                <a:solidFill>
-                  <a:srgbClr val="6E40C9"/>
+              <a:rPr lang="en-US" sz="750" b="1" dirty="0">
+                <a:solidFill>
+                  <a:srgbClr val="8B6AB5"/>
                 </a:solidFill>
                 <a:latin typeface="Consolas" pitchFamily="34" charset="0"/>
                 <a:ea typeface="Consolas" pitchFamily="34" charset="-122"/>
@@ -8459,13 +8621,13 @@
               </a:rPr>
               <a:t>cache</a:t>
             </a:r>
-            <a:endParaRPr lang="en-US" sz="800" dirty="0"/>
-          </a:p>
-        </p:txBody>
-      </p:sp>
-      <p:sp>
-        <p:nvSpPr>
-          <p:cNvPr id="35" name="Shape 33"/>
+            <a:endParaRPr lang="en-US" sz="750" dirty="0"/>
+          </a:p>
+        </p:txBody>
+      </p:sp>
+      <p:sp>
+        <p:nvSpPr>
+          <p:cNvPr id="37" name="Shape 35"/>
           <p:cNvSpPr/>
           <p:nvPr/>
         </p:nvSpPr>
@@ -8480,11 +8642,11 @@
             </a:avLst>
           </a:prstGeom>
           <a:solidFill>
-            <a:srgbClr val="0A1929"/>
+            <a:srgbClr val="EAF0F7"/>
           </a:solidFill>
           <a:ln w="9525">
             <a:solidFill>
-              <a:srgbClr val="58A6FF"/>
+              <a:srgbClr val="4A7FB5"/>
             </a:solidFill>
             <a:prstDash val="solid"/>
           </a:ln>
@@ -8492,7 +8654,7 @@
       </p:sp>
       <p:sp>
         <p:nvSpPr>
-          <p:cNvPr id="36" name="Text 34"/>
+          <p:cNvPr id="38" name="Text 36"/>
           <p:cNvSpPr/>
           <p:nvPr/>
         </p:nvSpPr>
@@ -8517,13 +8679,13 @@
             <a:r>
               <a:rPr lang="en-US" sz="1000" i="1" dirty="0">
                 <a:solidFill>
-                  <a:srgbClr val="8B949E"/>
+                  <a:srgbClr val="8A8078"/>
                 </a:solidFill>
                 <a:latin typeface="Calibri" pitchFamily="34" charset="0"/>
                 <a:ea typeface="Calibri" pitchFamily="34" charset="-122"/>
                 <a:cs typeface="Calibri" pitchFamily="34" charset="-120"/>
               </a:rPr>
-              <a:t>💡  一個指令搞定：docker compose up -d — 開發環境從此告別手動啟動多個服務</a:t>
+              <a:t>💡  One command does it all: docker compose up -d — No more manually starting multiple services</a:t>
             </a:r>
             <a:endParaRPr lang="en-US" sz="1000" dirty="0"/>
           </a:p>
@@ -8543,7 +8705,7 @@
     <p:bg>
       <p:bgPr>
         <a:solidFill>
-          <a:srgbClr val="0D1117"/>
+          <a:srgbClr val="FFFDF8"/>
         </a:solidFill>
       </p:bgPr>
     </p:bg>
@@ -8576,11 +8738,11 @@
             <a:avLst/>
           </a:prstGeom>
           <a:solidFill>
-            <a:srgbClr val="161B22"/>
+            <a:srgbClr val="F5F1EB"/>
           </a:solidFill>
           <a:ln w="6350">
             <a:solidFill>
-              <a:srgbClr val="30363D"/>
+              <a:srgbClr val="D6CCBF"/>
             </a:solidFill>
             <a:prstDash val="solid"/>
           </a:ln>
@@ -8601,11 +8763,11 @@
             <a:avLst/>
           </a:prstGeom>
           <a:solidFill>
-            <a:srgbClr val="58A6FF"/>
+            <a:srgbClr val="4A7FB5"/>
           </a:solidFill>
           <a:ln w="12700">
             <a:solidFill>
-              <a:srgbClr val="58A6FF"/>
+              <a:srgbClr val="4A7FB5"/>
             </a:solidFill>
             <a:prstDash val="solid"/>
           </a:ln>
@@ -8638,13 +8800,13 @@
             <a:r>
               <a:rPr lang="en-US" sz="1600" b="1" dirty="0">
                 <a:solidFill>
-                  <a:srgbClr val="E6EDF3"/>
+                  <a:srgbClr val="2D2926"/>
                 </a:solidFill>
                 <a:latin typeface="Calibri" pitchFamily="34" charset="0"/>
                 <a:ea typeface="Calibri" pitchFamily="34" charset="-122"/>
                 <a:cs typeface="Calibri" pitchFamily="34" charset="-120"/>
               </a:rPr>
-              <a:t>Container Registry：Image 的倉庫與版本管理</a:t>
+              <a:t>Container Registry: Image Repository &amp; Version Management</a:t>
             </a:r>
             <a:endParaRPr lang="en-US" sz="1600" dirty="0"/>
           </a:p>
@@ -8677,13 +8839,13 @@
             <a:r>
               <a:rPr lang="en-US" sz="850" dirty="0">
                 <a:solidFill>
-                  <a:srgbClr val="8B949E"/>
+                  <a:srgbClr val="8A8078"/>
                 </a:solidFill>
                 <a:latin typeface="Calibri" pitchFamily="34" charset="0"/>
                 <a:ea typeface="Calibri" pitchFamily="34" charset="-122"/>
                 <a:cs typeface="Calibri" pitchFamily="34" charset="-120"/>
               </a:rPr>
-              <a:t>PART 3  ·  25 / 50</a:t>
+              <a:t>PART 3</a:t>
             </a:r>
             <a:endParaRPr lang="en-US" sz="850" dirty="0"/>
           </a:p>
@@ -8706,18 +8868,18 @@
             </a:avLst>
           </a:prstGeom>
           <a:solidFill>
-            <a:srgbClr val="161B22"/>
+            <a:srgbClr val="F5F1EB"/>
           </a:solidFill>
           <a:ln w="19050">
             <a:solidFill>
-              <a:srgbClr val="8B949E"/>
+              <a:srgbClr val="908880"/>
             </a:solidFill>
             <a:prstDash val="solid"/>
           </a:ln>
           <a:effectLst>
             <a:outerShdw sx="100000" sy="100000" kx="0" ky="0" algn="bl" rotWithShape="0" blurRad="76200" dist="25400" dir="2700000">
-              <a:srgbClr val="000000">
-                <a:alpha val="30000"/>
+              <a:srgbClr val="9E9488">
+                <a:alpha val="15000"/>
               </a:srgbClr>
             </a:outerShdw>
           </a:effectLst>
@@ -8786,7 +8948,7 @@
             <a:r>
               <a:rPr lang="en-US" sz="1050" b="1" dirty="0">
                 <a:solidFill>
-                  <a:srgbClr val="E6EDF3"/>
+                  <a:srgbClr val="2D2926"/>
                 </a:solidFill>
                 <a:latin typeface="Calibri" pitchFamily="34" charset="0"/>
                 <a:ea typeface="Calibri" pitchFamily="34" charset="-122"/>
@@ -8825,13 +8987,13 @@
             <a:r>
               <a:rPr lang="en-US" sz="800" dirty="0">
                 <a:solidFill>
-                  <a:srgbClr val="8B949E"/>
+                  <a:srgbClr val="8A8078"/>
                 </a:solidFill>
                 <a:latin typeface="Consolas" pitchFamily="34" charset="0"/>
                 <a:ea typeface="Consolas" pitchFamily="34" charset="-122"/>
                 <a:cs typeface="Consolas" pitchFamily="34" charset="-120"/>
               </a:rPr>
-              <a:t>程式碼變更</a:t>
+              <a:t>Code Changes</a:t>
             </a:r>
             <a:endParaRPr lang="en-US" sz="800" dirty="0"/>
           </a:p>
@@ -8854,7 +9016,7 @@
           <a:noFill/>
           <a:ln w="19050">
             <a:solidFill>
-              <a:srgbClr val="58A6FF"/>
+              <a:srgbClr val="4A7FB5"/>
             </a:solidFill>
             <a:prstDash val="solid"/>
             <a:tailEnd type="arrow"/>
@@ -8863,14 +9025,41 @@
       </p:sp>
       <p:sp>
         <p:nvSpPr>
-          <p:cNvPr id="11" name="Text 9"/>
-          <p:cNvSpPr/>
-          <p:nvPr/>
-        </p:nvSpPr>
-        <p:spPr>
-          <a:xfrm>
-            <a:off x="1463040" y="1033272"/>
-            <a:ext cx="822960" cy="182880"/>
+          <p:cNvPr id="11" name="Shape 9"/>
+          <p:cNvSpPr/>
+          <p:nvPr/>
+        </p:nvSpPr>
+        <p:spPr>
+          <a:xfrm>
+            <a:off x="1563624" y="1014984"/>
+            <a:ext cx="621792" cy="201168"/>
+          </a:xfrm>
+          <a:prstGeom prst="roundRect">
+            <a:avLst>
+              <a:gd name="adj" fmla="val 27273"/>
+            </a:avLst>
+          </a:prstGeom>
+          <a:solidFill>
+            <a:srgbClr val="F5F1EB"/>
+          </a:solidFill>
+          <a:ln w="9525">
+            <a:solidFill>
+              <a:srgbClr val="4A7FB5"/>
+            </a:solidFill>
+            <a:prstDash val="solid"/>
+          </a:ln>
+        </p:spPr>
+      </p:sp>
+      <p:sp>
+        <p:nvSpPr>
+          <p:cNvPr id="12" name="Text 10"/>
+          <p:cNvSpPr/>
+          <p:nvPr/>
+        </p:nvSpPr>
+        <p:spPr>
+          <a:xfrm>
+            <a:off x="1563624" y="1014984"/>
+            <a:ext cx="621792" cy="201168"/>
           </a:xfrm>
           <a:prstGeom prst="rect">
             <a:avLst/>
@@ -8886,9 +9075,9 @@
               <a:buNone/>
             </a:pPr>
             <a:r>
-              <a:rPr lang="en-US" sz="800" dirty="0">
-                <a:solidFill>
-                  <a:srgbClr val="58A6FF"/>
+              <a:rPr lang="en-US" sz="750" b="1" dirty="0">
+                <a:solidFill>
+                  <a:srgbClr val="4A7FB5"/>
                 </a:solidFill>
                 <a:latin typeface="Consolas" pitchFamily="34" charset="0"/>
                 <a:ea typeface="Consolas" pitchFamily="34" charset="-122"/>
@@ -8896,16 +9085,16 @@
               </a:rPr>
               <a:t>git commit</a:t>
             </a:r>
-            <a:endParaRPr lang="en-US" sz="800" dirty="0"/>
+            <a:endParaRPr lang="en-US" sz="750" dirty="0"/>
           </a:p>
           <a:p>
             <a:pPr algn="ctr" indent="0" marL="0">
               <a:buNone/>
             </a:pPr>
             <a:r>
-              <a:rPr lang="en-US" sz="800" dirty="0">
-                <a:solidFill>
-                  <a:srgbClr val="58A6FF"/>
+              <a:rPr lang="en-US" sz="750" b="1" dirty="0">
+                <a:solidFill>
+                  <a:srgbClr val="4A7FB5"/>
                 </a:solidFill>
                 <a:latin typeface="Consolas" pitchFamily="34" charset="0"/>
                 <a:ea typeface="Consolas" pitchFamily="34" charset="-122"/>
@@ -8913,13 +9102,13 @@
               </a:rPr>
               <a:t>docker build</a:t>
             </a:r>
-            <a:endParaRPr lang="en-US" sz="800" dirty="0"/>
-          </a:p>
-        </p:txBody>
-      </p:sp>
-      <p:sp>
-        <p:nvSpPr>
-          <p:cNvPr id="12" name="Shape 10"/>
+            <a:endParaRPr lang="en-US" sz="750" dirty="0"/>
+          </a:p>
+        </p:txBody>
+      </p:sp>
+      <p:sp>
+        <p:nvSpPr>
+          <p:cNvPr id="13" name="Shape 11"/>
           <p:cNvSpPr/>
           <p:nvPr/>
         </p:nvSpPr>
@@ -8934,18 +9123,18 @@
             </a:avLst>
           </a:prstGeom>
           <a:solidFill>
-            <a:srgbClr val="161B22"/>
+            <a:srgbClr val="F5F1EB"/>
           </a:solidFill>
           <a:ln w="19050">
             <a:solidFill>
-              <a:srgbClr val="0D8A6C"/>
+              <a:srgbClr val="4A9B8E"/>
             </a:solidFill>
             <a:prstDash val="solid"/>
           </a:ln>
           <a:effectLst>
             <a:outerShdw sx="100000" sy="100000" kx="0" ky="0" algn="bl" rotWithShape="0" blurRad="76200" dist="25400" dir="2700000">
-              <a:srgbClr val="000000">
-                <a:alpha val="30000"/>
+              <a:srgbClr val="9E9488">
+                <a:alpha val="15000"/>
               </a:srgbClr>
             </a:outerShdw>
           </a:effectLst>
@@ -8953,7 +9142,7 @@
       </p:sp>
       <p:sp>
         <p:nvSpPr>
-          <p:cNvPr id="13" name="Text 11"/>
+          <p:cNvPr id="14" name="Text 12"/>
           <p:cNvSpPr/>
           <p:nvPr/>
         </p:nvSpPr>
@@ -8989,7 +9178,7 @@
       </p:sp>
       <p:sp>
         <p:nvSpPr>
-          <p:cNvPr id="14" name="Text 12"/>
+          <p:cNvPr id="15" name="Text 13"/>
           <p:cNvSpPr/>
           <p:nvPr/>
         </p:nvSpPr>
@@ -9014,7 +9203,7 @@
             <a:r>
               <a:rPr lang="en-US" sz="1050" b="1" dirty="0">
                 <a:solidFill>
-                  <a:srgbClr val="E6EDF3"/>
+                  <a:srgbClr val="2D2926"/>
                 </a:solidFill>
                 <a:latin typeface="Calibri" pitchFamily="34" charset="0"/>
                 <a:ea typeface="Calibri" pitchFamily="34" charset="-122"/>
@@ -9028,7 +9217,7 @@
       </p:sp>
       <p:sp>
         <p:nvSpPr>
-          <p:cNvPr id="15" name="Text 13"/>
+          <p:cNvPr id="16" name="Text 14"/>
           <p:cNvSpPr/>
           <p:nvPr/>
         </p:nvSpPr>
@@ -9053,7 +9242,7 @@
             <a:r>
               <a:rPr lang="en-US" sz="800" dirty="0">
                 <a:solidFill>
-                  <a:srgbClr val="8B949E"/>
+                  <a:srgbClr val="8A8078"/>
                 </a:solidFill>
                 <a:latin typeface="Consolas" pitchFamily="34" charset="0"/>
                 <a:ea typeface="Consolas" pitchFamily="34" charset="-122"/>
@@ -9067,7 +9256,7 @@
       </p:sp>
       <p:sp>
         <p:nvSpPr>
-          <p:cNvPr id="16" name="Shape 14"/>
+          <p:cNvPr id="17" name="Shape 15"/>
           <p:cNvSpPr/>
           <p:nvPr/>
         </p:nvSpPr>
@@ -9082,7 +9271,7 @@
           <a:noFill/>
           <a:ln w="19050">
             <a:solidFill>
-              <a:srgbClr val="58A6FF"/>
+              <a:srgbClr val="4A7FB5"/>
             </a:solidFill>
             <a:prstDash val="solid"/>
             <a:tailEnd type="arrow"/>
@@ -9091,14 +9280,41 @@
       </p:sp>
       <p:sp>
         <p:nvSpPr>
-          <p:cNvPr id="17" name="Text 15"/>
-          <p:cNvSpPr/>
-          <p:nvPr/>
-        </p:nvSpPr>
-        <p:spPr>
-          <a:xfrm>
-            <a:off x="3611880" y="1033272"/>
-            <a:ext cx="822960" cy="182880"/>
+          <p:cNvPr id="18" name="Shape 16"/>
+          <p:cNvSpPr/>
+          <p:nvPr/>
+        </p:nvSpPr>
+        <p:spPr>
+          <a:xfrm>
+            <a:off x="3712464" y="1014984"/>
+            <a:ext cx="621792" cy="201168"/>
+          </a:xfrm>
+          <a:prstGeom prst="roundRect">
+            <a:avLst>
+              <a:gd name="adj" fmla="val 27273"/>
+            </a:avLst>
+          </a:prstGeom>
+          <a:solidFill>
+            <a:srgbClr val="F5F1EB"/>
+          </a:solidFill>
+          <a:ln w="9525">
+            <a:solidFill>
+              <a:srgbClr val="4A7FB5"/>
+            </a:solidFill>
+            <a:prstDash val="solid"/>
+          </a:ln>
+        </p:spPr>
+      </p:sp>
+      <p:sp>
+        <p:nvSpPr>
+          <p:cNvPr id="19" name="Text 17"/>
+          <p:cNvSpPr/>
+          <p:nvPr/>
+        </p:nvSpPr>
+        <p:spPr>
+          <a:xfrm>
+            <a:off x="3712464" y="1014984"/>
+            <a:ext cx="621792" cy="201168"/>
           </a:xfrm>
           <a:prstGeom prst="rect">
             <a:avLst/>
@@ -9114,9 +9330,9 @@
               <a:buNone/>
             </a:pPr>
             <a:r>
-              <a:rPr lang="en-US" sz="800" dirty="0">
-                <a:solidFill>
-                  <a:srgbClr val="58A6FF"/>
+              <a:rPr lang="en-US" sz="750" b="1" dirty="0">
+                <a:solidFill>
+                  <a:srgbClr val="4A7FB5"/>
                 </a:solidFill>
                 <a:latin typeface="Consolas" pitchFamily="34" charset="0"/>
                 <a:ea typeface="Consolas" pitchFamily="34" charset="-122"/>
@@ -9124,13 +9340,13 @@
               </a:rPr>
               <a:t>docker push</a:t>
             </a:r>
-            <a:endParaRPr lang="en-US" sz="800" dirty="0"/>
-          </a:p>
-        </p:txBody>
-      </p:sp>
-      <p:sp>
-        <p:nvSpPr>
-          <p:cNvPr id="18" name="Shape 16"/>
+            <a:endParaRPr lang="en-US" sz="750" dirty="0"/>
+          </a:p>
+        </p:txBody>
+      </p:sp>
+      <p:sp>
+        <p:nvSpPr>
+          <p:cNvPr id="20" name="Shape 18"/>
           <p:cNvSpPr/>
           <p:nvPr/>
         </p:nvSpPr>
@@ -9145,18 +9361,18 @@
             </a:avLst>
           </a:prstGeom>
           <a:solidFill>
-            <a:srgbClr val="161B22"/>
+            <a:srgbClr val="F5F1EB"/>
           </a:solidFill>
           <a:ln w="19050">
             <a:solidFill>
-              <a:srgbClr val="58A6FF"/>
+              <a:srgbClr val="4A7FB5"/>
             </a:solidFill>
             <a:prstDash val="solid"/>
           </a:ln>
           <a:effectLst>
             <a:outerShdw sx="100000" sy="100000" kx="0" ky="0" algn="bl" rotWithShape="0" blurRad="76200" dist="25400" dir="2700000">
-              <a:srgbClr val="000000">
-                <a:alpha val="30000"/>
+              <a:srgbClr val="9E9488">
+                <a:alpha val="15000"/>
               </a:srgbClr>
             </a:outerShdw>
           </a:effectLst>
@@ -9164,7 +9380,7 @@
       </p:sp>
       <p:sp>
         <p:nvSpPr>
-          <p:cNvPr id="19" name="Text 17"/>
+          <p:cNvPr id="21" name="Text 19"/>
           <p:cNvSpPr/>
           <p:nvPr/>
         </p:nvSpPr>
@@ -9200,7 +9416,7 @@
       </p:sp>
       <p:sp>
         <p:nvSpPr>
-          <p:cNvPr id="20" name="Text 18"/>
+          <p:cNvPr id="22" name="Text 20"/>
           <p:cNvSpPr/>
           <p:nvPr/>
         </p:nvSpPr>
@@ -9225,7 +9441,7 @@
             <a:r>
               <a:rPr lang="en-US" sz="1050" b="1" dirty="0">
                 <a:solidFill>
-                  <a:srgbClr val="E6EDF3"/>
+                  <a:srgbClr val="2D2926"/>
                 </a:solidFill>
                 <a:latin typeface="Calibri" pitchFamily="34" charset="0"/>
                 <a:ea typeface="Calibri" pitchFamily="34" charset="-122"/>
@@ -9239,7 +9455,7 @@
       </p:sp>
       <p:sp>
         <p:nvSpPr>
-          <p:cNvPr id="21" name="Text 19"/>
+          <p:cNvPr id="23" name="Text 21"/>
           <p:cNvSpPr/>
           <p:nvPr/>
         </p:nvSpPr>
@@ -9264,7 +9480,7 @@
             <a:r>
               <a:rPr lang="en-US" sz="800" dirty="0">
                 <a:solidFill>
-                  <a:srgbClr val="8B949E"/>
+                  <a:srgbClr val="8A8078"/>
                 </a:solidFill>
                 <a:latin typeface="Consolas" pitchFamily="34" charset="0"/>
                 <a:ea typeface="Consolas" pitchFamily="34" charset="-122"/>
@@ -9281,7 +9497,7 @@
             <a:r>
               <a:rPr lang="en-US" sz="800" dirty="0">
                 <a:solidFill>
-                  <a:srgbClr val="8B949E"/>
+                  <a:srgbClr val="8A8078"/>
                 </a:solidFill>
                 <a:latin typeface="Consolas" pitchFamily="34" charset="0"/>
                 <a:ea typeface="Consolas" pitchFamily="34" charset="-122"/>
@@ -9295,7 +9511,7 @@
       </p:sp>
       <p:sp>
         <p:nvSpPr>
-          <p:cNvPr id="22" name="Shape 20"/>
+          <p:cNvPr id="24" name="Shape 22"/>
           <p:cNvSpPr/>
           <p:nvPr/>
         </p:nvSpPr>
@@ -9310,7 +9526,7 @@
           <a:noFill/>
           <a:ln w="19050">
             <a:solidFill>
-              <a:srgbClr val="3FB950"/>
+              <a:srgbClr val="4A9968"/>
             </a:solidFill>
             <a:prstDash val="solid"/>
             <a:tailEnd type="arrow"/>
@@ -9319,14 +9535,41 @@
       </p:sp>
       <p:sp>
         <p:nvSpPr>
-          <p:cNvPr id="23" name="Text 21"/>
-          <p:cNvSpPr/>
-          <p:nvPr/>
-        </p:nvSpPr>
-        <p:spPr>
-          <a:xfrm>
-            <a:off x="5897880" y="1033272"/>
-            <a:ext cx="822960" cy="182880"/>
+          <p:cNvPr id="25" name="Shape 23"/>
+          <p:cNvSpPr/>
+          <p:nvPr/>
+        </p:nvSpPr>
+        <p:spPr>
+          <a:xfrm>
+            <a:off x="5998464" y="1014984"/>
+            <a:ext cx="621792" cy="201168"/>
+          </a:xfrm>
+          <a:prstGeom prst="roundRect">
+            <a:avLst>
+              <a:gd name="adj" fmla="val 27273"/>
+            </a:avLst>
+          </a:prstGeom>
+          <a:solidFill>
+            <a:srgbClr val="F5F1EB"/>
+          </a:solidFill>
+          <a:ln w="9525">
+            <a:solidFill>
+              <a:srgbClr val="4A9968"/>
+            </a:solidFill>
+            <a:prstDash val="solid"/>
+          </a:ln>
+        </p:spPr>
+      </p:sp>
+      <p:sp>
+        <p:nvSpPr>
+          <p:cNvPr id="26" name="Text 24"/>
+          <p:cNvSpPr/>
+          <p:nvPr/>
+        </p:nvSpPr>
+        <p:spPr>
+          <a:xfrm>
+            <a:off x="5998464" y="1014984"/>
+            <a:ext cx="621792" cy="201168"/>
           </a:xfrm>
           <a:prstGeom prst="rect">
             <a:avLst/>
@@ -9342,9 +9585,9 @@
               <a:buNone/>
             </a:pPr>
             <a:r>
-              <a:rPr lang="en-US" sz="800" dirty="0">
-                <a:solidFill>
-                  <a:srgbClr val="3FB950"/>
+              <a:rPr lang="en-US" sz="750" b="1" dirty="0">
+                <a:solidFill>
+                  <a:srgbClr val="4A9968"/>
                 </a:solidFill>
                 <a:latin typeface="Consolas" pitchFamily="34" charset="0"/>
                 <a:ea typeface="Consolas" pitchFamily="34" charset="-122"/>
@@ -9352,13 +9595,13 @@
               </a:rPr>
               <a:t>docker pull</a:t>
             </a:r>
-            <a:endParaRPr lang="en-US" sz="800" dirty="0"/>
-          </a:p>
-        </p:txBody>
-      </p:sp>
-      <p:sp>
-        <p:nvSpPr>
-          <p:cNvPr id="24" name="Shape 22"/>
+            <a:endParaRPr lang="en-US" sz="750" dirty="0"/>
+          </a:p>
+        </p:txBody>
+      </p:sp>
+      <p:sp>
+        <p:nvSpPr>
+          <p:cNvPr id="27" name="Shape 25"/>
           <p:cNvSpPr/>
           <p:nvPr/>
         </p:nvSpPr>
@@ -9373,18 +9616,18 @@
             </a:avLst>
           </a:prstGeom>
           <a:solidFill>
-            <a:srgbClr val="161B22"/>
+            <a:srgbClr val="F5F1EB"/>
           </a:solidFill>
           <a:ln w="19050">
             <a:solidFill>
-              <a:srgbClr val="3FB950"/>
+              <a:srgbClr val="4A9968"/>
             </a:solidFill>
             <a:prstDash val="solid"/>
           </a:ln>
           <a:effectLst>
             <a:outerShdw sx="100000" sy="100000" kx="0" ky="0" algn="bl" rotWithShape="0" blurRad="76200" dist="25400" dir="2700000">
-              <a:srgbClr val="000000">
-                <a:alpha val="30000"/>
+              <a:srgbClr val="9E9488">
+                <a:alpha val="15000"/>
               </a:srgbClr>
             </a:outerShdw>
           </a:effectLst>
@@ -9392,7 +9635,7 @@
       </p:sp>
       <p:sp>
         <p:nvSpPr>
-          <p:cNvPr id="25" name="Text 23"/>
+          <p:cNvPr id="28" name="Text 26"/>
           <p:cNvSpPr/>
           <p:nvPr/>
         </p:nvSpPr>
@@ -9428,7 +9671,7 @@
       </p:sp>
       <p:sp>
         <p:nvSpPr>
-          <p:cNvPr id="26" name="Text 24"/>
+          <p:cNvPr id="29" name="Text 27"/>
           <p:cNvSpPr/>
           <p:nvPr/>
         </p:nvSpPr>
@@ -9453,7 +9696,7 @@
             <a:r>
               <a:rPr lang="en-US" sz="1050" b="1" dirty="0">
                 <a:solidFill>
-                  <a:srgbClr val="E6EDF3"/>
+                  <a:srgbClr val="2D2926"/>
                 </a:solidFill>
                 <a:latin typeface="Calibri" pitchFamily="34" charset="0"/>
                 <a:ea typeface="Calibri" pitchFamily="34" charset="-122"/>
@@ -9467,7 +9710,7 @@
       </p:sp>
       <p:sp>
         <p:nvSpPr>
-          <p:cNvPr id="27" name="Text 25"/>
+          <p:cNvPr id="30" name="Text 28"/>
           <p:cNvSpPr/>
           <p:nvPr/>
         </p:nvSpPr>
@@ -9492,7 +9735,7 @@
             <a:r>
               <a:rPr lang="en-US" sz="800" dirty="0">
                 <a:solidFill>
-                  <a:srgbClr val="8B949E"/>
+                  <a:srgbClr val="8A8078"/>
                 </a:solidFill>
                 <a:latin typeface="Consolas" pitchFamily="34" charset="0"/>
                 <a:ea typeface="Consolas" pitchFamily="34" charset="-122"/>
@@ -9509,7 +9752,7 @@
             <a:r>
               <a:rPr lang="en-US" sz="800" dirty="0">
                 <a:solidFill>
-                  <a:srgbClr val="8B949E"/>
+                  <a:srgbClr val="8A8078"/>
                 </a:solidFill>
                 <a:latin typeface="Consolas" pitchFamily="34" charset="0"/>
                 <a:ea typeface="Consolas" pitchFamily="34" charset="-122"/>
@@ -9526,7 +9769,7 @@
             <a:r>
               <a:rPr lang="en-US" sz="800" dirty="0">
                 <a:solidFill>
-                  <a:srgbClr val="8B949E"/>
+                  <a:srgbClr val="8A8078"/>
                 </a:solidFill>
                 <a:latin typeface="Consolas" pitchFamily="34" charset="0"/>
                 <a:ea typeface="Consolas" pitchFamily="34" charset="-122"/>
@@ -9540,7 +9783,7 @@
       </p:sp>
       <p:sp>
         <p:nvSpPr>
-          <p:cNvPr id="28" name="Text 26"/>
+          <p:cNvPr id="31" name="Text 29"/>
           <p:cNvSpPr/>
           <p:nvPr/>
         </p:nvSpPr>
@@ -9565,13 +9808,13 @@
             <a:r>
               <a:rPr lang="en-US" sz="1300" b="1" dirty="0">
                 <a:solidFill>
-                  <a:srgbClr val="58A6FF"/>
+                  <a:srgbClr val="4A7FB5"/>
                 </a:solidFill>
                 <a:latin typeface="Calibri" pitchFamily="34" charset="0"/>
                 <a:ea typeface="Calibri" pitchFamily="34" charset="-122"/>
                 <a:cs typeface="Calibri" pitchFamily="34" charset="-120"/>
               </a:rPr>
-              <a:t>Image Tag 策略</a:t>
+              <a:t>Image Tag Strategy</a:t>
             </a:r>
             <a:endParaRPr lang="en-US" sz="1300" dirty="0"/>
           </a:p>
@@ -9579,7 +9822,7 @@
       </p:sp>
       <p:sp>
         <p:nvSpPr>
-          <p:cNvPr id="29" name="Shape 27"/>
+          <p:cNvPr id="32" name="Shape 30"/>
           <p:cNvSpPr/>
           <p:nvPr/>
         </p:nvSpPr>
@@ -9594,11 +9837,11 @@
             </a:avLst>
           </a:prstGeom>
           <a:solidFill>
-            <a:srgbClr val="2A0F0F"/>
+            <a:srgbClr val="F8ECEC"/>
           </a:solidFill>
           <a:ln w="12700">
             <a:solidFill>
-              <a:srgbClr val="F85149"/>
+              <a:srgbClr val="C4605B"/>
             </a:solidFill>
             <a:prstDash val="solid"/>
           </a:ln>
@@ -9606,7 +9849,7 @@
       </p:sp>
       <p:sp>
         <p:nvSpPr>
-          <p:cNvPr id="30" name="Text 28"/>
+          <p:cNvPr id="33" name="Text 31"/>
           <p:cNvSpPr/>
           <p:nvPr/>
         </p:nvSpPr>
@@ -9631,13 +9874,13 @@
             <a:r>
               <a:rPr lang="en-US" sz="1100" b="1" dirty="0">
                 <a:solidFill>
-                  <a:srgbClr val="F85149"/>
+                  <a:srgbClr val="C4605B"/>
                 </a:solidFill>
                 <a:latin typeface="Calibri" pitchFamily="34" charset="0"/>
                 <a:ea typeface="Calibri" pitchFamily="34" charset="-122"/>
                 <a:cs typeface="Calibri" pitchFamily="34" charset="-120"/>
               </a:rPr>
-              <a:t>❌ :latest — 避免在 Production 使用</a:t>
+              <a:t>❌ :latest — Avoid in Production</a:t>
             </a:r>
             <a:endParaRPr lang="en-US" sz="1100" dirty="0"/>
           </a:p>
@@ -9645,7 +9888,7 @@
       </p:sp>
       <p:sp>
         <p:nvSpPr>
-          <p:cNvPr id="31" name="Text 29"/>
+          <p:cNvPr id="34" name="Text 32"/>
           <p:cNvSpPr/>
           <p:nvPr/>
         </p:nvSpPr>
@@ -9670,13 +9913,13 @@
             <a:r>
               <a:rPr lang="en-US" sz="950" dirty="0">
                 <a:solidFill>
-                  <a:srgbClr val="8B949E"/>
+                  <a:srgbClr val="8A8078"/>
                 </a:solidFill>
                 <a:latin typeface="Calibri" pitchFamily="34" charset="0"/>
                 <a:ea typeface="Calibri" pitchFamily="34" charset="-122"/>
                 <a:cs typeface="Calibri" pitchFamily="34" charset="-120"/>
               </a:rPr>
-              <a:t>無法回溯，不知道是哪個版本</a:t>
+              <a:t>Cannot trace back; unknown which version is running</a:t>
             </a:r>
             <a:endParaRPr lang="en-US" sz="950" dirty="0"/>
           </a:p>
@@ -9684,7 +9927,7 @@
       </p:sp>
       <p:sp>
         <p:nvSpPr>
-          <p:cNvPr id="32" name="Shape 30"/>
+          <p:cNvPr id="35" name="Shape 33"/>
           <p:cNvSpPr/>
           <p:nvPr/>
         </p:nvSpPr>
@@ -9699,11 +9942,11 @@
             </a:avLst>
           </a:prstGeom>
           <a:solidFill>
-            <a:srgbClr val="0F2A1A"/>
+            <a:srgbClr val="E5F0E9"/>
           </a:solidFill>
           <a:ln w="12700">
             <a:solidFill>
-              <a:srgbClr val="3FB950"/>
+              <a:srgbClr val="4A9968"/>
             </a:solidFill>
             <a:prstDash val="solid"/>
           </a:ln>
@@ -9711,7 +9954,7 @@
       </p:sp>
       <p:sp>
         <p:nvSpPr>
-          <p:cNvPr id="33" name="Text 31"/>
+          <p:cNvPr id="36" name="Text 34"/>
           <p:cNvSpPr/>
           <p:nvPr/>
         </p:nvSpPr>
@@ -9736,13 +9979,13 @@
             <a:r>
               <a:rPr lang="en-US" sz="1100" b="1" dirty="0">
                 <a:solidFill>
-                  <a:srgbClr val="3FB950"/>
+                  <a:srgbClr val="4A9968"/>
                 </a:solidFill>
                 <a:latin typeface="Calibri" pitchFamily="34" charset="0"/>
                 <a:ea typeface="Calibri" pitchFamily="34" charset="-122"/>
                 <a:cs typeface="Calibri" pitchFamily="34" charset="-120"/>
               </a:rPr>
-              <a:t>✅ :v1.2.3 (Semantic Version) — 推薦</a:t>
+              <a:t>✅ :v1.2.3 (Semantic Version) — Recommended</a:t>
             </a:r>
             <a:endParaRPr lang="en-US" sz="1100" dirty="0"/>
           </a:p>
@@ -9750,7 +9993,7 @@
       </p:sp>
       <p:sp>
         <p:nvSpPr>
-          <p:cNvPr id="34" name="Text 32"/>
+          <p:cNvPr id="37" name="Text 35"/>
           <p:cNvSpPr/>
           <p:nvPr/>
         </p:nvSpPr>
@@ -9775,13 +10018,13 @@
             <a:r>
               <a:rPr lang="en-US" sz="950" dirty="0">
                 <a:solidFill>
-                  <a:srgbClr val="8B949E"/>
+                  <a:srgbClr val="8A8078"/>
                 </a:solidFill>
                 <a:latin typeface="Calibri" pitchFamily="34" charset="0"/>
                 <a:ea typeface="Calibri" pitchFamily="34" charset="-122"/>
                 <a:cs typeface="Calibri" pitchFamily="34" charset="-120"/>
               </a:rPr>
-              <a:t>明確版本，隨時可回滾</a:t>
+              <a:t>Explicit version, rollback anytime</a:t>
             </a:r>
             <a:endParaRPr lang="en-US" sz="950" dirty="0"/>
           </a:p>
@@ -9789,7 +10032,7 @@
       </p:sp>
       <p:sp>
         <p:nvSpPr>
-          <p:cNvPr id="35" name="Shape 33"/>
+          <p:cNvPr id="38" name="Shape 36"/>
           <p:cNvSpPr/>
           <p:nvPr/>
         </p:nvSpPr>
@@ -9804,11 +10047,11 @@
             </a:avLst>
           </a:prstGeom>
           <a:solidFill>
-            <a:srgbClr val="161B22"/>
+            <a:srgbClr val="F5F1EB"/>
           </a:solidFill>
           <a:ln w="12700">
             <a:solidFill>
-              <a:srgbClr val="58A6FF"/>
+              <a:srgbClr val="4A7FB5"/>
             </a:solidFill>
             <a:prstDash val="solid"/>
           </a:ln>
@@ -9816,7 +10059,7 @@
       </p:sp>
       <p:sp>
         <p:nvSpPr>
-          <p:cNvPr id="36" name="Text 34"/>
+          <p:cNvPr id="39" name="Text 37"/>
           <p:cNvSpPr/>
           <p:nvPr/>
         </p:nvSpPr>
@@ -9841,7 +10084,7 @@
             <a:r>
               <a:rPr lang="en-US" sz="1100" b="1" dirty="0">
                 <a:solidFill>
-                  <a:srgbClr val="58A6FF"/>
+                  <a:srgbClr val="4A7FB5"/>
                 </a:solidFill>
                 <a:latin typeface="Calibri" pitchFamily="34" charset="0"/>
                 <a:ea typeface="Calibri" pitchFamily="34" charset="-122"/>
@@ -9855,7 +10098,7 @@
       </p:sp>
       <p:sp>
         <p:nvSpPr>
-          <p:cNvPr id="37" name="Text 35"/>
+          <p:cNvPr id="40" name="Text 38"/>
           <p:cNvSpPr/>
           <p:nvPr/>
         </p:nvSpPr>
@@ -9880,13 +10123,13 @@
             <a:r>
               <a:rPr lang="en-US" sz="950" dirty="0">
                 <a:solidFill>
-                  <a:srgbClr val="8B949E"/>
+                  <a:srgbClr val="8A8078"/>
                 </a:solidFill>
                 <a:latin typeface="Calibri" pitchFamily="34" charset="0"/>
                 <a:ea typeface="Calibri" pitchFamily="34" charset="-122"/>
                 <a:cs typeface="Calibri" pitchFamily="34" charset="-120"/>
               </a:rPr>
-              <a:t>每個 commit 對應一個不可變 Image，CI/CD 常用</a:t>
+              <a:t>Each commit maps to an immutable Image, common in CI/CD</a:t>
             </a:r>
             <a:endParaRPr lang="en-US" sz="950" dirty="0"/>
           </a:p>
@@ -9894,7 +10137,7 @@
       </p:sp>
       <p:sp>
         <p:nvSpPr>
-          <p:cNvPr id="38" name="Shape 36"/>
+          <p:cNvPr id="41" name="Shape 39"/>
           <p:cNvSpPr/>
           <p:nvPr/>
         </p:nvSpPr>
@@ -9909,11 +10152,11 @@
             </a:avLst>
           </a:prstGeom>
           <a:solidFill>
-            <a:srgbClr val="161B22"/>
+            <a:srgbClr val="F5F1EB"/>
           </a:solidFill>
           <a:ln w="12700">
             <a:solidFill>
-              <a:srgbClr val="58A6FF"/>
+              <a:srgbClr val="4A7FB5"/>
             </a:solidFill>
             <a:prstDash val="solid"/>
           </a:ln>
@@ -9921,7 +10164,7 @@
       </p:sp>
       <p:sp>
         <p:nvSpPr>
-          <p:cNvPr id="39" name="Text 37"/>
+          <p:cNvPr id="42" name="Text 40"/>
           <p:cNvSpPr/>
           <p:nvPr/>
         </p:nvSpPr>
@@ -9946,7 +10189,7 @@
             <a:r>
               <a:rPr lang="en-US" sz="1100" b="1" dirty="0">
                 <a:solidFill>
-                  <a:srgbClr val="58A6FF"/>
+                  <a:srgbClr val="4A7FB5"/>
                 </a:solidFill>
                 <a:latin typeface="Calibri" pitchFamily="34" charset="0"/>
                 <a:ea typeface="Calibri" pitchFamily="34" charset="-122"/>
@@ -9960,7 +10203,7 @@
       </p:sp>
       <p:sp>
         <p:nvSpPr>
-          <p:cNvPr id="40" name="Text 38"/>
+          <p:cNvPr id="43" name="Text 41"/>
           <p:cNvSpPr/>
           <p:nvPr/>
         </p:nvSpPr>
@@ -9985,13 +10228,13 @@
             <a:r>
               <a:rPr lang="en-US" sz="950" dirty="0">
                 <a:solidFill>
-                  <a:srgbClr val="8B949E"/>
+                  <a:srgbClr val="8A8078"/>
                 </a:solidFill>
                 <a:latin typeface="Calibri" pitchFamily="34" charset="0"/>
                 <a:ea typeface="Calibri" pitchFamily="34" charset="-122"/>
                 <a:cs typeface="Calibri" pitchFamily="34" charset="-120"/>
               </a:rPr>
-              <a:t>時間戳+Hash，可讀性與唯一性兼具</a:t>
+              <a:t>Timestamp + Hash for readability and uniqueness</a:t>
             </a:r>
             <a:endParaRPr lang="en-US" sz="950" dirty="0"/>
           </a:p>
@@ -9999,7 +10242,7 @@
       </p:sp>
       <p:sp>
         <p:nvSpPr>
-          <p:cNvPr id="41" name="Shape 39"/>
+          <p:cNvPr id="44" name="Shape 42"/>
           <p:cNvSpPr/>
           <p:nvPr/>
         </p:nvSpPr>
@@ -10014,11 +10257,11 @@
             </a:avLst>
           </a:prstGeom>
           <a:solidFill>
-            <a:srgbClr val="0A1929"/>
+            <a:srgbClr val="EAF0F7"/>
           </a:solidFill>
           <a:ln w="9525">
             <a:solidFill>
-              <a:srgbClr val="58A6FF"/>
+              <a:srgbClr val="4A7FB5"/>
             </a:solidFill>
             <a:prstDash val="solid"/>
           </a:ln>
@@ -10026,7 +10269,7 @@
       </p:sp>
       <p:sp>
         <p:nvSpPr>
-          <p:cNvPr id="42" name="Text 40"/>
+          <p:cNvPr id="45" name="Text 43"/>
           <p:cNvSpPr/>
           <p:nvPr/>
         </p:nvSpPr>
@@ -10051,13 +10294,13 @@
             <a:r>
               <a:rPr lang="en-US" sz="1000" i="1" dirty="0">
                 <a:solidFill>
-                  <a:srgbClr val="8B949E"/>
+                  <a:srgbClr val="8A8078"/>
                 </a:solidFill>
                 <a:latin typeface="Calibri" pitchFamily="34" charset="0"/>
                 <a:ea typeface="Calibri" pitchFamily="34" charset="-122"/>
                 <a:cs typeface="Calibri" pitchFamily="34" charset="-120"/>
               </a:rPr>
-              <a:t>💡  永遠不要在 Prod 用 :latest — 你永遠不知道 latest 到底是哪個版本</a:t>
+              <a:t>💡  Never use :latest in Prod — you can never be sure which version 'latest' actually is</a:t>
             </a:r>
             <a:endParaRPr lang="en-US" sz="1000" dirty="0"/>
           </a:p>
@@ -10077,7 +10320,7 @@
     <p:bg>
       <p:bgPr>
         <a:solidFill>
-          <a:srgbClr val="0D1117"/>
+          <a:srgbClr val="FFFDF8"/>
         </a:solidFill>
       </p:bgPr>
     </p:bg>
@@ -10110,11 +10353,11 @@
             <a:avLst/>
           </a:prstGeom>
           <a:solidFill>
-            <a:srgbClr val="161B22"/>
+            <a:srgbClr val="F5F1EB"/>
           </a:solidFill>
           <a:ln w="6350">
             <a:solidFill>
-              <a:srgbClr val="30363D"/>
+              <a:srgbClr val="D6CCBF"/>
             </a:solidFill>
             <a:prstDash val="solid"/>
           </a:ln>
@@ -10135,11 +10378,11 @@
             <a:avLst/>
           </a:prstGeom>
           <a:solidFill>
-            <a:srgbClr val="0D8A6C"/>
+            <a:srgbClr val="4A9B8E"/>
           </a:solidFill>
           <a:ln w="12700">
             <a:solidFill>
-              <a:srgbClr val="0D8A6C"/>
+              <a:srgbClr val="4A9B8E"/>
             </a:solidFill>
             <a:prstDash val="solid"/>
           </a:ln>
@@ -10172,13 +10415,13 @@
             <a:r>
               <a:rPr lang="en-US" sz="1600" b="1" dirty="0">
                 <a:solidFill>
-                  <a:srgbClr val="E6EDF3"/>
+                  <a:srgbClr val="2D2926"/>
                 </a:solidFill>
                 <a:latin typeface="Calibri" pitchFamily="34" charset="0"/>
                 <a:ea typeface="Calibri" pitchFamily="34" charset="-122"/>
                 <a:cs typeface="Calibri" pitchFamily="34" charset="-120"/>
               </a:rPr>
-              <a:t>Container 化：從維運噩夢到一致部署</a:t>
+              <a:t>Containerization: From Operations Nightmare to Consistent Deployment</a:t>
             </a:r>
             <a:endParaRPr lang="en-US" sz="1600" dirty="0"/>
           </a:p>
@@ -10211,13 +10454,13 @@
             <a:r>
               <a:rPr lang="en-US" sz="750" dirty="0">
                 <a:solidFill>
-                  <a:srgbClr val="8B949E"/>
+                  <a:srgbClr val="8A8078"/>
                 </a:solidFill>
                 <a:latin typeface="Calibri" pitchFamily="34" charset="0"/>
                 <a:ea typeface="Calibri" pitchFamily="34" charset="-122"/>
                 <a:cs typeface="Calibri" pitchFamily="34" charset="-120"/>
               </a:rPr>
-              <a:t>複雜度  5/10</a:t>
+              <a:t>Complexity  5/10</a:t>
             </a:r>
             <a:endParaRPr lang="en-US" sz="750" dirty="0"/>
           </a:p>
@@ -10238,11 +10481,11 @@
             <a:avLst/>
           </a:prstGeom>
           <a:solidFill>
-            <a:srgbClr val="252D38"/>
+            <a:srgbClr val="D6CCBF"/>
           </a:solidFill>
           <a:ln w="12700">
             <a:solidFill>
-              <a:srgbClr val="252D38"/>
+              <a:srgbClr val="D6CCBF"/>
             </a:solidFill>
             <a:prstDash val="solid"/>
           </a:ln>
@@ -10263,11 +10506,11 @@
             <a:avLst/>
           </a:prstGeom>
           <a:solidFill>
-            <a:srgbClr val="D29922"/>
+            <a:srgbClr val="B8892C"/>
           </a:solidFill>
           <a:ln w="12700">
             <a:solidFill>
-              <a:srgbClr val="D29922"/>
+              <a:srgbClr val="B8892C"/>
             </a:solidFill>
             <a:prstDash val="solid"/>
           </a:ln>
@@ -10300,13 +10543,13 @@
             <a:r>
               <a:rPr lang="en-US" sz="850" dirty="0">
                 <a:solidFill>
-                  <a:srgbClr val="8B949E"/>
+                  <a:srgbClr val="8A8078"/>
                 </a:solidFill>
                 <a:latin typeface="Calibri" pitchFamily="34" charset="0"/>
                 <a:ea typeface="Calibri" pitchFamily="34" charset="-122"/>
                 <a:cs typeface="Calibri" pitchFamily="34" charset="-120"/>
               </a:rPr>
-              <a:t>PART 3  ·  26 / 50</a:t>
+              <a:t>PART 3</a:t>
             </a:r>
             <a:endParaRPr lang="en-US" sz="850" dirty="0"/>
           </a:p>
@@ -10329,7 +10572,7 @@
           <a:noFill/>
           <a:ln w="9525">
             <a:solidFill>
-              <a:srgbClr val="30363D"/>
+              <a:srgbClr val="D6CCBF"/>
             </a:solidFill>
             <a:prstDash val="solid"/>
           </a:ln>
@@ -10352,11 +10595,11 @@
             </a:avLst>
           </a:prstGeom>
           <a:solidFill>
-            <a:srgbClr val="2A0F0F"/>
+            <a:srgbClr val="F8ECEC"/>
           </a:solidFill>
           <a:ln w="12700">
             <a:solidFill>
-              <a:srgbClr val="F85149"/>
+              <a:srgbClr val="C4605B"/>
             </a:solidFill>
             <a:prstDash val="solid"/>
           </a:ln>
@@ -10389,13 +10632,13 @@
             <a:r>
               <a:rPr lang="en-US" sz="1200" b="1" dirty="0">
                 <a:solidFill>
-                  <a:srgbClr val="F85149"/>
+                  <a:srgbClr val="C4605B"/>
                 </a:solidFill>
                 <a:latin typeface="Calibri" pitchFamily="34" charset="0"/>
                 <a:ea typeface="Calibri" pitchFamily="34" charset="-122"/>
                 <a:cs typeface="Calibri" pitchFamily="34" charset="-120"/>
               </a:rPr>
-              <a:t>❌  Container 化之前</a:t>
+              <a:t>❌  Before Containerization</a:t>
             </a:r>
             <a:endParaRPr lang="en-US" sz="1200" dirty="0"/>
           </a:p>
@@ -10418,11 +10661,11 @@
             </a:avLst>
           </a:prstGeom>
           <a:solidFill>
-            <a:srgbClr val="2A0F0F"/>
+            <a:srgbClr val="F8ECEC"/>
           </a:solidFill>
           <a:ln w="9525">
             <a:solidFill>
-              <a:srgbClr val="F85149"/>
+              <a:srgbClr val="C4605B"/>
             </a:solidFill>
             <a:prstDash val="solid"/>
           </a:ln>
@@ -10455,7 +10698,7 @@
             <a:r>
               <a:rPr lang="en-US" sz="750" dirty="0">
                 <a:solidFill>
-                  <a:srgbClr val="F85149"/>
+                  <a:srgbClr val="C4605B"/>
                 </a:solidFill>
                 <a:latin typeface="Calibri" pitchFamily="34" charset="0"/>
                 <a:ea typeface="Calibri" pitchFamily="34" charset="-122"/>
@@ -10484,11 +10727,11 @@
             </a:avLst>
           </a:prstGeom>
           <a:solidFill>
-            <a:srgbClr val="2A0F0F"/>
+            <a:srgbClr val="F8ECEC"/>
           </a:solidFill>
           <a:ln w="9525">
             <a:solidFill>
-              <a:srgbClr val="F85149"/>
+              <a:srgbClr val="C4605B"/>
             </a:solidFill>
             <a:prstDash val="solid"/>
           </a:ln>
@@ -10521,7 +10764,7 @@
             <a:r>
               <a:rPr lang="en-US" sz="750" dirty="0">
                 <a:solidFill>
-                  <a:srgbClr val="F85149"/>
+                  <a:srgbClr val="C4605B"/>
                 </a:solidFill>
                 <a:latin typeface="Calibri" pitchFamily="34" charset="0"/>
                 <a:ea typeface="Calibri" pitchFamily="34" charset="-122"/>
@@ -10550,11 +10793,11 @@
             </a:avLst>
           </a:prstGeom>
           <a:solidFill>
-            <a:srgbClr val="2A0F0F"/>
+            <a:srgbClr val="F8ECEC"/>
           </a:solidFill>
           <a:ln w="9525">
             <a:solidFill>
-              <a:srgbClr val="F85149"/>
+              <a:srgbClr val="C4605B"/>
             </a:solidFill>
             <a:prstDash val="solid"/>
           </a:ln>
@@ -10587,7 +10830,7 @@
             <a:r>
               <a:rPr lang="en-US" sz="750" dirty="0">
                 <a:solidFill>
-                  <a:srgbClr val="F85149"/>
+                  <a:srgbClr val="C4605B"/>
                 </a:solidFill>
                 <a:latin typeface="Calibri" pitchFamily="34" charset="0"/>
                 <a:ea typeface="Calibri" pitchFamily="34" charset="-122"/>
@@ -10616,11 +10859,11 @@
             </a:avLst>
           </a:prstGeom>
           <a:solidFill>
-            <a:srgbClr val="2A0F0F"/>
+            <a:srgbClr val="F8ECEC"/>
           </a:solidFill>
           <a:ln w="9525">
             <a:solidFill>
-              <a:srgbClr val="F85149"/>
+              <a:srgbClr val="C4605B"/>
             </a:solidFill>
             <a:prstDash val="solid"/>
           </a:ln>
@@ -10653,7 +10896,7 @@
             <a:r>
               <a:rPr lang="en-US" sz="750" dirty="0">
                 <a:solidFill>
-                  <a:srgbClr val="F85149"/>
+                  <a:srgbClr val="C4605B"/>
                 </a:solidFill>
                 <a:latin typeface="Calibri" pitchFamily="34" charset="0"/>
                 <a:ea typeface="Calibri" pitchFamily="34" charset="-122"/>
@@ -10682,11 +10925,11 @@
             </a:avLst>
           </a:prstGeom>
           <a:solidFill>
-            <a:srgbClr val="2A0F0F"/>
+            <a:srgbClr val="F8ECEC"/>
           </a:solidFill>
           <a:ln w="9525">
             <a:solidFill>
-              <a:srgbClr val="F85149"/>
+              <a:srgbClr val="C4605B"/>
             </a:solidFill>
             <a:prstDash val="solid"/>
           </a:ln>
@@ -10719,7 +10962,7 @@
             <a:r>
               <a:rPr lang="en-US" sz="750" dirty="0">
                 <a:solidFill>
-                  <a:srgbClr val="F85149"/>
+                  <a:srgbClr val="C4605B"/>
                 </a:solidFill>
                 <a:latin typeface="Calibri" pitchFamily="34" charset="0"/>
                 <a:ea typeface="Calibri" pitchFamily="34" charset="-122"/>
@@ -10748,11 +10991,11 @@
             </a:avLst>
           </a:prstGeom>
           <a:solidFill>
-            <a:srgbClr val="2A1F00"/>
+            <a:srgbClr val="F3EDE0"/>
           </a:solidFill>
           <a:ln w="9525">
             <a:solidFill>
-              <a:srgbClr val="D29922"/>
+              <a:srgbClr val="B8892C"/>
             </a:solidFill>
             <a:prstDash val="solid"/>
           </a:ln>
@@ -10785,7 +11028,7 @@
             <a:r>
               <a:rPr lang="en-US" sz="750" dirty="0">
                 <a:solidFill>
-                  <a:srgbClr val="D29922"/>
+                  <a:srgbClr val="B8892C"/>
                 </a:solidFill>
                 <a:latin typeface="Calibri" pitchFamily="34" charset="0"/>
                 <a:ea typeface="Calibri" pitchFamily="34" charset="-122"/>
@@ -10814,11 +11057,11 @@
             </a:avLst>
           </a:prstGeom>
           <a:solidFill>
-            <a:srgbClr val="2A1F00"/>
+            <a:srgbClr val="F3EDE0"/>
           </a:solidFill>
           <a:ln w="9525">
             <a:solidFill>
-              <a:srgbClr val="D29922"/>
+              <a:srgbClr val="B8892C"/>
             </a:solidFill>
             <a:prstDash val="solid"/>
           </a:ln>
@@ -10851,7 +11094,7 @@
             <a:r>
               <a:rPr lang="en-US" sz="750" dirty="0">
                 <a:solidFill>
-                  <a:srgbClr val="D29922"/>
+                  <a:srgbClr val="B8892C"/>
                 </a:solidFill>
                 <a:latin typeface="Calibri" pitchFamily="34" charset="0"/>
                 <a:ea typeface="Calibri" pitchFamily="34" charset="-122"/>
@@ -10880,11 +11123,11 @@
             </a:avLst>
           </a:prstGeom>
           <a:solidFill>
-            <a:srgbClr val="2A1F00"/>
+            <a:srgbClr val="F3EDE0"/>
           </a:solidFill>
           <a:ln w="9525">
             <a:solidFill>
-              <a:srgbClr val="D29922"/>
+              <a:srgbClr val="B8892C"/>
             </a:solidFill>
             <a:prstDash val="solid"/>
           </a:ln>
@@ -10917,7 +11160,7 @@
             <a:r>
               <a:rPr lang="en-US" sz="750" dirty="0">
                 <a:solidFill>
-                  <a:srgbClr val="D29922"/>
+                  <a:srgbClr val="B8892C"/>
                 </a:solidFill>
                 <a:latin typeface="Calibri" pitchFamily="34" charset="0"/>
                 <a:ea typeface="Calibri" pitchFamily="34" charset="-122"/>
@@ -10946,11 +11189,11 @@
             </a:avLst>
           </a:prstGeom>
           <a:solidFill>
-            <a:srgbClr val="2A1F00"/>
+            <a:srgbClr val="F3EDE0"/>
           </a:solidFill>
           <a:ln w="9525">
             <a:solidFill>
-              <a:srgbClr val="D29922"/>
+              <a:srgbClr val="B8892C"/>
             </a:solidFill>
             <a:prstDash val="solid"/>
           </a:ln>
@@ -10983,7 +11226,7 @@
             <a:r>
               <a:rPr lang="en-US" sz="750" dirty="0">
                 <a:solidFill>
-                  <a:srgbClr val="D29922"/>
+                  <a:srgbClr val="B8892C"/>
                 </a:solidFill>
                 <a:latin typeface="Calibri" pitchFamily="34" charset="0"/>
                 <a:ea typeface="Calibri" pitchFamily="34" charset="-122"/>
@@ -11012,11 +11255,11 @@
             </a:avLst>
           </a:prstGeom>
           <a:solidFill>
-            <a:srgbClr val="2A1F00"/>
+            <a:srgbClr val="F3EDE0"/>
           </a:solidFill>
           <a:ln w="9525">
             <a:solidFill>
-              <a:srgbClr val="D29922"/>
+              <a:srgbClr val="B8892C"/>
             </a:solidFill>
             <a:prstDash val="solid"/>
           </a:ln>
@@ -11049,7 +11292,7 @@
             <a:r>
               <a:rPr lang="en-US" sz="750" dirty="0">
                 <a:solidFill>
-                  <a:srgbClr val="D29922"/>
+                  <a:srgbClr val="B8892C"/>
                 </a:solidFill>
                 <a:latin typeface="Calibri" pitchFamily="34" charset="0"/>
                 <a:ea typeface="Calibri" pitchFamily="34" charset="-122"/>
@@ -11078,11 +11321,11 @@
             </a:avLst>
           </a:prstGeom>
           <a:solidFill>
-            <a:srgbClr val="2A0F0F"/>
+            <a:srgbClr val="F8ECEC"/>
           </a:solidFill>
           <a:ln w="9525">
             <a:solidFill>
-              <a:srgbClr val="F85149"/>
+              <a:srgbClr val="C4605B"/>
             </a:solidFill>
             <a:prstDash val="solid"/>
           </a:ln>
@@ -11115,7 +11358,7 @@
             <a:r>
               <a:rPr lang="en-US" sz="750" dirty="0">
                 <a:solidFill>
-                  <a:srgbClr val="F85149"/>
+                  <a:srgbClr val="C4605B"/>
                 </a:solidFill>
                 <a:latin typeface="Calibri" pitchFamily="34" charset="0"/>
                 <a:ea typeface="Calibri" pitchFamily="34" charset="-122"/>
@@ -11144,11 +11387,11 @@
             </a:avLst>
           </a:prstGeom>
           <a:solidFill>
-            <a:srgbClr val="2A0F0F"/>
+            <a:srgbClr val="F8ECEC"/>
           </a:solidFill>
           <a:ln w="9525">
             <a:solidFill>
-              <a:srgbClr val="F85149"/>
+              <a:srgbClr val="C4605B"/>
             </a:solidFill>
             <a:prstDash val="solid"/>
           </a:ln>
@@ -11181,7 +11424,7 @@
             <a:r>
               <a:rPr lang="en-US" sz="750" dirty="0">
                 <a:solidFill>
-                  <a:srgbClr val="F85149"/>
+                  <a:srgbClr val="C4605B"/>
                 </a:solidFill>
                 <a:latin typeface="Calibri" pitchFamily="34" charset="0"/>
                 <a:ea typeface="Calibri" pitchFamily="34" charset="-122"/>
@@ -11210,11 +11453,11 @@
             </a:avLst>
           </a:prstGeom>
           <a:solidFill>
-            <a:srgbClr val="2A0F0F"/>
+            <a:srgbClr val="F8ECEC"/>
           </a:solidFill>
           <a:ln w="9525">
             <a:solidFill>
-              <a:srgbClr val="F85149"/>
+              <a:srgbClr val="C4605B"/>
             </a:solidFill>
             <a:prstDash val="solid"/>
           </a:ln>
@@ -11247,7 +11490,7 @@
             <a:r>
               <a:rPr lang="en-US" sz="750" dirty="0">
                 <a:solidFill>
-                  <a:srgbClr val="F85149"/>
+                  <a:srgbClr val="C4605B"/>
                 </a:solidFill>
                 <a:latin typeface="Calibri" pitchFamily="34" charset="0"/>
                 <a:ea typeface="Calibri" pitchFamily="34" charset="-122"/>
@@ -11276,11 +11519,11 @@
             </a:avLst>
           </a:prstGeom>
           <a:solidFill>
-            <a:srgbClr val="2A0F0F"/>
+            <a:srgbClr val="F8ECEC"/>
           </a:solidFill>
           <a:ln w="9525">
             <a:solidFill>
-              <a:srgbClr val="F85149"/>
+              <a:srgbClr val="C4605B"/>
             </a:solidFill>
             <a:prstDash val="solid"/>
           </a:ln>
@@ -11313,7 +11556,7 @@
             <a:r>
               <a:rPr lang="en-US" sz="750" dirty="0">
                 <a:solidFill>
-                  <a:srgbClr val="F85149"/>
+                  <a:srgbClr val="C4605B"/>
                 </a:solidFill>
                 <a:latin typeface="Calibri" pitchFamily="34" charset="0"/>
                 <a:ea typeface="Calibri" pitchFamily="34" charset="-122"/>
@@ -11342,11 +11585,11 @@
             </a:avLst>
           </a:prstGeom>
           <a:solidFill>
-            <a:srgbClr val="2A0F0F"/>
+            <a:srgbClr val="F8ECEC"/>
           </a:solidFill>
           <a:ln w="9525">
             <a:solidFill>
-              <a:srgbClr val="F85149"/>
+              <a:srgbClr val="C4605B"/>
             </a:solidFill>
             <a:prstDash val="solid"/>
           </a:ln>
@@ -11379,7 +11622,7 @@
             <a:r>
               <a:rPr lang="en-US" sz="750" dirty="0">
                 <a:solidFill>
-                  <a:srgbClr val="F85149"/>
+                  <a:srgbClr val="C4605B"/>
                 </a:solidFill>
                 <a:latin typeface="Calibri" pitchFamily="34" charset="0"/>
                 <a:ea typeface="Calibri" pitchFamily="34" charset="-122"/>
@@ -11408,11 +11651,11 @@
             </a:avLst>
           </a:prstGeom>
           <a:solidFill>
-            <a:srgbClr val="1C2128"/>
+            <a:srgbClr val="ECE6DD"/>
           </a:solidFill>
           <a:ln w="6350">
             <a:solidFill>
-              <a:srgbClr val="30363D"/>
+              <a:srgbClr val="D6CCBF"/>
             </a:solidFill>
             <a:prstDash val="solid"/>
           </a:ln>
@@ -11445,13 +11688,13 @@
             <a:r>
               <a:rPr lang="en-US" sz="900" dirty="0">
                 <a:solidFill>
-                  <a:srgbClr val="8B949E"/>
+                  <a:srgbClr val="8A8078"/>
                 </a:solidFill>
                 <a:latin typeface="Calibri" pitchFamily="34" charset="0"/>
                 <a:ea typeface="Calibri" pitchFamily="34" charset="-122"/>
                 <a:cs typeface="Calibri" pitchFamily="34" charset="-120"/>
               </a:rPr>
-              <a:t>• 手動 SSH 部署腳本</a:t>
+              <a:t>• Manual SSH deploy scripts</a:t>
             </a:r>
             <a:endParaRPr lang="en-US" sz="900" dirty="0"/>
           </a:p>
@@ -11474,11 +11717,11 @@
             </a:avLst>
           </a:prstGeom>
           <a:solidFill>
-            <a:srgbClr val="1C2128"/>
+            <a:srgbClr val="ECE6DD"/>
           </a:solidFill>
           <a:ln w="6350">
             <a:solidFill>
-              <a:srgbClr val="30363D"/>
+              <a:srgbClr val="D6CCBF"/>
             </a:solidFill>
             <a:prstDash val="solid"/>
           </a:ln>
@@ -11511,13 +11754,13 @@
             <a:r>
               <a:rPr lang="en-US" sz="900" dirty="0">
                 <a:solidFill>
-                  <a:srgbClr val="8B949E"/>
+                  <a:srgbClr val="8A8078"/>
                 </a:solidFill>
                 <a:latin typeface="Calibri" pitchFamily="34" charset="0"/>
                 <a:ea typeface="Calibri" pitchFamily="34" charset="-122"/>
                 <a:cs typeface="Calibri" pitchFamily="34" charset="-120"/>
               </a:rPr>
-              <a:t>• 每台主機設定各不同</a:t>
+              <a:t>• Every host configured differently</a:t>
             </a:r>
             <a:endParaRPr lang="en-US" sz="900" dirty="0"/>
           </a:p>
@@ -11540,11 +11783,11 @@
             </a:avLst>
           </a:prstGeom>
           <a:solidFill>
-            <a:srgbClr val="1C2128"/>
+            <a:srgbClr val="ECE6DD"/>
           </a:solidFill>
           <a:ln w="6350">
             <a:solidFill>
-              <a:srgbClr val="30363D"/>
+              <a:srgbClr val="D6CCBF"/>
             </a:solidFill>
             <a:prstDash val="solid"/>
           </a:ln>
@@ -11577,13 +11820,13 @@
             <a:r>
               <a:rPr lang="en-US" sz="900" dirty="0">
                 <a:solidFill>
-                  <a:srgbClr val="8B949E"/>
+                  <a:srgbClr val="8A8078"/>
                 </a:solidFill>
                 <a:latin typeface="Calibri" pitchFamily="34" charset="0"/>
                 <a:ea typeface="Calibri" pitchFamily="34" charset="-122"/>
                 <a:cs typeface="Calibri" pitchFamily="34" charset="-120"/>
               </a:rPr>
-              <a:t>• 「只有我知道怎麼重啟」</a:t>
+              <a:t>• "Only I know how to restart it"</a:t>
             </a:r>
             <a:endParaRPr lang="en-US" sz="900" dirty="0"/>
           </a:p>
@@ -11606,11 +11849,11 @@
             </a:avLst>
           </a:prstGeom>
           <a:solidFill>
-            <a:srgbClr val="2A0F0F"/>
+            <a:srgbClr val="F8ECEC"/>
           </a:solidFill>
           <a:ln w="12700">
             <a:solidFill>
-              <a:srgbClr val="F85149"/>
+              <a:srgbClr val="C4605B"/>
             </a:solidFill>
             <a:prstDash val="solid"/>
           </a:ln>
@@ -11643,13 +11886,13 @@
             <a:r>
               <a:rPr lang="en-US" sz="1100" b="1" dirty="0">
                 <a:solidFill>
-                  <a:srgbClr val="F85149"/>
+                  <a:srgbClr val="C4605B"/>
                 </a:solidFill>
                 <a:latin typeface="Calibri" pitchFamily="34" charset="0"/>
                 <a:ea typeface="Calibri" pitchFamily="34" charset="-122"/>
                 <a:cs typeface="Calibri" pitchFamily="34" charset="-120"/>
               </a:rPr>
-              <a:t>😱 15+ 台 × N 個不同設定 = 維運地獄</a:t>
+              <a:t>😱 15+ hosts × N different configs = Operations Hell</a:t>
             </a:r>
             <a:endParaRPr lang="en-US" sz="1100" dirty="0"/>
           </a:p>
@@ -11672,11 +11915,11 @@
             </a:avLst>
           </a:prstGeom>
           <a:solidFill>
-            <a:srgbClr val="0F2A1A"/>
+            <a:srgbClr val="E5F0E9"/>
           </a:solidFill>
           <a:ln w="12700">
             <a:solidFill>
-              <a:srgbClr val="3FB950"/>
+              <a:srgbClr val="4A9968"/>
             </a:solidFill>
             <a:prstDash val="solid"/>
           </a:ln>
@@ -11709,13 +11952,13 @@
             <a:r>
               <a:rPr lang="en-US" sz="1200" b="1" dirty="0">
                 <a:solidFill>
-                  <a:srgbClr val="3FB950"/>
+                  <a:srgbClr val="4A9968"/>
                 </a:solidFill>
                 <a:latin typeface="Calibri" pitchFamily="34" charset="0"/>
                 <a:ea typeface="Calibri" pitchFamily="34" charset="-122"/>
                 <a:cs typeface="Calibri" pitchFamily="34" charset="-120"/>
               </a:rPr>
-              <a:t>✅  Container 化之後</a:t>
+              <a:t>✅  After Containerization</a:t>
             </a:r>
             <a:endParaRPr lang="en-US" sz="1200" dirty="0"/>
           </a:p>
@@ -11739,7 +11982,7 @@
           </a:prstGeom>
           <a:ln w="12700">
             <a:solidFill>
-              <a:srgbClr val="0D8A6C"/>
+              <a:srgbClr val="4A9B8E"/>
             </a:solidFill>
             <a:prstDash val="dash"/>
           </a:ln>
@@ -11762,11 +12005,11 @@
             </a:avLst>
           </a:prstGeom>
           <a:solidFill>
-            <a:srgbClr val="0D1117"/>
+            <a:srgbClr val="FFFDF8"/>
           </a:solidFill>
           <a:ln w="6350">
             <a:solidFill>
-              <a:srgbClr val="0D8A6C"/>
+              <a:srgbClr val="4A9B8E"/>
             </a:solidFill>
             <a:prstDash val="solid"/>
           </a:ln>
@@ -11799,7 +12042,7 @@
             <a:r>
               <a:rPr lang="en-US" sz="750" b="1" dirty="0">
                 <a:solidFill>
-                  <a:srgbClr val="0D8A6C"/>
+                  <a:srgbClr val="4A9B8E"/>
                 </a:solidFill>
                 <a:latin typeface="Calibri" pitchFamily="34" charset="0"/>
                 <a:ea typeface="Calibri" pitchFamily="34" charset="-122"/>
@@ -11828,18 +12071,18 @@
             </a:avLst>
           </a:prstGeom>
           <a:solidFill>
-            <a:srgbClr val="161B22"/>
+            <a:srgbClr val="F5F1EB"/>
           </a:solidFill>
           <a:ln w="19050">
             <a:solidFill>
-              <a:srgbClr val="1F6FEB"/>
+              <a:srgbClr val="5B8DB8"/>
             </a:solidFill>
             <a:prstDash val="solid"/>
           </a:ln>
           <a:effectLst>
             <a:outerShdw sx="100000" sy="100000" kx="0" ky="0" algn="bl" rotWithShape="0" blurRad="76200" dist="25400" dir="2700000">
-              <a:srgbClr val="000000">
-                <a:alpha val="30000"/>
+              <a:srgbClr val="9E9488">
+                <a:alpha val="15000"/>
               </a:srgbClr>
             </a:outerShdw>
           </a:effectLst>
@@ -11908,7 +12151,7 @@
             <a:r>
               <a:rPr lang="en-US" sz="1050" b="1" dirty="0">
                 <a:solidFill>
-                  <a:srgbClr val="E6EDF3"/>
+                  <a:srgbClr val="2D2926"/>
                 </a:solidFill>
                 <a:latin typeface="Calibri" pitchFamily="34" charset="0"/>
                 <a:ea typeface="Calibri" pitchFamily="34" charset="-122"/>
@@ -11947,7 +12190,7 @@
             <a:r>
               <a:rPr lang="en-US" sz="800" dirty="0">
                 <a:solidFill>
-                  <a:srgbClr val="8B949E"/>
+                  <a:srgbClr val="8A8078"/>
                 </a:solidFill>
                 <a:latin typeface="Consolas" pitchFamily="34" charset="0"/>
                 <a:ea typeface="Consolas" pitchFamily="34" charset="-122"/>
@@ -11976,18 +12219,18 @@
             </a:avLst>
           </a:prstGeom>
           <a:solidFill>
-            <a:srgbClr val="161B22"/>
+            <a:srgbClr val="F5F1EB"/>
           </a:solidFill>
           <a:ln w="19050">
             <a:solidFill>
-              <a:srgbClr val="238636"/>
+              <a:srgbClr val="5A9B6E"/>
             </a:solidFill>
             <a:prstDash val="solid"/>
           </a:ln>
           <a:effectLst>
             <a:outerShdw sx="100000" sy="100000" kx="0" ky="0" algn="bl" rotWithShape="0" blurRad="76200" dist="25400" dir="2700000">
-              <a:srgbClr val="000000">
-                <a:alpha val="30000"/>
+              <a:srgbClr val="9E9488">
+                <a:alpha val="15000"/>
               </a:srgbClr>
             </a:outerShdw>
           </a:effectLst>
@@ -12056,7 +12299,7 @@
             <a:r>
               <a:rPr lang="en-US" sz="1050" b="1" dirty="0">
                 <a:solidFill>
-                  <a:srgbClr val="E6EDF3"/>
+                  <a:srgbClr val="2D2926"/>
                 </a:solidFill>
                 <a:latin typeface="Calibri" pitchFamily="34" charset="0"/>
                 <a:ea typeface="Calibri" pitchFamily="34" charset="-122"/>
@@ -12095,7 +12338,7 @@
             <a:r>
               <a:rPr lang="en-US" sz="800" dirty="0">
                 <a:solidFill>
-                  <a:srgbClr val="8B949E"/>
+                  <a:srgbClr val="8A8078"/>
                 </a:solidFill>
                 <a:latin typeface="Consolas" pitchFamily="34" charset="0"/>
                 <a:ea typeface="Consolas" pitchFamily="34" charset="-122"/>
@@ -12124,18 +12367,18 @@
             </a:avLst>
           </a:prstGeom>
           <a:solidFill>
-            <a:srgbClr val="161B22"/>
+            <a:srgbClr val="F5F1EB"/>
           </a:solidFill>
           <a:ln w="19050">
             <a:solidFill>
-              <a:srgbClr val="E36209"/>
+              <a:srgbClr val="C4804A"/>
             </a:solidFill>
             <a:prstDash val="solid"/>
           </a:ln>
           <a:effectLst>
             <a:outerShdw sx="100000" sy="100000" kx="0" ky="0" algn="bl" rotWithShape="0" blurRad="76200" dist="25400" dir="2700000">
-              <a:srgbClr val="000000">
-                <a:alpha val="30000"/>
+              <a:srgbClr val="9E9488">
+                <a:alpha val="15000"/>
               </a:srgbClr>
             </a:outerShdw>
           </a:effectLst>
@@ -12204,7 +12447,7 @@
             <a:r>
               <a:rPr lang="en-US" sz="1050" b="1" dirty="0">
                 <a:solidFill>
-                  <a:srgbClr val="E6EDF3"/>
+                  <a:srgbClr val="2D2926"/>
                 </a:solidFill>
                 <a:latin typeface="Calibri" pitchFamily="34" charset="0"/>
                 <a:ea typeface="Calibri" pitchFamily="34" charset="-122"/>
@@ -12243,7 +12486,7 @@
             <a:r>
               <a:rPr lang="en-US" sz="800" dirty="0">
                 <a:solidFill>
-                  <a:srgbClr val="8B949E"/>
+                  <a:srgbClr val="8A8078"/>
                 </a:solidFill>
                 <a:latin typeface="Consolas" pitchFamily="34" charset="0"/>
                 <a:ea typeface="Consolas" pitchFamily="34" charset="-122"/>
@@ -12272,18 +12515,18 @@
             </a:avLst>
           </a:prstGeom>
           <a:solidFill>
-            <a:srgbClr val="161B22"/>
+            <a:srgbClr val="F5F1EB"/>
           </a:solidFill>
           <a:ln w="19050">
             <a:solidFill>
-              <a:srgbClr val="6E40C9"/>
+              <a:srgbClr val="8B6AB5"/>
             </a:solidFill>
             <a:prstDash val="solid"/>
           </a:ln>
           <a:effectLst>
             <a:outerShdw sx="100000" sy="100000" kx="0" ky="0" algn="bl" rotWithShape="0" blurRad="76200" dist="25400" dir="2700000">
-              <a:srgbClr val="000000">
-                <a:alpha val="30000"/>
+              <a:srgbClr val="9E9488">
+                <a:alpha val="15000"/>
               </a:srgbClr>
             </a:outerShdw>
           </a:effectLst>
@@ -12352,7 +12595,7 @@
             <a:r>
               <a:rPr lang="en-US" sz="1050" b="1" dirty="0">
                 <a:solidFill>
-                  <a:srgbClr val="E6EDF3"/>
+                  <a:srgbClr val="2D2926"/>
                 </a:solidFill>
                 <a:latin typeface="Calibri" pitchFamily="34" charset="0"/>
                 <a:ea typeface="Calibri" pitchFamily="34" charset="-122"/>
@@ -12391,7 +12634,7 @@
             <a:r>
               <a:rPr lang="en-US" sz="800" dirty="0">
                 <a:solidFill>
-                  <a:srgbClr val="8B949E"/>
+                  <a:srgbClr val="8A8078"/>
                 </a:solidFill>
                 <a:latin typeface="Consolas" pitchFamily="34" charset="0"/>
                 <a:ea typeface="Consolas" pitchFamily="34" charset="-122"/>
@@ -12430,13 +12673,13 @@
             <a:r>
               <a:rPr lang="en-US" sz="1000" b="1" dirty="0">
                 <a:solidFill>
-                  <a:srgbClr val="3FB950"/>
+                  <a:srgbClr val="4A9968"/>
                 </a:solidFill>
                 <a:latin typeface="Calibri" pitchFamily="34" charset="0"/>
                 <a:ea typeface="Calibri" pitchFamily="34" charset="-122"/>
                 <a:cs typeface="Calibri" pitchFamily="34" charset="-120"/>
               </a:rPr>
-              <a:t>✅ 4 個 Container Image，全部環境一致 — Dev = Staging = Prod</a:t>
+              <a:t>✅ 4 Container Images, identical across all environments — Dev = Staging = Prod</a:t>
             </a:r>
             <a:endParaRPr lang="en-US" sz="1000" dirty="0"/>
           </a:p>
@@ -12459,11 +12702,11 @@
             </a:avLst>
           </a:prstGeom>
           <a:solidFill>
-            <a:srgbClr val="161B22"/>
+            <a:srgbClr val="F5F1EB"/>
           </a:solidFill>
           <a:ln w="19050">
             <a:solidFill>
-              <a:srgbClr val="0D8A6C"/>
+              <a:srgbClr val="4A9B8E"/>
             </a:solidFill>
             <a:prstDash val="solid"/>
           </a:ln>
@@ -12496,13 +12739,13 @@
             <a:r>
               <a:rPr lang="en-US" sz="1400" b="1" dirty="0">
                 <a:solidFill>
-                  <a:srgbClr val="0D8A6C"/>
+                  <a:srgbClr val="4A9B8E"/>
                 </a:solidFill>
                 <a:latin typeface="Calibri" pitchFamily="34" charset="0"/>
                 <a:ea typeface="Calibri" pitchFamily="34" charset="-122"/>
                 <a:cs typeface="Calibri" pitchFamily="34" charset="-120"/>
               </a:rPr>
-              <a:t>複雜度 9/10  →  5/10  ↓  維運噩夢  →  標準化部署</a:t>
+              <a:t>Complexity 9/10  →  5/10  ↓  Operations Nightmare  →  Standardized Deployment</a:t>
             </a:r>
             <a:endParaRPr lang="en-US" sz="1400" dirty="0"/>
           </a:p>
@@ -12525,11 +12768,11 @@
             </a:avLst>
           </a:prstGeom>
           <a:solidFill>
-            <a:srgbClr val="161B22"/>
+            <a:srgbClr val="F5F1EB"/>
           </a:solidFill>
           <a:ln w="12700">
             <a:solidFill>
-              <a:srgbClr val="3FB950"/>
+              <a:srgbClr val="4A9968"/>
             </a:solidFill>
             <a:prstDash val="solid"/>
           </a:ln>
@@ -12562,13 +12805,13 @@
             <a:r>
               <a:rPr lang="en-US" sz="1100" b="1" dirty="0">
                 <a:solidFill>
-                  <a:srgbClr val="E6EDF3"/>
+                  <a:srgbClr val="2D2926"/>
                 </a:solidFill>
                 <a:latin typeface="Calibri" pitchFamily="34" charset="0"/>
                 <a:ea typeface="Calibri" pitchFamily="34" charset="-122"/>
                 <a:cs typeface="Calibri" pitchFamily="34" charset="-120"/>
               </a:rPr>
-              <a:t>🔒 環境一致</a:t>
+              <a:t>🔒 Consistent Env</a:t>
             </a:r>
             <a:endParaRPr lang="en-US" sz="1100" dirty="0"/>
           </a:p>
@@ -12601,7 +12844,7 @@
             <a:r>
               <a:rPr lang="en-US" sz="900" dirty="0">
                 <a:solidFill>
-                  <a:srgbClr val="8B949E"/>
+                  <a:srgbClr val="8A8078"/>
                 </a:solidFill>
                 <a:latin typeface="Calibri" pitchFamily="34" charset="0"/>
                 <a:ea typeface="Calibri" pitchFamily="34" charset="-122"/>
@@ -12630,11 +12873,11 @@
             </a:avLst>
           </a:prstGeom>
           <a:solidFill>
-            <a:srgbClr val="161B22"/>
+            <a:srgbClr val="F5F1EB"/>
           </a:solidFill>
           <a:ln w="12700">
             <a:solidFill>
-              <a:srgbClr val="58A6FF"/>
+              <a:srgbClr val="4A7FB5"/>
             </a:solidFill>
             <a:prstDash val="solid"/>
           </a:ln>
@@ -12667,13 +12910,13 @@
             <a:r>
               <a:rPr lang="en-US" sz="1100" b="1" dirty="0">
                 <a:solidFill>
-                  <a:srgbClr val="E6EDF3"/>
+                  <a:srgbClr val="2D2926"/>
                 </a:solidFill>
                 <a:latin typeface="Calibri" pitchFamily="34" charset="0"/>
                 <a:ea typeface="Calibri" pitchFamily="34" charset="-122"/>
                 <a:cs typeface="Calibri" pitchFamily="34" charset="-120"/>
               </a:rPr>
-              <a:t>📜 版本鎖定</a:t>
+              <a:t>📜 Version Locked</a:t>
             </a:r>
             <a:endParaRPr lang="en-US" sz="1100" dirty="0"/>
           </a:p>
@@ -12706,13 +12949,13 @@
             <a:r>
               <a:rPr lang="en-US" sz="900" dirty="0">
                 <a:solidFill>
-                  <a:srgbClr val="8B949E"/>
+                  <a:srgbClr val="8A8078"/>
                 </a:solidFill>
                 <a:latin typeface="Calibri" pitchFamily="34" charset="0"/>
                 <a:ea typeface="Calibri" pitchFamily="34" charset="-122"/>
                 <a:cs typeface="Calibri" pitchFamily="34" charset="-120"/>
               </a:rPr>
-              <a:t>Image tag 隨時可回滾</a:t>
+              <a:t>Image tag = instant rollback</a:t>
             </a:r>
             <a:endParaRPr lang="en-US" sz="900" dirty="0"/>
           </a:p>
@@ -12735,11 +12978,11 @@
             </a:avLst>
           </a:prstGeom>
           <a:solidFill>
-            <a:srgbClr val="161B22"/>
+            <a:srgbClr val="F5F1EB"/>
           </a:solidFill>
           <a:ln w="12700">
             <a:solidFill>
-              <a:srgbClr val="0D8A6C"/>
+              <a:srgbClr val="4A9B8E"/>
             </a:solidFill>
             <a:prstDash val="solid"/>
           </a:ln>
@@ -12772,13 +13015,13 @@
             <a:r>
               <a:rPr lang="en-US" sz="1100" b="1" dirty="0">
                 <a:solidFill>
-                  <a:srgbClr val="E6EDF3"/>
+                  <a:srgbClr val="2D2926"/>
                 </a:solidFill>
                 <a:latin typeface="Calibri" pitchFamily="34" charset="0"/>
                 <a:ea typeface="Calibri" pitchFamily="34" charset="-122"/>
                 <a:cs typeface="Calibri" pitchFamily="34" charset="-120"/>
               </a:rPr>
-              <a:t>⚡ 快速部署</a:t>
+              <a:t>⚡ Rapid Deployment</a:t>
             </a:r>
             <a:endParaRPr lang="en-US" sz="1100" dirty="0"/>
           </a:p>
@@ -12811,13 +13054,13 @@
             <a:r>
               <a:rPr lang="en-US" sz="900" dirty="0">
                 <a:solidFill>
-                  <a:srgbClr val="8B949E"/>
+                  <a:srgbClr val="8A8078"/>
                 </a:solidFill>
                 <a:latin typeface="Calibri" pitchFamily="34" charset="0"/>
                 <a:ea typeface="Calibri" pitchFamily="34" charset="-122"/>
                 <a:cs typeface="Calibri" pitchFamily="34" charset="-120"/>
               </a:rPr>
-              <a:t>docker pull + run，秒級</a:t>
+              <a:t>docker pull + run in seconds</a:t>
             </a:r>
             <a:endParaRPr lang="en-US" sz="900" dirty="0"/>
           </a:p>
